--- a/presentacion/Practica4_Deteccion_Tracking.pptx
+++ b/presentacion/Practica4_Deteccion_Tracking.pptx
@@ -40,9 +40,10 @@
     <p:sldId id="288" r:id="rId34"/>
     <p:sldId id="289" r:id="rId35"/>
     <p:sldId id="290" r:id="rId36"/>
+    <p:sldId id="291" r:id="rId37"/>
   </p:sldIdLst>
   <p:notesMasterIdLst>
-    <p:notesMasterId r:id="rId37"/>
+    <p:notesMasterId r:id="rId38"/>
   </p:notesMasterIdLst>
   <p:sldSz cx="9144000" cy="5143500"/>
   <p:notesSz cx="5143500" cy="9144000"/>
@@ -141,7 +142,7 @@
   <p:extLst>
     <p:ext uri="{521415D9-36F7-43E2-AB2F-B90AF26B5E84}">
       <p14:sectionLst xmlns:p14="http://schemas.microsoft.com/office/powerpoint/2010/main">
-        <p14:section name="Introducción" id="{429beb74-1da3-91cc-8406-d8e025e51f16}">
+        <p14:section name="Introducción" id="{d2e51008-7861-bd32-91f6-dc24be4b275b}">
           <p14:sldIdLst>
             <p14:sldId id="256"/>
             <p14:sldId id="257"/>
@@ -149,7 +150,7 @@
             <p14:sldId id="259"/>
           </p14:sldIdLst>
         </p14:section>
-        <p14:section name="Metodología" id="{0987b2a4-5fdc-4cb6-ba01-3fceb3958d3a}">
+        <p14:section name="Metodología" id="{90b26e35-5e6c-e26e-fcda-2270a730a117}">
           <p14:sldIdLst>
             <p14:sldId id="260"/>
             <p14:sldId id="261"/>
@@ -166,16 +167,16 @@
             <p14:sldId id="272"/>
             <p14:sldId id="273"/>
             <p14:sldId id="274"/>
-          </p14:sldIdLst>
-        </p14:section>
-        <p14:section name="Evaluación" id="{3e20fbe8-19e4-f710-edbb-4acf42a7e4b0}">
-          <p14:sldIdLst>
             <p14:sldId id="275"/>
           </p14:sldIdLst>
         </p14:section>
-        <p14:section name="Resultados" id="{e4e24129-f9bf-d578-c230-eacd2bbd71c7}">
+        <p14:section name="Evaluación" id="{ed74f390-54d6-6d51-b1c3-7d333f66979f}">
           <p14:sldIdLst>
             <p14:sldId id="276"/>
+          </p14:sldIdLst>
+        </p14:section>
+        <p14:section name="Resultados" id="{75346fb0-460e-62d9-89df-41d291a06b56}">
+          <p14:sldIdLst>
             <p14:sldId id="277"/>
             <p14:sldId id="278"/>
             <p14:sldId id="279"/>
@@ -186,14 +187,15 @@
             <p14:sldId id="284"/>
             <p14:sldId id="285"/>
             <p14:sldId id="286"/>
+            <p14:sldId id="287"/>
           </p14:sldIdLst>
         </p14:section>
-        <p14:section name="Cierre" id="{08e1e82d-8587-0c77-4952-2ca829cf9285}">
+        <p14:section name="Cierre" id="{0b2c67bb-3fd0-2f49-f822-ce8826d37040}">
           <p14:sldIdLst>
-            <p14:sldId id="287"/>
             <p14:sldId id="288"/>
             <p14:sldId id="289"/>
             <p14:sldId id="290"/>
+            <p14:sldId id="291"/>
           </p14:sldIdLst>
         </p14:section>
       </p14:sectionLst>
@@ -948,6 +950,387 @@
 </file>
 
 <file path=ppt/charts/chart3.xml><?xml version="1.0" encoding="utf-8"?>
+<c:chartSpace xmlns:c="http://schemas.openxmlformats.org/drawingml/2006/chart" xmlns:a="http://schemas.openxmlformats.org/drawingml/2006/main" xmlns:r="http://schemas.openxmlformats.org/officeDocument/2006/relationships">
+  <c:date1904 val="0"/>
+  <c:roundedCorners val="1"/>
+  <c:chart>
+    <c:title>
+      <c:tx>
+        <c:rich>
+          <a:bodyPr/>
+          <a:lstStyle/>
+          <a:p>
+            <a:pPr>
+              <a:defRPr sz="1200" b="0" i="0" u="none" strike="noStrike">
+                <a:solidFill>
+                  <a:srgbClr val="1A1A1A"/>
+                </a:solidFill>
+                <a:latin typeface="Calibri"/>
+              </a:defRPr>
+            </a:pPr>
+            <a:r>
+              <a:rPr sz="1200" b="0" i="0" u="none" strike="noStrike">
+                <a:solidFill>
+                  <a:srgbClr val="1A1A1A"/>
+                </a:solidFill>
+                <a:latin typeface="Calibri"/>
+              </a:rPr>
+              <a:t>Lado típico √(w·h), px (mediana)</a:t>
+            </a:r>
+          </a:p>
+        </c:rich>
+      </c:tx>
+      <c:layout/>
+      <c:overlay val="0"/>
+    </c:title>
+    <c:autoTitleDeleted val="0"/>
+    <c:plotArea>
+      <c:layout/>
+      <c:barChart>
+        <c:barDir val="col"/>
+        <c:grouping val="clustered"/>
+        <c:varyColors val="0"/>
+        <c:ser>
+          <c:idx val="0"/>
+          <c:order val="0"/>
+          <c:tx>
+            <c:strRef>
+              <c:f>Sheet1!$B$1</c:f>
+              <c:strCache>
+                <c:ptCount val="1"/>
+                <c:pt idx="0">
+                  <c:v>Vehículos del GT</c:v>
+                </c:pt>
+              </c:strCache>
+            </c:strRef>
+          </c:tx>
+          <c:spPr>
+            <a:solidFill>
+              <a:srgbClr val="1B3A66"/>
+            </a:solidFill>
+            <a:effectLst/>
+          </c:spPr>
+          <c:invertIfNegative val="0"/>
+          <c:dLbls>
+            <c:numFmt formatCode="0" sourceLinked="0"/>
+            <c:txPr>
+              <a:bodyPr/>
+              <a:lstStyle/>
+              <a:p>
+                <a:pPr>
+                  <a:defRPr b="0" i="0" strike="noStrike" sz="900" u="none">
+                    <a:solidFill>
+                      <a:srgbClr val="000000"/>
+                    </a:solidFill>
+                    <a:latin typeface="Arial"/>
+                  </a:defRPr>
+                </a:pPr>
+              </a:p>
+            </c:txPr>
+            <c:showLegendKey val="0"/>
+            <c:showVal val="1"/>
+            <c:showCatName val="0"/>
+            <c:showSerName val="0"/>
+            <c:showPercent val="0"/>
+            <c:showBubbleSize val="0"/>
+            <c:showLeaderLines val="0"/>
+          </c:dLbls>
+          <c:cat>
+            <c:multiLvlStrRef>
+              <c:f>Sheet1!$A$2:$A$5</c:f>
+              <c:multiLvlStrCache>
+                <c:ptCount val="4"/>
+                <c:lvl>
+                  <c:pt idx="0">
+                    <c:v>M1101</c:v>
+                  </c:pt>
+                  <c:pt idx="1">
+                    <c:v>M1007</c:v>
+                  </c:pt>
+                  <c:pt idx="2">
+                    <c:v>M0701</c:v>
+                  </c:pt>
+                  <c:pt idx="3">
+                    <c:v>M0601</c:v>
+                  </c:pt>
+                </c:lvl>
+              </c:multiLvlStrCache>
+            </c:multiLvlStrRef>
+          </c:cat>
+          <c:val>
+            <c:numRef>
+              <c:f>Sheet1!$B$2:$B$5</c:f>
+              <c:numCache>
+                <c:formatCode>General</c:formatCode>
+                <c:ptCount val="4"/>
+                <c:pt idx="0">
+                  <c:v>37.815340802378074</c:v>
+                </c:pt>
+                <c:pt idx="1">
+                  <c:v>32.01562118716424</c:v>
+                </c:pt>
+                <c:pt idx="2">
+                  <c:v>19.078784028338912</c:v>
+                </c:pt>
+                <c:pt idx="3">
+                  <c:v>16.30950643030009</c:v>
+                </c:pt>
+              </c:numCache>
+            </c:numRef>
+          </c:val>
+        </c:ser>
+        <c:ser>
+          <c:idx val="1"/>
+          <c:order val="1"/>
+          <c:tx>
+            <c:strRef>
+              <c:f>Sheet1!$C$1</c:f>
+              <c:strCache>
+                <c:ptCount val="1"/>
+                <c:pt idx="0">
+                  <c:v>Falsos positivos persistentes</c:v>
+                </c:pt>
+              </c:strCache>
+            </c:strRef>
+          </c:tx>
+          <c:spPr>
+            <a:solidFill>
+              <a:srgbClr val="FFC04D"/>
+            </a:solidFill>
+            <a:effectLst/>
+          </c:spPr>
+          <c:invertIfNegative val="0"/>
+          <c:dLbls>
+            <c:numFmt formatCode="0" sourceLinked="0"/>
+            <c:txPr>
+              <a:bodyPr/>
+              <a:lstStyle/>
+              <a:p>
+                <a:pPr>
+                  <a:defRPr b="0" i="0" strike="noStrike" sz="900" u="none">
+                    <a:solidFill>
+                      <a:srgbClr val="000000"/>
+                    </a:solidFill>
+                    <a:latin typeface="Arial"/>
+                  </a:defRPr>
+                </a:pPr>
+              </a:p>
+            </c:txPr>
+            <c:showLegendKey val="0"/>
+            <c:showVal val="1"/>
+            <c:showCatName val="0"/>
+            <c:showSerName val="0"/>
+            <c:showPercent val="0"/>
+            <c:showBubbleSize val="0"/>
+            <c:showLeaderLines val="0"/>
+          </c:dLbls>
+          <c:cat>
+            <c:multiLvlStrRef>
+              <c:f>Sheet1!$A$2:$A$5</c:f>
+              <c:multiLvlStrCache>
+                <c:ptCount val="4"/>
+                <c:lvl>
+                  <c:pt idx="0">
+                    <c:v>M1101</c:v>
+                  </c:pt>
+                  <c:pt idx="1">
+                    <c:v>M1007</c:v>
+                  </c:pt>
+                  <c:pt idx="2">
+                    <c:v>M0701</c:v>
+                  </c:pt>
+                  <c:pt idx="3">
+                    <c:v>M0601</c:v>
+                  </c:pt>
+                </c:lvl>
+              </c:multiLvlStrCache>
+            </c:multiLvlStrRef>
+          </c:cat>
+          <c:val>
+            <c:numRef>
+              <c:f>Sheet1!$C$2:$C$5</c:f>
+              <c:numCache>
+                <c:formatCode>General</c:formatCode>
+                <c:ptCount val="4"/>
+                <c:pt idx="0">
+                  <c:v>17.692918821268904</c:v>
+                </c:pt>
+                <c:pt idx="1">
+                  <c:v>17.981294177975585</c:v>
+                </c:pt>
+                <c:pt idx="2">
+                  <c:v>15.703159932330761</c:v>
+                </c:pt>
+                <c:pt idx="3">
+                  <c:v>10.909819476553249</c:v>
+                </c:pt>
+              </c:numCache>
+            </c:numRef>
+          </c:val>
+        </c:ser>
+        <c:dLbls>
+          <c:numFmt formatCode="0" sourceLinked="0"/>
+          <c:txPr>
+            <a:bodyPr/>
+            <a:lstStyle/>
+            <a:p>
+              <a:pPr>
+                <a:defRPr b="0" i="0" strike="noStrike" sz="900" u="none">
+                  <a:solidFill>
+                    <a:srgbClr val="000000"/>
+                  </a:solidFill>
+                  <a:latin typeface="Arial"/>
+                </a:defRPr>
+              </a:pPr>
+            </a:p>
+          </c:txPr>
+          <c:showLegendKey val="0"/>
+          <c:showVal val="1"/>
+          <c:showCatName val="0"/>
+          <c:showSerName val="0"/>
+          <c:showPercent val="0"/>
+          <c:showBubbleSize val="0"/>
+          <c:showLeaderLines val="0"/>
+        </c:dLbls>
+        <c:gapWidth val="150"/>
+        <c:overlap val="0"/>
+        <c:axId val="2094734554"/>
+        <c:axId val="2094734552"/>
+        <c:axId val="2094734556"/>
+      </c:barChart>
+      <c:catAx>
+        <c:axId val="2094734554"/>
+        <c:scaling>
+          <c:orientation val="minMax"/>
+        </c:scaling>
+        <c:delete val="0"/>
+        <c:axPos val="b"/>
+        <c:numFmt formatCode="General" sourceLinked="1"/>
+        <c:majorTickMark val="out"/>
+        <c:minorTickMark val="none"/>
+        <c:tickLblPos val="low"/>
+        <c:spPr>
+          <a:ln w="12700" cap="flat">
+            <a:solidFill>
+              <a:srgbClr val="888888"/>
+            </a:solidFill>
+            <a:prstDash val="solid"/>
+            <a:round/>
+          </a:ln>
+        </c:spPr>
+        <c:txPr>
+          <a:bodyPr/>
+          <a:lstStyle/>
+          <a:p>
+            <a:pPr>
+              <a:defRPr sz="1000" b="0" i="0" u="none" strike="noStrike">
+                <a:solidFill>
+                  <a:srgbClr val="4B5563"/>
+                </a:solidFill>
+                <a:latin typeface="Calibri"/>
+              </a:defRPr>
+            </a:pPr>
+            <a:endParaRPr lang="en-US"/>
+          </a:p>
+        </c:txPr>
+        <c:crossAx val="2094734552"/>
+        <c:crosses val="autoZero"/>
+        <c:auto val="1"/>
+        <c:lblAlgn val="ctr"/>
+        <c:noMultiLvlLbl val="1"/>
+      </c:catAx>
+      <c:valAx>
+        <c:axId val="2094734552"/>
+        <c:scaling>
+          <c:orientation val="minMax"/>
+        </c:scaling>
+        <c:delete val="0"/>
+        <c:axPos val="l"/>
+        <c:majorGridlines>
+          <c:spPr>
+            <a:ln w="6350" cap="flat">
+              <a:solidFill>
+                <a:srgbClr val="E5E7EB"/>
+              </a:solidFill>
+              <a:prstDash val="solid"/>
+              <a:round/>
+            </a:ln>
+          </c:spPr>
+        </c:majorGridlines>
+        <c:numFmt formatCode="General" sourceLinked="0"/>
+        <c:majorTickMark val="out"/>
+        <c:minorTickMark val="none"/>
+        <c:tickLblPos val="nextTo"/>
+        <c:spPr>
+          <a:ln w="12700" cap="flat">
+            <a:solidFill>
+              <a:srgbClr val="888888"/>
+            </a:solidFill>
+            <a:prstDash val="solid"/>
+            <a:round/>
+          </a:ln>
+        </c:spPr>
+        <c:txPr>
+          <a:bodyPr/>
+          <a:lstStyle/>
+          <a:p>
+            <a:pPr>
+              <a:defRPr sz="900" b="0" i="0" u="none" strike="noStrike">
+                <a:solidFill>
+                  <a:srgbClr val="4B5563"/>
+                </a:solidFill>
+                <a:latin typeface="Calibri"/>
+              </a:defRPr>
+            </a:pPr>
+            <a:endParaRPr lang="en-US"/>
+          </a:p>
+        </c:txPr>
+        <c:crossAx val="2094734554"/>
+        <c:crosses val="autoZero"/>
+        <c:crossBetween val="between"/>
+      </c:valAx>
+      <c:spPr>
+        <a:noFill/>
+        <a:ln>
+          <a:noFill/>
+        </a:ln>
+        <a:effectLst/>
+      </c:spPr>
+    </c:plotArea>
+    <c:legend>
+      <c:legendPos val="b"/>
+      <c:overlay val="0"/>
+      <c:txPr>
+        <a:bodyPr/>
+        <a:lstStyle/>
+        <a:p>
+          <a:pPr>
+            <a:defRPr sz="1000">
+              <a:latin typeface="Calibri"/>
+              <a:cs typeface="Calibri"/>
+            </a:defRPr>
+          </a:pPr>
+          <a:endParaRPr lang="en-US"/>
+        </a:p>
+      </c:txPr>
+    </c:legend>
+    <c:plotVisOnly val="1"/>
+    <c:dispBlanksAs val="span"/>
+  </c:chart>
+  <c:spPr>
+    <a:noFill/>
+    <a:ln>
+      <a:noFill/>
+    </a:ln>
+    <a:effectLst/>
+  </c:spPr>
+  <c:externalData r:id="rId1">
+    <c:autoUpdate val="0"/>
+  </c:externalData>
+</c:chartSpace>
+</file>
+
+<file path=ppt/charts/chart4.xml><?xml version="1.0" encoding="utf-8"?>
 <c:chartSpace xmlns:c="http://schemas.openxmlformats.org/drawingml/2006/chart" xmlns:a="http://schemas.openxmlformats.org/drawingml/2006/main" xmlns:r="http://schemas.openxmlformats.org/officeDocument/2006/relationships">
   <c:date1904 val="0"/>
   <c:roundedCorners val="1"/>
@@ -1523,7 +1906,7 @@
               <c:strCache>
                 <c:ptCount val="1"/>
                 <c:pt idx="0">
-                  <c:v>SAHI + YOLO26 + ByteTrack</c:v>
+                  <c:v>SAHI + fusión + filtro de escala</c:v>
                 </c:pt>
               </c:strCache>
             </c:strRef>
@@ -1636,64 +2019,64 @@
                 <c:formatCode>General</c:formatCode>
                 <c:ptCount val="20"/>
                 <c:pt idx="0">
-                  <c:v>0.508245579177429</c:v>
+                  <c:v>0.6660043711504073</c:v>
                 </c:pt>
                 <c:pt idx="1">
-                  <c:v>0.7401801111324009</c:v>
+                  <c:v>0.8610844989461582</c:v>
                 </c:pt>
                 <c:pt idx="2">
-                  <c:v>0.6798469387755102</c:v>
+                  <c:v>0.8022959183673469</c:v>
                 </c:pt>
                 <c:pt idx="3">
-                  <c:v>0.31493403021225064</c:v>
+                  <c:v>0.6340748294983747</c:v>
                 </c:pt>
                 <c:pt idx="4">
-                  <c:v>0.9035110876451954</c:v>
+                  <c:v>0.9126517951425555</c:v>
                 </c:pt>
                 <c:pt idx="5">
-                  <c:v>-0.02034063260340635</c:v>
+                  <c:v>-0.047785888077858774</c:v>
                 </c:pt>
                 <c:pt idx="6">
-                  <c:v>0.2881159739830228</c:v>
+                  <c:v>0.40464116414948736</c:v>
                 </c:pt>
                 <c:pt idx="7">
-                  <c:v>0.6470151385318481</c:v>
+                  <c:v>0.7766923736075407</c:v>
                 </c:pt>
                 <c:pt idx="8">
-                  <c:v>0.30214024293215935</c:v>
+                  <c:v>0.28549832917838014</c:v>
                 </c:pt>
                 <c:pt idx="9">
-                  <c:v>0.7549785732291404</c:v>
+                  <c:v>0.8880766322157801</c:v>
                 </c:pt>
                 <c:pt idx="10">
-                  <c:v>0.6842967086949403</c:v>
+                  <c:v>0.7389225478958572</c:v>
                 </c:pt>
                 <c:pt idx="11">
-                  <c:v>0.6535562278857494</c:v>
+                  <c:v>0.6212501922978308</c:v>
                 </c:pt>
                 <c:pt idx="12">
-                  <c:v>0.3411090648659709</c:v>
+                  <c:v>0.4325762226314712</c:v>
                 </c:pt>
                 <c:pt idx="13">
-                  <c:v>0.11831298557158709</c:v>
+                  <c:v>0.039511653718090956</c:v>
                 </c:pt>
                 <c:pt idx="14">
-                  <c:v>0.849426526811097</c:v>
+                  <c:v>0.9007940398000196</c:v>
                 </c:pt>
                 <c:pt idx="15">
-                  <c:v>-0.4384095634095635</c:v>
+                  <c:v>-0.19399688149688155</c:v>
                 </c:pt>
                 <c:pt idx="16">
-                  <c:v>0.5915436882896273</c:v>
+                  <c:v>0.6141310117846905</c:v>
                 </c:pt>
                 <c:pt idx="17">
-                  <c:v>0.32442899702085404</c:v>
+                  <c:v>0.656901688182721</c:v>
                 </c:pt>
                 <c:pt idx="18">
-                  <c:v>0.80510395112819</c:v>
+                  <c:v>0.8084540348802838</c:v>
                 </c:pt>
                 <c:pt idx="19">
-                  <c:v>0.4101309649254855</c:v>
+                  <c:v>0.4555923528526268</c:v>
                 </c:pt>
               </c:numCache>
             </c:numRef>
@@ -1790,7 +2173,7 @@
             </a:ln>
           </c:spPr>
         </c:majorGridlines>
-        <c:numFmt formatCode="General" sourceLinked="0"/>
+        <c:numFmt formatCode="0.0" sourceLinked="0"/>
         <c:majorTickMark val="out"/>
         <c:minorTickMark val="none"/>
         <c:tickLblPos val="nextTo"/>
@@ -3139,7 +3522,7 @@
           <a:p>
             <a:r>
               <a:rPr lang="en-US" dirty="0"/>
-              <a:t/>
+              <a:t>La fusión del método 5 anterior pasa a ser parte del método 4. La novedad es cómo entra SAHI: comparte el voto con YOLO26 porque son el mismo modelo.</a:t>
             </a:r>
             <a:endParaRPr lang="en-US" dirty="0"/>
           </a:p>
@@ -3315,7 +3698,7 @@
           <a:p>
             <a:r>
               <a:rPr lang="en-US" dirty="0"/>
-              <a:t/>
+              <a:t>Este análisis cambió la hipótesis inicial: pensábamos en autos estacionados, pero los FP no son estáticos sino demasiado pequeños para la escena. El filtro estático no mejoró en validación cruzada; el de escala sí (+0,015 de MOTA).</a:t>
             </a:r>
             <a:endParaRPr lang="en-US" dirty="0"/>
           </a:p>
@@ -3403,7 +3786,7 @@
           <a:p>
             <a:r>
               <a:rPr lang="en-US" dirty="0"/>
-              <a:t>MOTA promedio = promedio simple de las 20 secuencias (lo que pide el PDF). La última columna es la estimación sin sesgo: MOTA en las secuencias que no se usaron para ajustar.</a:t>
+              <a:t/>
             </a:r>
             <a:endParaRPr lang="en-US" dirty="0"/>
           </a:p>
@@ -3491,7 +3874,7 @@
           <a:p>
             <a:r>
               <a:rPr lang="en-US" dirty="0"/>
-              <a:t>MOTA por secuencia de los 4 métodos ajustados. Las secuencias M0403, M0205, M0801 y M1009 salen bien; M1101, M1007, M0601 y M0602 salen mal (noche con destellos y vehículos de ~12 px).</a:t>
+              <a:t>MOTA promedio = promedio simple de las 20 secuencias (lo que pide el PDF). La última columna es la estimación sin sesgo: MOTA en las secuencias que no se usaron para ajustar. La corrida en GPU del método 4 reproduce la de las detecciones cacheadas (MOTA global 0,548 en ambas).</a:t>
             </a:r>
             <a:endParaRPr lang="en-US" dirty="0"/>
           </a:p>
@@ -3579,7 +3962,7 @@
           <a:p>
             <a:r>
               <a:rPr lang="en-US" dirty="0"/>
-              <a:t>Un primer ajuste sobre solo 5 secuencias dio MOTA 0,70 ahí y 0,22 en las 15 restantes: sobreajuste. La validación cruzada evita ese espejismo.</a:t>
+              <a:t>MOTA por secuencia de los 4 métodos ajustados. Las secuencias M0403, M0205, M0801 y M1009 salen bien; M1101, M1007, M0601 y M0602 salen mal (noche con destellos y vehículos de ~12 px). El método 4 es el único que no cae por debajo de −0,2 en M1101.</a:t>
             </a:r>
             <a:endParaRPr lang="en-US" dirty="0"/>
           </a:p>
@@ -3667,7 +4050,7 @@
           <a:p>
             <a:r>
               <a:rPr lang="en-US" dirty="0"/>
-              <a:t/>
+              <a:t>Un primer ajuste sobre solo 5 secuencias dio MOTA 0,70 ahí y 0,22 en las 15 restantes: sobreajuste. La validación cruzada evita ese espejismo.</a:t>
             </a:r>
             <a:endParaRPr lang="en-US" dirty="0"/>
           </a:p>
@@ -4019,7 +4402,7 @@
           <a:p>
             <a:r>
               <a:rPr lang="en-US" dirty="0"/>
-              <a:t>Con 20 secuencias, gran altura (2) y vista cenital (4) son medias frágiles. La correlación entre el MOTA y el tamaño mediano del vehículo es +0,48; con la densidad, casi cero.</a:t>
+              <a:t/>
             </a:r>
             <a:endParaRPr lang="en-US" dirty="0"/>
           </a:p>
@@ -4107,7 +4490,7 @@
           <a:p>
             <a:r>
               <a:rPr lang="en-US" dirty="0"/>
-              <a:t>python -I scripts/make_demos.py --method method2_yolo26_bytetrack_cv --seq M0403 --frames 100 130 160 --crop 250 40 750 540 --trail 25</a:t>
+              <a:t>Con 20 secuencias, gran altura (2) y vista cenital (4) son medias frágiles. La correlación entre el MOTA y el tamaño mediano del vehículo es +0,48; con la densidad, casi cero.</a:t>
             </a:r>
             <a:endParaRPr lang="en-US" dirty="0"/>
           </a:p>
@@ -4283,7 +4666,7 @@
           <a:p>
             <a:r>
               <a:rPr lang="en-US" dirty="0"/>
-              <a:t>YOLO perdía el 78 % de esta secuencia con vehículos de tamaño normal (mediana 36 px): no es un problema de resolución sino de dominio, vista oblicua frente a cenital.</a:t>
+              <a:t>python -I scripts/make_demos.py --method method2_yolo26_bytetrack_cv --seq M0403 --frames 100 130 160 --crop 250 40 750 540 --trail 25</a:t>
             </a:r>
             <a:endParaRPr lang="en-US" dirty="0"/>
           </a:p>
@@ -4371,7 +4754,7 @@
           <a:p>
             <a:r>
               <a:rPr lang="en-US" dirty="0"/>
-              <a:t/>
+              <a:t>YOLO perdía el 78 % de esta secuencia con vehículos de tamaño normal (mediana 36 px): no es un problema de resolución sino de dominio, vista oblicua frente a cenital.</a:t>
             </a:r>
             <a:endParaRPr lang="en-US" dirty="0"/>
           </a:p>
@@ -4747,6 +5130,94 @@
             <a:fld id="{F7021451-1387-4CA6-816F-3879F97B5CBC}" type="slidenum">
               <a:rPr lang="en-US"/>
               <a:t>35</a:t>
+            </a:fld>
+            <a:endParaRPr lang="en-US"/>
+          </a:p>
+        </p:txBody>
+      </p:sp>
+    </p:spTree>
+    <p:extLst>
+      <p:ext uri="{BB962C8B-B14F-4D97-AF65-F5344CB8AC3E}">
+        <p14:creationId xmlns:p14="http://schemas.microsoft.com/office/powerpoint/2010/main" val="1024086991"/>
+      </p:ext>
+    </p:extLst>
+  </p:cSld>
+  <p:clrMapOvr>
+    <a:masterClrMapping/>
+  </p:clrMapOvr>
+</p:notes>
+</file>
+
+<file path=ppt/notesSlides/notesSlide36.xml><?xml version="1.0" encoding="utf-8"?>
+<p:notes xmlns:a="http://schemas.openxmlformats.org/drawingml/2006/main" xmlns:r="http://schemas.openxmlformats.org/officeDocument/2006/relationships" xmlns:p="http://schemas.openxmlformats.org/presentationml/2006/main">
+  <p:cSld>
+    <p:spTree>
+      <p:nvGrpSpPr>
+        <p:cNvPr id="1" name=""/>
+        <p:cNvGrpSpPr/>
+        <p:nvPr/>
+      </p:nvGrpSpPr>
+      <p:grpSpPr>
+        <a:xfrm>
+          <a:off x="0" y="0"/>
+          <a:ext cx="0" cy="0"/>
+          <a:chOff x="0" y="0"/>
+          <a:chExt cx="0" cy="0"/>
+        </a:xfrm>
+      </p:grpSpPr>
+      <p:sp>
+        <p:nvSpPr>
+          <p:cNvPr id="2" name="Slide Image Placeholder 1"/>
+          <p:cNvSpPr>
+            <a:spLocks noGrp="1" noRot="1" noChangeAspect="1"/>
+          </p:cNvSpPr>
+          <p:nvPr>
+            <p:ph type="sldImg"/>
+          </p:nvPr>
+        </p:nvSpPr>
+        <p:spPr/>
+      </p:sp>
+      <p:sp>
+        <p:nvSpPr>
+          <p:cNvPr id="3" name="Notes Placeholder 2"/>
+          <p:cNvSpPr>
+            <a:spLocks noGrp="1"/>
+          </p:cNvSpPr>
+          <p:nvPr>
+            <p:ph type="body" idx="1"/>
+          </p:nvPr>
+        </p:nvSpPr>
+        <p:spPr/>
+        <p:txBody>
+          <a:bodyPr/>
+          <a:lstStyle/>
+          <a:p>
+            <a:r>
+              <a:rPr lang="en-US" dirty="0"/>
+              <a:t/>
+            </a:r>
+            <a:endParaRPr lang="en-US" dirty="0"/>
+          </a:p>
+        </p:txBody>
+      </p:sp>
+      <p:sp>
+        <p:nvSpPr>
+          <p:cNvPr id="4" name="Slide Number Placeholder 3"/>
+          <p:cNvSpPr>
+            <a:spLocks noGrp="1"/>
+          </p:cNvSpPr>
+          <p:nvPr>
+            <p:ph type="sldNum" sz="quarter" idx="10"/>
+          </p:nvPr>
+        </p:nvSpPr>
+        <p:spPr/>
+        <p:txBody>
+          <a:bodyPr/>
+          <a:lstStyle/>
+          <a:p>
+            <a:fld id="{F7021451-1387-4CA6-816F-3879F97B5CBC}" type="slidenum">
+              <a:rPr lang="en-US"/>
+              <a:t>36</a:t>
             </a:fld>
             <a:endParaRPr lang="en-US"/>
           </a:p>
@@ -9954,7 +10425,7 @@
       </p:sp>
       <p:pic>
         <p:nvPicPr>
-          <p:cNvPr id="3" name="Image 0" descr="/home/marcelino.maita/courses/deep_learning/practica-4/presentacion/fig/gmc_flow.jpg">    </p:cNvPr>
+          <p:cNvPr id="3" name="Image 0" descr="/home/claude/p4/presentacion/fig/gmc_flow.jpg">    </p:cNvPr>
           <p:cNvPicPr>
             <a:picLocks noChangeAspect="1"/>
           </p:cNvPicPr>
@@ -11138,7 +11609,7 @@
       </p:sp>
       <p:pic>
         <p:nvPicPr>
-          <p:cNvPr id="3" name="Image 0" descr="/home/marcelino.maita/courses/deep_learning/practica-4/presentacion/fig/sahi_slices.jpg">    </p:cNvPr>
+          <p:cNvPr id="3" name="Image 0" descr="/home/claude/p4/presentacion/fig/sahi_slices.jpg">    </p:cNvPr>
           <p:cNvPicPr>
             <a:picLocks noChangeAspect="1"/>
           </p:cNvPicPr>
@@ -13855,14 +14326,8 @@
                     <a:lnT w="0" cap="flat" cmpd="sng" algn="ctr">
                       <a:noFill/>
                     </a:lnT>
-                    <a:lnB w="19050" cap="flat" cmpd="sng" algn="ctr">
-                      <a:solidFill>
-                        <a:srgbClr val="1A1A1A"/>
-                      </a:solidFill>
-                      <a:prstDash val="solid"/>
-                      <a:round/>
-                      <a:headEnd type="none" w="med" len="med"/>
-                      <a:tailEnd type="none" w="med" len="med"/>
+                    <a:lnB w="0" cap="flat" cmpd="sng" algn="ctr">
+                      <a:noFill/>
                     </a:lnB>
                   </a:tcPr>
                 </a:tc>
@@ -13902,14 +14367,8 @@
                     <a:lnT w="0" cap="flat" cmpd="sng" algn="ctr">
                       <a:noFill/>
                     </a:lnT>
-                    <a:lnB w="19050" cap="flat" cmpd="sng" algn="ctr">
-                      <a:solidFill>
-                        <a:srgbClr val="1A1A1A"/>
-                      </a:solidFill>
-                      <a:prstDash val="solid"/>
-                      <a:round/>
-                      <a:headEnd type="none" w="med" len="med"/>
-                      <a:tailEnd type="none" w="med" len="med"/>
+                    <a:lnB w="0" cap="flat" cmpd="sng" algn="ctr">
+                      <a:noFill/>
                     </a:lnB>
                   </a:tcPr>
                 </a:tc>
@@ -13949,6 +14408,143 @@
                     <a:lnT w="0" cap="flat" cmpd="sng" algn="ctr">
                       <a:noFill/>
                     </a:lnT>
+                    <a:lnB w="0" cap="flat" cmpd="sng" algn="ctr">
+                      <a:noFill/>
+                    </a:lnB>
+                  </a:tcPr>
+                </a:tc>
+              </a:tr>
+              <a:tr h="420624">
+                <a:tc>
+                  <a:txBody>
+                    <a:bodyPr/>
+                    <a:lstStyle/>
+                    <a:p>
+                      <a:pPr algn="l" indent="0" marL="0">
+                        <a:buNone/>
+                      </a:pPr>
+                      <a:r>
+                        <a:rPr lang="en-US" sz="1300" dirty="0">
+                          <a:solidFill>
+                            <a:srgbClr val="1A1A1A"/>
+                          </a:solidFill>
+                          <a:latin typeface="Cambria" pitchFamily="34" charset="0"/>
+                          <a:ea typeface="Cambria" pitchFamily="34" charset="-122"/>
+                          <a:cs typeface="Cambria" pitchFamily="34" charset="-120"/>
+                        </a:rPr>
+                        <a:t>IoU fusión · ρ · largo mín.</a:t>
+                      </a:r>
+                      <a:endParaRPr lang="en-US" sz="1300" dirty="0">
+                        <a:latin typeface="Cambria" charset="0"/>
+                        <a:ea typeface="Cambria" charset="0"/>
+                        <a:cs typeface="Cambria" charset="0"/>
+                      </a:endParaRPr>
+                    </a:p>
+                  </a:txBody>
+                  <a:tcPr marL="73152" marR="73152" marT="45720" marB="45720" anchor="ctr">
+                    <a:lnL w="0" cap="flat" cmpd="sng" algn="ctr">
+                      <a:noFill/>
+                    </a:lnL>
+                    <a:lnR w="0" cap="flat" cmpd="sng" algn="ctr">
+                      <a:noFill/>
+                    </a:lnR>
+                    <a:lnT w="0" cap="flat" cmpd="sng" algn="ctr">
+                      <a:noFill/>
+                    </a:lnT>
+                    <a:lnB w="19050" cap="flat" cmpd="sng" algn="ctr">
+                      <a:solidFill>
+                        <a:srgbClr val="1A1A1A"/>
+                      </a:solidFill>
+                      <a:prstDash val="solid"/>
+                      <a:round/>
+                      <a:headEnd type="none" w="med" len="med"/>
+                      <a:tailEnd type="none" w="med" len="med"/>
+                    </a:lnB>
+                  </a:tcPr>
+                </a:tc>
+                <a:tc>
+                  <a:txBody>
+                    <a:bodyPr/>
+                    <a:lstStyle/>
+                    <a:p>
+                      <a:pPr algn="ctr" indent="0" marL="0">
+                        <a:buNone/>
+                      </a:pPr>
+                      <a:r>
+                        <a:rPr lang="en-US" sz="1300" dirty="0">
+                          <a:solidFill>
+                            <a:srgbClr val="1A1A1A"/>
+                          </a:solidFill>
+                          <a:latin typeface="Cambria" pitchFamily="34" charset="0"/>
+                          <a:ea typeface="Cambria" pitchFamily="34" charset="-122"/>
+                          <a:cs typeface="Cambria" pitchFamily="34" charset="-120"/>
+                        </a:rPr>
+                        <a:t>Fusión de cajas y post-proceso (método 4)</a:t>
+                      </a:r>
+                      <a:endParaRPr lang="en-US" sz="1300" dirty="0">
+                        <a:latin typeface="Cambria" charset="0"/>
+                        <a:ea typeface="Cambria" charset="0"/>
+                        <a:cs typeface="Cambria" charset="0"/>
+                      </a:endParaRPr>
+                    </a:p>
+                  </a:txBody>
+                  <a:tcPr marL="73152" marR="73152" marT="45720" marB="45720" anchor="ctr">
+                    <a:lnL w="0" cap="flat" cmpd="sng" algn="ctr">
+                      <a:noFill/>
+                    </a:lnL>
+                    <a:lnR w="0" cap="flat" cmpd="sng" algn="ctr">
+                      <a:noFill/>
+                    </a:lnR>
+                    <a:lnT w="0" cap="flat" cmpd="sng" algn="ctr">
+                      <a:noFill/>
+                    </a:lnT>
+                    <a:lnB w="19050" cap="flat" cmpd="sng" algn="ctr">
+                      <a:solidFill>
+                        <a:srgbClr val="1A1A1A"/>
+                      </a:solidFill>
+                      <a:prstDash val="solid"/>
+                      <a:round/>
+                      <a:headEnd type="none" w="med" len="med"/>
+                      <a:tailEnd type="none" w="med" len="med"/>
+                    </a:lnB>
+                  </a:tcPr>
+                </a:tc>
+                <a:tc>
+                  <a:txBody>
+                    <a:bodyPr/>
+                    <a:lstStyle/>
+                    <a:p>
+                      <a:pPr algn="ctr" indent="0" marL="0">
+                        <a:buNone/>
+                      </a:pPr>
+                      <a:r>
+                        <a:rPr lang="en-US" sz="1300" dirty="0">
+                          <a:solidFill>
+                            <a:srgbClr val="1A1A1A"/>
+                          </a:solidFill>
+                          <a:latin typeface="Cambria" pitchFamily="34" charset="0"/>
+                          <a:ea typeface="Cambria" pitchFamily="34" charset="-122"/>
+                          <a:cs typeface="Cambria" pitchFamily="34" charset="-120"/>
+                        </a:rPr>
+                        <a:t>0,55 · 0,6 · 20 frames</a:t>
+                      </a:r>
+                      <a:endParaRPr lang="en-US" sz="1300" dirty="0">
+                        <a:latin typeface="Cambria" charset="0"/>
+                        <a:ea typeface="Cambria" charset="0"/>
+                        <a:cs typeface="Cambria" charset="0"/>
+                      </a:endParaRPr>
+                    </a:p>
+                  </a:txBody>
+                  <a:tcPr marL="73152" marR="73152" marT="45720" marB="45720" anchor="ctr">
+                    <a:lnL w="0" cap="flat" cmpd="sng" algn="ctr">
+                      <a:noFill/>
+                    </a:lnL>
+                    <a:lnR w="0" cap="flat" cmpd="sng" algn="ctr">
+                      <a:noFill/>
+                    </a:lnR>
+                    <a:lnT w="0" cap="flat" cmpd="sng" algn="ctr">
+                      <a:noFill/>
+                    </a:lnT>
                     <a:lnB w="19050" cap="flat" cmpd="sng" algn="ctr">
                       <a:solidFill>
                         <a:srgbClr val="1A1A1A"/>
@@ -14073,7 +14669,7 @@
                 <a:ea typeface="Calibri" pitchFamily="34" charset="-122"/>
                 <a:cs typeface="Calibri" pitchFamily="34" charset="-120"/>
               </a:rPr>
-              <a:t>Heurística adicional: fusión de detectores</a:t>
+              <a:t>Método 4: SAHI + heurísticas</a:t>
             </a:r>
             <a:endParaRPr lang="en-US" sz="2400" dirty="0"/>
           </a:p>
@@ -14087,12 +14683,12 @@
         </p:nvSpPr>
         <p:spPr>
           <a:xfrm>
-            <a:off x="365760" y="777240"/>
-            <a:ext cx="1828800" cy="731520"/>
+            <a:off x="365760" y="731520"/>
+            <a:ext cx="1600200" cy="502920"/>
           </a:xfrm>
           <a:prstGeom prst="roundRect">
             <a:avLst>
-              <a:gd name="adj" fmla="val 15000"/>
+              <a:gd name="adj" fmla="val 21818"/>
             </a:avLst>
           </a:prstGeom>
           <a:solidFill>
@@ -14114,8 +14710,8 @@
         </p:nvSpPr>
         <p:spPr>
           <a:xfrm>
-            <a:off x="411480" y="777240"/>
-            <a:ext cx="1737360" cy="731520"/>
+            <a:off x="411480" y="731520"/>
+            <a:ext cx="1508760" cy="502920"/>
           </a:xfrm>
           <a:prstGeom prst="rect">
             <a:avLst/>
@@ -14131,7 +14727,7 @@
               <a:buNone/>
             </a:pPr>
             <a:r>
-              <a:rPr lang="en-US" sz="1200" dirty="0">
+              <a:rPr lang="en-US" sz="1100" dirty="0">
                 <a:solidFill>
                   <a:srgbClr val="1A1A1A"/>
                 </a:solidFill>
@@ -14139,16 +14735,65 @@
                 <a:ea typeface="Times New Roman" pitchFamily="34" charset="-122"/>
                 <a:cs typeface="Times New Roman" pitchFamily="34" charset="-120"/>
               </a:rPr>
-              <a:t>YOLO26</a:t>
+              <a:t>YOLO26 (imagen)</a:t>
             </a:r>
-            <a:endParaRPr lang="en-US" sz="1200" dirty="0"/>
-          </a:p>
+            <a:endParaRPr lang="en-US" sz="1100" dirty="0"/>
+          </a:p>
+        </p:txBody>
+      </p:sp>
+      <p:sp>
+        <p:nvSpPr>
+          <p:cNvPr id="5" name="Shape 3"/>
+          <p:cNvSpPr/>
+          <p:nvPr/>
+        </p:nvSpPr>
+        <p:spPr>
+          <a:xfrm>
+            <a:off x="365760" y="1325880"/>
+            <a:ext cx="1600200" cy="502920"/>
+          </a:xfrm>
+          <a:prstGeom prst="roundRect">
+            <a:avLst>
+              <a:gd name="adj" fmla="val 21818"/>
+            </a:avLst>
+          </a:prstGeom>
+          <a:solidFill>
+            <a:srgbClr val="FFFFFF"/>
+          </a:solidFill>
+          <a:ln w="12700">
+            <a:solidFill>
+              <a:srgbClr val="1A1A1A"/>
+            </a:solidFill>
+            <a:prstDash val="solid"/>
+          </a:ln>
+        </p:spPr>
+      </p:sp>
+      <p:sp>
+        <p:nvSpPr>
+          <p:cNvPr id="6" name="Text 4"/>
+          <p:cNvSpPr txBox="1"/>
+          <p:nvPr/>
+        </p:nvSpPr>
+        <p:spPr>
+          <a:xfrm>
+            <a:off x="411480" y="1325880"/>
+            <a:ext cx="1508760" cy="502920"/>
+          </a:xfrm>
+          <a:prstGeom prst="rect">
+            <a:avLst/>
+          </a:prstGeom>
+          <a:noFill/>
+          <a:ln/>
+        </p:spPr>
+        <p:txBody>
+          <a:bodyPr wrap="square" lIns="0" tIns="0" rIns="0" bIns="0" rtlCol="0" anchor="ctr"/>
+          <a:lstStyle/>
           <a:p>
             <a:pPr algn="ctr" indent="0" marL="0">
               <a:buNone/>
             </a:pPr>
             <a:r>
-              <a:rPr lang="en-US" sz="1200" dirty="0">
+              <a:rPr lang="en-US" sz="1100" dirty="0">
                 <a:solidFill>
                   <a:srgbClr val="1A1A1A"/>
                 </a:solidFill>
@@ -14156,22 +14801,349 @@
                 <a:ea typeface="Times New Roman" pitchFamily="34" charset="-122"/>
                 <a:cs typeface="Times New Roman" pitchFamily="34" charset="-120"/>
               </a:rPr>
-              <a:t>(UAVDT)</a:t>
+              <a:t>SAHI 640 + YOLO26</a:t>
             </a:r>
-            <a:endParaRPr lang="en-US" sz="1200" dirty="0"/>
+            <a:endParaRPr lang="en-US" sz="1100" dirty="0"/>
           </a:p>
         </p:txBody>
       </p:sp>
       <p:sp>
         <p:nvSpPr>
-          <p:cNvPr id="5" name="Shape 3"/>
+          <p:cNvPr id="7" name="Shape 5"/>
           <p:cNvSpPr/>
           <p:nvPr/>
         </p:nvSpPr>
         <p:spPr>
           <a:xfrm>
-            <a:off x="2194560" y="1143000"/>
-            <a:ext cx="365760" cy="0"/>
+            <a:off x="365760" y="1920240"/>
+            <a:ext cx="1600200" cy="502920"/>
+          </a:xfrm>
+          <a:prstGeom prst="roundRect">
+            <a:avLst>
+              <a:gd name="adj" fmla="val 21818"/>
+            </a:avLst>
+          </a:prstGeom>
+          <a:solidFill>
+            <a:srgbClr val="FFFFFF"/>
+          </a:solidFill>
+          <a:ln w="12700">
+            <a:solidFill>
+              <a:srgbClr val="1A1A1A"/>
+            </a:solidFill>
+            <a:prstDash val="solid"/>
+          </a:ln>
+        </p:spPr>
+      </p:sp>
+      <p:sp>
+        <p:nvSpPr>
+          <p:cNvPr id="8" name="Text 6"/>
+          <p:cNvSpPr txBox="1"/>
+          <p:nvPr/>
+        </p:nvSpPr>
+        <p:spPr>
+          <a:xfrm>
+            <a:off x="411480" y="1920240"/>
+            <a:ext cx="1508760" cy="502920"/>
+          </a:xfrm>
+          <a:prstGeom prst="rect">
+            <a:avLst/>
+          </a:prstGeom>
+          <a:noFill/>
+          <a:ln/>
+        </p:spPr>
+        <p:txBody>
+          <a:bodyPr wrap="square" lIns="0" tIns="0" rIns="0" bIns="0" rtlCol="0" anchor="ctr"/>
+          <a:lstStyle/>
+          <a:p>
+            <a:pPr algn="ctr" indent="0" marL="0">
+              <a:buNone/>
+            </a:pPr>
+            <a:r>
+              <a:rPr lang="en-US" sz="1100" dirty="0">
+                <a:solidFill>
+                  <a:srgbClr val="1A1A1A"/>
+                </a:solidFill>
+                <a:latin typeface="Times New Roman" pitchFamily="34" charset="0"/>
+                <a:ea typeface="Times New Roman" pitchFamily="34" charset="-122"/>
+                <a:cs typeface="Times New Roman" pitchFamily="34" charset="-120"/>
+              </a:rPr>
+              <a:t>RT-DETRv4 (VisDrone)</a:t>
+            </a:r>
+            <a:endParaRPr lang="en-US" sz="1100" dirty="0"/>
+          </a:p>
+        </p:txBody>
+      </p:sp>
+      <p:sp>
+        <p:nvSpPr>
+          <p:cNvPr id="9" name="Shape 7"/>
+          <p:cNvSpPr/>
+          <p:nvPr/>
+        </p:nvSpPr>
+        <p:spPr>
+          <a:xfrm>
+            <a:off x="274320" y="676656"/>
+            <a:ext cx="1783080" cy="1207008"/>
+          </a:xfrm>
+          <a:prstGeom prst="roundRect">
+            <a:avLst>
+              <a:gd name="adj" fmla="val 9091"/>
+            </a:avLst>
+          </a:prstGeom>
+          <a:solidFill>
+            <a:srgbClr val="FFFFFF">
+              <a:alpha val="0"/>
+            </a:srgbClr>
+          </a:solidFill>
+          <a:ln w="15875">
+            <a:solidFill>
+              <a:srgbClr val="1B3A66"/>
+            </a:solidFill>
+            <a:prstDash val="dash"/>
+          </a:ln>
+        </p:spPr>
+      </p:sp>
+      <p:sp>
+        <p:nvSpPr>
+          <p:cNvPr id="10" name="Shape 8"/>
+          <p:cNvSpPr/>
+          <p:nvPr/>
+        </p:nvSpPr>
+        <p:spPr>
+          <a:xfrm>
+            <a:off x="2423160" y="1051560"/>
+            <a:ext cx="1463040" cy="777240"/>
+          </a:xfrm>
+          <a:prstGeom prst="roundRect">
+            <a:avLst>
+              <a:gd name="adj" fmla="val 14118"/>
+            </a:avLst>
+          </a:prstGeom>
+          <a:solidFill>
+            <a:srgbClr val="DCE6F5"/>
+          </a:solidFill>
+          <a:ln w="12700">
+            <a:solidFill>
+              <a:srgbClr val="1A1A1A"/>
+            </a:solidFill>
+            <a:prstDash val="solid"/>
+          </a:ln>
+        </p:spPr>
+      </p:sp>
+      <p:sp>
+        <p:nvSpPr>
+          <p:cNvPr id="11" name="Text 9"/>
+          <p:cNvSpPr txBox="1"/>
+          <p:nvPr/>
+        </p:nvSpPr>
+        <p:spPr>
+          <a:xfrm>
+            <a:off x="2468880" y="1051560"/>
+            <a:ext cx="1371600" cy="777240"/>
+          </a:xfrm>
+          <a:prstGeom prst="rect">
+            <a:avLst/>
+          </a:prstGeom>
+          <a:noFill/>
+          <a:ln/>
+        </p:spPr>
+        <p:txBody>
+          <a:bodyPr wrap="square" lIns="0" tIns="0" rIns="0" bIns="0" rtlCol="0" anchor="ctr"/>
+          <a:lstStyle/>
+          <a:p>
+            <a:pPr algn="ctr" indent="0" marL="0">
+              <a:buNone/>
+            </a:pPr>
+            <a:r>
+              <a:rPr lang="en-US" sz="1150" dirty="0">
+                <a:solidFill>
+                  <a:srgbClr val="1A1A1A"/>
+                </a:solidFill>
+                <a:latin typeface="Times New Roman" pitchFamily="34" charset="0"/>
+                <a:ea typeface="Times New Roman" pitchFamily="34" charset="-122"/>
+                <a:cs typeface="Times New Roman" pitchFamily="34" charset="-120"/>
+              </a:rPr>
+              <a:t>Fusión de cajas</a:t>
+            </a:r>
+            <a:endParaRPr lang="en-US" sz="1150" dirty="0"/>
+          </a:p>
+          <a:p>
+            <a:pPr algn="ctr" indent="0" marL="0">
+              <a:buNone/>
+            </a:pPr>
+            <a:r>
+              <a:rPr lang="en-US" sz="1150" dirty="0">
+                <a:solidFill>
+                  <a:srgbClr val="1A1A1A"/>
+                </a:solidFill>
+                <a:latin typeface="Times New Roman" pitchFamily="34" charset="0"/>
+                <a:ea typeface="Times New Roman" pitchFamily="34" charset="-122"/>
+                <a:cs typeface="Times New Roman" pitchFamily="34" charset="-120"/>
+              </a:rPr>
+              <a:t>(votos)</a:t>
+            </a:r>
+            <a:endParaRPr lang="en-US" sz="1150" dirty="0"/>
+          </a:p>
+        </p:txBody>
+      </p:sp>
+      <p:sp>
+        <p:nvSpPr>
+          <p:cNvPr id="12" name="Shape 10"/>
+          <p:cNvSpPr/>
+          <p:nvPr/>
+        </p:nvSpPr>
+        <p:spPr>
+          <a:xfrm>
+            <a:off x="4160520" y="1051560"/>
+            <a:ext cx="1463040" cy="777240"/>
+          </a:xfrm>
+          <a:prstGeom prst="roundRect">
+            <a:avLst>
+              <a:gd name="adj" fmla="val 14118"/>
+            </a:avLst>
+          </a:prstGeom>
+          <a:solidFill>
+            <a:srgbClr val="FFFFFF"/>
+          </a:solidFill>
+          <a:ln w="12700">
+            <a:solidFill>
+              <a:srgbClr val="1A1A1A"/>
+            </a:solidFill>
+            <a:prstDash val="solid"/>
+          </a:ln>
+        </p:spPr>
+      </p:sp>
+      <p:sp>
+        <p:nvSpPr>
+          <p:cNvPr id="13" name="Text 11"/>
+          <p:cNvSpPr txBox="1"/>
+          <p:nvPr/>
+        </p:nvSpPr>
+        <p:spPr>
+          <a:xfrm>
+            <a:off x="4206240" y="1051560"/>
+            <a:ext cx="1371600" cy="777240"/>
+          </a:xfrm>
+          <a:prstGeom prst="rect">
+            <a:avLst/>
+          </a:prstGeom>
+          <a:noFill/>
+          <a:ln/>
+        </p:spPr>
+        <p:txBody>
+          <a:bodyPr wrap="square" lIns="0" tIns="0" rIns="0" bIns="0" rtlCol="0" anchor="ctr"/>
+          <a:lstStyle/>
+          <a:p>
+            <a:pPr algn="ctr" indent="0" marL="0">
+              <a:buNone/>
+            </a:pPr>
+            <a:r>
+              <a:rPr lang="en-US" sz="1150" dirty="0">
+                <a:solidFill>
+                  <a:srgbClr val="1A1A1A"/>
+                </a:solidFill>
+                <a:latin typeface="Times New Roman" pitchFamily="34" charset="0"/>
+                <a:ea typeface="Times New Roman" pitchFamily="34" charset="-122"/>
+                <a:cs typeface="Times New Roman" pitchFamily="34" charset="-120"/>
+              </a:rPr>
+              <a:t>ByteTrack</a:t>
+            </a:r>
+            <a:endParaRPr lang="en-US" sz="1150" dirty="0"/>
+          </a:p>
+        </p:txBody>
+      </p:sp>
+      <p:sp>
+        <p:nvSpPr>
+          <p:cNvPr id="14" name="Shape 12"/>
+          <p:cNvSpPr/>
+          <p:nvPr/>
+        </p:nvSpPr>
+        <p:spPr>
+          <a:xfrm>
+            <a:off x="5897880" y="1051560"/>
+            <a:ext cx="1463040" cy="777240"/>
+          </a:xfrm>
+          <a:prstGeom prst="roundRect">
+            <a:avLst>
+              <a:gd name="adj" fmla="val 14118"/>
+            </a:avLst>
+          </a:prstGeom>
+          <a:solidFill>
+            <a:srgbClr val="DCE6F5"/>
+          </a:solidFill>
+          <a:ln w="12700">
+            <a:solidFill>
+              <a:srgbClr val="1A1A1A"/>
+            </a:solidFill>
+            <a:prstDash val="solid"/>
+          </a:ln>
+        </p:spPr>
+      </p:sp>
+      <p:sp>
+        <p:nvSpPr>
+          <p:cNvPr id="15" name="Text 13"/>
+          <p:cNvSpPr txBox="1"/>
+          <p:nvPr/>
+        </p:nvSpPr>
+        <p:spPr>
+          <a:xfrm>
+            <a:off x="5943600" y="1051560"/>
+            <a:ext cx="1371600" cy="777240"/>
+          </a:xfrm>
+          <a:prstGeom prst="rect">
+            <a:avLst/>
+          </a:prstGeom>
+          <a:noFill/>
+          <a:ln/>
+        </p:spPr>
+        <p:txBody>
+          <a:bodyPr wrap="square" lIns="0" tIns="0" rIns="0" bIns="0" rtlCol="0" anchor="ctr"/>
+          <a:lstStyle/>
+          <a:p>
+            <a:pPr algn="ctr" indent="0" marL="0">
+              <a:buNone/>
+            </a:pPr>
+            <a:r>
+              <a:rPr lang="en-US" sz="1150" dirty="0">
+                <a:solidFill>
+                  <a:srgbClr val="1A1A1A"/>
+                </a:solidFill>
+                <a:latin typeface="Times New Roman" pitchFamily="34" charset="0"/>
+                <a:ea typeface="Times New Roman" pitchFamily="34" charset="-122"/>
+                <a:cs typeface="Times New Roman" pitchFamily="34" charset="-120"/>
+              </a:rPr>
+              <a:t>Filtro de escala</a:t>
+            </a:r>
+            <a:endParaRPr lang="en-US" sz="1150" dirty="0"/>
+          </a:p>
+          <a:p>
+            <a:pPr algn="ctr" indent="0" marL="0">
+              <a:buNone/>
+            </a:pPr>
+            <a:r>
+              <a:rPr lang="en-US" sz="1150" dirty="0">
+                <a:solidFill>
+                  <a:srgbClr val="1A1A1A"/>
+                </a:solidFill>
+                <a:latin typeface="Times New Roman" pitchFamily="34" charset="0"/>
+                <a:ea typeface="Times New Roman" pitchFamily="34" charset="-122"/>
+                <a:cs typeface="Times New Roman" pitchFamily="34" charset="-120"/>
+              </a:rPr>
+              <a:t>+ largo ≥ 20</a:t>
+            </a:r>
+            <a:endParaRPr lang="en-US" sz="1150" dirty="0"/>
+          </a:p>
+        </p:txBody>
+      </p:sp>
+      <p:sp>
+        <p:nvSpPr>
+          <p:cNvPr id="16" name="Shape 14"/>
+          <p:cNvSpPr/>
+          <p:nvPr/>
+        </p:nvSpPr>
+        <p:spPr>
+          <a:xfrm>
+            <a:off x="1965960" y="982980"/>
+            <a:ext cx="457200" cy="388620"/>
           </a:xfrm>
           <a:prstGeom prst="line">
             <a:avLst/>
@@ -14188,97 +15160,14 @@
       </p:sp>
       <p:sp>
         <p:nvSpPr>
-          <p:cNvPr id="6" name="Shape 4"/>
+          <p:cNvPr id="17" name="Shape 15"/>
           <p:cNvSpPr/>
           <p:nvPr/>
         </p:nvSpPr>
         <p:spPr>
-          <a:xfrm>
-            <a:off x="2560320" y="777240"/>
-            <a:ext cx="1828800" cy="731520"/>
-          </a:xfrm>
-          <a:prstGeom prst="roundRect">
-            <a:avLst>
-              <a:gd name="adj" fmla="val 15000"/>
-            </a:avLst>
-          </a:prstGeom>
-          <a:solidFill>
-            <a:srgbClr val="FFFFFF"/>
-          </a:solidFill>
-          <a:ln w="12700">
-            <a:solidFill>
-              <a:srgbClr val="1A1A1A"/>
-            </a:solidFill>
-            <a:prstDash val="solid"/>
-          </a:ln>
-        </p:spPr>
-      </p:sp>
-      <p:sp>
-        <p:nvSpPr>
-          <p:cNvPr id="7" name="Text 5"/>
-          <p:cNvSpPr txBox="1"/>
-          <p:nvPr/>
-        </p:nvSpPr>
-        <p:spPr>
-          <a:xfrm>
-            <a:off x="2606040" y="777240"/>
-            <a:ext cx="1737360" cy="731520"/>
-          </a:xfrm>
-          <a:prstGeom prst="rect">
-            <a:avLst/>
-          </a:prstGeom>
-          <a:noFill/>
-          <a:ln/>
-        </p:spPr>
-        <p:txBody>
-          <a:bodyPr wrap="square" lIns="0" tIns="0" rIns="0" bIns="0" rtlCol="0" anchor="ctr"/>
-          <a:lstStyle/>
-          <a:p>
-            <a:pPr algn="ctr" indent="0" marL="0">
-              <a:buNone/>
-            </a:pPr>
-            <a:r>
-              <a:rPr lang="en-US" sz="1200" dirty="0">
-                <a:solidFill>
-                  <a:srgbClr val="1A1A1A"/>
-                </a:solidFill>
-                <a:latin typeface="Times New Roman" pitchFamily="34" charset="0"/>
-                <a:ea typeface="Times New Roman" pitchFamily="34" charset="-122"/>
-                <a:cs typeface="Times New Roman" pitchFamily="34" charset="-120"/>
-              </a:rPr>
-              <a:t>RT-DETRv4</a:t>
-            </a:r>
-            <a:endParaRPr lang="en-US" sz="1200" dirty="0"/>
-          </a:p>
-          <a:p>
-            <a:pPr algn="ctr" indent="0" marL="0">
-              <a:buNone/>
-            </a:pPr>
-            <a:r>
-              <a:rPr lang="en-US" sz="1200" dirty="0">
-                <a:solidFill>
-                  <a:srgbClr val="1A1A1A"/>
-                </a:solidFill>
-                <a:latin typeface="Times New Roman" pitchFamily="34" charset="0"/>
-                <a:ea typeface="Times New Roman" pitchFamily="34" charset="-122"/>
-                <a:cs typeface="Times New Roman" pitchFamily="34" charset="-120"/>
-              </a:rPr>
-              <a:t>(VisDrone)</a:t>
-            </a:r>
-            <a:endParaRPr lang="en-US" sz="1200" dirty="0"/>
-          </a:p>
-        </p:txBody>
-      </p:sp>
-      <p:sp>
-        <p:nvSpPr>
-          <p:cNvPr id="8" name="Shape 6"/>
-          <p:cNvSpPr/>
-          <p:nvPr/>
-        </p:nvSpPr>
-        <p:spPr>
-          <a:xfrm>
-            <a:off x="4389120" y="1143000"/>
-            <a:ext cx="365760" cy="0"/>
+          <a:xfrm flipV="1">
+            <a:off x="1965960" y="1508760"/>
+            <a:ext cx="457200" cy="662940"/>
           </a:xfrm>
           <a:prstGeom prst="line">
             <a:avLst/>
@@ -14295,97 +15184,14 @@
       </p:sp>
       <p:sp>
         <p:nvSpPr>
-          <p:cNvPr id="9" name="Shape 7"/>
+          <p:cNvPr id="18" name="Shape 16"/>
           <p:cNvSpPr/>
           <p:nvPr/>
         </p:nvSpPr>
         <p:spPr>
           <a:xfrm>
-            <a:off x="4754880" y="777240"/>
-            <a:ext cx="1828800" cy="731520"/>
-          </a:xfrm>
-          <a:prstGeom prst="roundRect">
-            <a:avLst>
-              <a:gd name="adj" fmla="val 15000"/>
-            </a:avLst>
-          </a:prstGeom>
-          <a:solidFill>
-            <a:srgbClr val="DCE6F5"/>
-          </a:solidFill>
-          <a:ln w="12700">
-            <a:solidFill>
-              <a:srgbClr val="1A1A1A"/>
-            </a:solidFill>
-            <a:prstDash val="solid"/>
-          </a:ln>
-        </p:spPr>
-      </p:sp>
-      <p:sp>
-        <p:nvSpPr>
-          <p:cNvPr id="10" name="Text 8"/>
-          <p:cNvSpPr txBox="1"/>
-          <p:nvPr/>
-        </p:nvSpPr>
-        <p:spPr>
-          <a:xfrm>
-            <a:off x="4800600" y="777240"/>
-            <a:ext cx="1737360" cy="731520"/>
-          </a:xfrm>
-          <a:prstGeom prst="rect">
-            <a:avLst/>
-          </a:prstGeom>
-          <a:noFill/>
-          <a:ln/>
-        </p:spPr>
-        <p:txBody>
-          <a:bodyPr wrap="square" lIns="0" tIns="0" rIns="0" bIns="0" rtlCol="0" anchor="ctr"/>
-          <a:lstStyle/>
-          <a:p>
-            <a:pPr algn="ctr" indent="0" marL="0">
-              <a:buNone/>
-            </a:pPr>
-            <a:r>
-              <a:rPr lang="en-US" sz="1200" dirty="0">
-                <a:solidFill>
-                  <a:srgbClr val="1A1A1A"/>
-                </a:solidFill>
-                <a:latin typeface="Times New Roman" pitchFamily="34" charset="0"/>
-                <a:ea typeface="Times New Roman" pitchFamily="34" charset="-122"/>
-                <a:cs typeface="Times New Roman" pitchFamily="34" charset="-120"/>
-              </a:rPr>
-              <a:t>Fusión</a:t>
-            </a:r>
-            <a:endParaRPr lang="en-US" sz="1200" dirty="0"/>
-          </a:p>
-          <a:p>
-            <a:pPr algn="ctr" indent="0" marL="0">
-              <a:buNone/>
-            </a:pPr>
-            <a:r>
-              <a:rPr lang="en-US" sz="1200" dirty="0">
-                <a:solidFill>
-                  <a:srgbClr val="1A1A1A"/>
-                </a:solidFill>
-                <a:latin typeface="Times New Roman" pitchFamily="34" charset="0"/>
-                <a:ea typeface="Times New Roman" pitchFamily="34" charset="-122"/>
-                <a:cs typeface="Times New Roman" pitchFamily="34" charset="-120"/>
-              </a:rPr>
-              <a:t>de cajas</a:t>
-            </a:r>
-            <a:endParaRPr lang="en-US" sz="1200" dirty="0"/>
-          </a:p>
-        </p:txBody>
-      </p:sp>
-      <p:sp>
-        <p:nvSpPr>
-          <p:cNvPr id="11" name="Shape 9"/>
-          <p:cNvSpPr/>
-          <p:nvPr/>
-        </p:nvSpPr>
-        <p:spPr>
-          <a:xfrm>
-            <a:off x="6583680" y="1143000"/>
-            <a:ext cx="365760" cy="0"/>
+            <a:off x="3886200" y="1440180"/>
+            <a:ext cx="274320" cy="0"/>
           </a:xfrm>
           <a:prstGeom prst="line">
             <a:avLst/>
@@ -14402,41 +15208,62 @@
       </p:sp>
       <p:sp>
         <p:nvSpPr>
-          <p:cNvPr id="12" name="Shape 10"/>
+          <p:cNvPr id="19" name="Shape 17"/>
           <p:cNvSpPr/>
           <p:nvPr/>
         </p:nvSpPr>
         <p:spPr>
           <a:xfrm>
-            <a:off x="6949440" y="777240"/>
-            <a:ext cx="1828800" cy="731520"/>
+            <a:off x="5623560" y="1440180"/>
+            <a:ext cx="274320" cy="0"/>
           </a:xfrm>
-          <a:prstGeom prst="roundRect">
-            <a:avLst>
-              <a:gd name="adj" fmla="val 15000"/>
-            </a:avLst>
+          <a:prstGeom prst="line">
+            <a:avLst/>
           </a:prstGeom>
-          <a:solidFill>
-            <a:srgbClr val="FFFFFF"/>
-          </a:solidFill>
-          <a:ln w="12700">
+          <a:noFill/>
+          <a:ln w="15875">
             <a:solidFill>
               <a:srgbClr val="1A1A1A"/>
             </a:solidFill>
             <a:prstDash val="solid"/>
+            <a:tailEnd type="triangle"/>
           </a:ln>
         </p:spPr>
       </p:sp>
       <p:sp>
         <p:nvSpPr>
-          <p:cNvPr id="13" name="Text 11"/>
+          <p:cNvPr id="20" name="Shape 18"/>
+          <p:cNvSpPr/>
+          <p:nvPr/>
+        </p:nvSpPr>
+        <p:spPr>
+          <a:xfrm>
+            <a:off x="7360920" y="1440180"/>
+            <a:ext cx="274320" cy="0"/>
+          </a:xfrm>
+          <a:prstGeom prst="line">
+            <a:avLst/>
+          </a:prstGeom>
+          <a:noFill/>
+          <a:ln w="15875">
+            <a:solidFill>
+              <a:srgbClr val="1A1A1A"/>
+            </a:solidFill>
+            <a:prstDash val="solid"/>
+            <a:tailEnd type="triangle"/>
+          </a:ln>
+        </p:spPr>
+      </p:sp>
+      <p:sp>
+        <p:nvSpPr>
+          <p:cNvPr id="21" name="Text 19"/>
           <p:cNvSpPr txBox="1"/>
           <p:nvPr/>
         </p:nvSpPr>
         <p:spPr>
           <a:xfrm>
-            <a:off x="6995160" y="777240"/>
-            <a:ext cx="1737360" cy="731520"/>
+            <a:off x="7680960" y="1280160"/>
+            <a:ext cx="1097280" cy="320040"/>
           </a:xfrm>
           <a:prstGeom prst="rect">
             <a:avLst/>
@@ -14448,11 +15275,11 @@
           <a:bodyPr wrap="square" lIns="0" tIns="0" rIns="0" bIns="0" rtlCol="0" anchor="ctr"/>
           <a:lstStyle/>
           <a:p>
-            <a:pPr algn="ctr" indent="0" marL="0">
+            <a:pPr indent="0" marL="0">
               <a:buNone/>
             </a:pPr>
             <a:r>
-              <a:rPr lang="en-US" sz="1200" dirty="0">
+              <a:rPr lang="en-US" sz="1300" dirty="0">
                 <a:solidFill>
                   <a:srgbClr val="1A1A1A"/>
                 </a:solidFill>
@@ -14460,22 +15287,22 @@
                 <a:ea typeface="Times New Roman" pitchFamily="34" charset="-122"/>
                 <a:cs typeface="Times New Roman" pitchFamily="34" charset="-120"/>
               </a:rPr>
-              <a:t>ByteTrack</a:t>
+              <a:t>MOT</a:t>
             </a:r>
-            <a:endParaRPr lang="en-US" sz="1200" dirty="0"/>
+            <a:endParaRPr lang="en-US" sz="1300" dirty="0"/>
           </a:p>
         </p:txBody>
       </p:sp>
       <p:sp>
         <p:nvSpPr>
-          <p:cNvPr id="14" name="Text 12"/>
+          <p:cNvPr id="22" name="Text 20"/>
           <p:cNvSpPr txBox="1"/>
           <p:nvPr/>
         </p:nvSpPr>
         <p:spPr>
           <a:xfrm>
-            <a:off x="457200" y="1828800"/>
-            <a:ext cx="4572000" cy="2743200"/>
+            <a:off x="2423160" y="2011680"/>
+            <a:ext cx="6400800" cy="274320"/>
           </a:xfrm>
           <a:prstGeom prst="rect">
             <a:avLst/>
@@ -14487,15 +15314,54 @@
           <a:bodyPr wrap="square" lIns="0" tIns="0" rIns="0" bIns="0" rtlCol="0" anchor="t"/>
           <a:lstStyle/>
           <a:p>
+            <a:pPr indent="0" marL="0">
+              <a:buNone/>
+            </a:pPr>
+            <a:r>
+              <a:rPr lang="en-US" sz="1100" i="1" dirty="0">
+                <a:solidFill>
+                  <a:srgbClr val="6B7280"/>
+                </a:solidFill>
+                <a:latin typeface="Calibri" pitchFamily="34" charset="0"/>
+                <a:ea typeface="Calibri" pitchFamily="34" charset="-122"/>
+                <a:cs typeface="Calibri" pitchFamily="34" charset="-120"/>
+              </a:rPr>
+              <a:t>Recuadro punteado: YOLO26 y SAHI usan los mismos pesos y cuentan como un solo voto</a:t>
+            </a:r>
+            <a:endParaRPr lang="en-US" sz="1100" dirty="0"/>
+          </a:p>
+        </p:txBody>
+      </p:sp>
+      <p:sp>
+        <p:nvSpPr>
+          <p:cNvPr id="23" name="Text 21"/>
+          <p:cNvSpPr txBox="1"/>
+          <p:nvPr/>
+        </p:nvSpPr>
+        <p:spPr>
+          <a:xfrm>
+            <a:off x="457200" y="2514600"/>
+            <a:ext cx="4846320" cy="2103120"/>
+          </a:xfrm>
+          <a:prstGeom prst="rect">
+            <a:avLst/>
+          </a:prstGeom>
+          <a:noFill/>
+          <a:ln/>
+        </p:spPr>
+        <p:txBody>
+          <a:bodyPr wrap="square" lIns="0" tIns="0" rIns="0" bIns="0" rtlCol="0" anchor="t"/>
+          <a:lstStyle/>
+          <a:p>
             <a:pPr marL="342900" indent="-342900">
               <a:spcAft>
-                <a:spcPts val="700"/>
+                <a:spcPts val="600"/>
               </a:spcAft>
               <a:buSzPct val="100000"/>
               <a:buChar char="●"/>
             </a:pPr>
             <a:r>
-              <a:rPr lang="en-US" sz="1300" dirty="0">
+              <a:rPr lang="en-US" sz="1250" dirty="0">
                 <a:solidFill>
                   <a:srgbClr val="1A1A1A"/>
                 </a:solidFill>
@@ -14503,20 +15369,20 @@
                 <a:ea typeface="Calibri" pitchFamily="34" charset="-122"/>
                 <a:cs typeface="Calibri" pitchFamily="34" charset="-120"/>
               </a:rPr>
-              <a:t>YOLO26 sigue el criterio de anotación de UAVDT; RT-DETR recupera vehículos en vistas oblicuas</a:t>
+              <a:t>SAHI como respaldo: entra solo donde YOLO26 no vio nada; si ambos ven la caja, se queda la de mayor confianza</a:t>
             </a:r>
-            <a:endParaRPr lang="en-US" sz="1300" dirty="0"/>
+            <a:endParaRPr lang="en-US" sz="1250" dirty="0"/>
           </a:p>
           <a:p>
             <a:pPr marL="342900" indent="-342900">
               <a:spcAft>
-                <a:spcPts val="700"/>
+                <a:spcPts val="600"/>
               </a:spcAft>
               <a:buSzPct val="100000"/>
               <a:buChar char="●"/>
             </a:pPr>
             <a:r>
-              <a:rPr lang="en-US" sz="1300" dirty="0">
+              <a:rPr lang="en-US" sz="1250" dirty="0">
                 <a:solidFill>
                   <a:srgbClr val="1A1A1A"/>
                 </a:solidFill>
@@ -14524,20 +15390,20 @@
                 <a:ea typeface="Calibri" pitchFamily="34" charset="-122"/>
                 <a:cs typeface="Calibri" pitchFamily="34" charset="-120"/>
               </a:rPr>
-              <a:t>Se agrupan cajas de ambos con IoU ≥ 0,55 y se promedian ponderadas por su confianza</a:t>
+              <a:t>Como tercer votante empeoraba (MOTA 0,485): el acuerdo YOLO26–SAHI no es consenso entre modelos distintos</a:t>
             </a:r>
-            <a:endParaRPr lang="en-US" sz="1300" dirty="0"/>
+            <a:endParaRPr lang="en-US" sz="1250" dirty="0"/>
           </a:p>
           <a:p>
             <a:pPr marL="342900" indent="-342900">
               <a:spcAft>
-                <a:spcPts val="700"/>
+                <a:spcPts val="600"/>
               </a:spcAft>
               <a:buSzPct val="100000"/>
               <a:buChar char="●"/>
             </a:pPr>
             <a:r>
-              <a:rPr lang="en-US" sz="1300" dirty="0">
+              <a:rPr lang="en-US" sz="1250" dirty="0">
                 <a:solidFill>
                   <a:srgbClr val="1A1A1A"/>
                 </a:solidFill>
@@ -14545,43 +15411,22 @@
                 <a:ea typeface="Calibri" pitchFamily="34" charset="-122"/>
                 <a:cs typeface="Calibri" pitchFamily="34" charset="-120"/>
               </a:rPr>
-              <a:t>Una caja que ve un solo modelo queda con la mitad de confianza: hace falta consenso</a:t>
+              <a:t>Caja fusionada: promedio ponderado por confianza (IoU ≥ 0,55). Una caja vista por un solo voto queda con la mitad de confianza</a:t>
             </a:r>
-            <a:endParaRPr lang="en-US" sz="1300" dirty="0"/>
-          </a:p>
-          <a:p>
-            <a:pPr marL="342900" indent="-342900">
-              <a:spcAft>
-                <a:spcPts val="700"/>
-              </a:spcAft>
-              <a:buSzPct val="100000"/>
-              <a:buChar char="●"/>
-            </a:pPr>
-            <a:r>
-              <a:rPr lang="en-US" sz="1300" dirty="0">
-                <a:solidFill>
-                  <a:srgbClr val="1A1A1A"/>
-                </a:solidFill>
-                <a:latin typeface="Calibri" pitchFamily="34" charset="0"/>
-                <a:ea typeface="Calibri" pitchFamily="34" charset="-122"/>
-                <a:cs typeface="Calibri" pitchFamily="34" charset="-120"/>
-              </a:rPr>
-              <a:t>Sin entrenamiento: solo combina pesos preentrenados, y se ajusta el tracker igual que en los demás</a:t>
-            </a:r>
-            <a:endParaRPr lang="en-US" sz="1300" dirty="0"/>
+            <a:endParaRPr lang="en-US" sz="1250" dirty="0"/>
           </a:p>
         </p:txBody>
       </p:sp>
       <p:sp>
         <p:nvSpPr>
-          <p:cNvPr id="15" name="Text 13"/>
+          <p:cNvPr id="24" name="Text 22"/>
           <p:cNvSpPr txBox="1"/>
           <p:nvPr/>
         </p:nvSpPr>
         <p:spPr>
           <a:xfrm>
-            <a:off x="5303520" y="1783080"/>
-            <a:ext cx="3657600" cy="274320"/>
+            <a:off x="5486400" y="2514600"/>
+            <a:ext cx="3291840" cy="274320"/>
           </a:xfrm>
           <a:prstGeom prst="rect">
             <a:avLst/>
@@ -14613,7 +15458,7 @@
       </p:sp>
       <p:pic>
         <p:nvPicPr>
-          <p:cNvPr id="16" name="Image 0" descr="fuse_box">    </p:cNvPr>
+          <p:cNvPr id="25" name="Image 0" descr="fuse_box">    </p:cNvPr>
           <p:cNvPicPr>
             <a:picLocks noChangeAspect="1"/>
           </p:cNvPicPr>
@@ -14627,8 +15472,8 @@
         </p:blipFill>
         <p:spPr>
           <a:xfrm>
-            <a:off x="5303520" y="2103120"/>
-            <a:ext cx="1237156" cy="927229"/>
+            <a:off x="5486400" y="2788920"/>
+            <a:ext cx="1099694" cy="824204"/>
           </a:xfrm>
           <a:prstGeom prst="rect">
             <a:avLst/>
@@ -14637,14 +15482,14 @@
       </p:pic>
       <p:sp>
         <p:nvSpPr>
-          <p:cNvPr id="17" name="Text 14"/>
+          <p:cNvPr id="26" name="Text 23"/>
           <p:cNvSpPr txBox="1"/>
           <p:nvPr/>
         </p:nvSpPr>
         <p:spPr>
           <a:xfrm>
-            <a:off x="5303520" y="3246120"/>
-            <a:ext cx="3657600" cy="274320"/>
+            <a:off x="5486400" y="3611880"/>
+            <a:ext cx="3291840" cy="274320"/>
           </a:xfrm>
           <a:prstGeom prst="rect">
             <a:avLst/>
@@ -14668,7 +15513,7 @@
                 <a:ea typeface="Calibri" pitchFamily="34" charset="-122"/>
                 <a:cs typeface="Calibri" pitchFamily="34" charset="-120"/>
               </a:rPr>
-              <a:t>Confianza (M modelos)</a:t>
+              <a:t>Confianza</a:t>
             </a:r>
             <a:endParaRPr lang="en-US" sz="1400" dirty="0"/>
           </a:p>
@@ -14676,7 +15521,7 @@
       </p:sp>
       <p:pic>
         <p:nvPicPr>
-          <p:cNvPr id="18" name="Image 1" descr="fuse_score">    </p:cNvPr>
+          <p:cNvPr id="27" name="Image 1" descr="fuse_vote">    </p:cNvPr>
           <p:cNvPicPr>
             <a:picLocks noChangeAspect="1"/>
           </p:cNvPicPr>
@@ -14690,8 +15535,8 @@
         </p:blipFill>
         <p:spPr>
           <a:xfrm>
-            <a:off x="5303520" y="3566160"/>
-            <a:ext cx="2271370" cy="614504"/>
+            <a:off x="5486400" y="3886200"/>
+            <a:ext cx="2260397" cy="548640"/>
           </a:xfrm>
           <a:prstGeom prst="rect">
             <a:avLst/>
@@ -14700,7 +15545,7 @@
       </p:pic>
       <p:sp>
         <p:nvSpPr>
-          <p:cNvPr id="19" name="Text 15"/>
+          <p:cNvPr id="28" name="Text 24"/>
           <p:cNvSpPr txBox="1"/>
           <p:nvPr/>
         </p:nvSpPr>
@@ -14731,7 +15576,7 @@
                 <a:ea typeface="Calibri" pitchFamily="34" charset="-122"/>
                 <a:cs typeface="Calibri" pitchFamily="34" charset="-120"/>
               </a:rPr>
-              <a:t>Inspirada en Weighted Boxes Fusion [18]; implementación propia (scripts/fuse_cache.py)</a:t>
+              <a:t>Inspirada en Weighted Boxes Fusion [18]; implementación propia (scripts/m4_lib.py)</a:t>
             </a:r>
             <a:endParaRPr lang="en-US" sz="1000" dirty="0"/>
           </a:p>
@@ -15471,22 +16316,38 @@
                 <a:ea typeface="Calibri" pitchFamily="34" charset="-122"/>
                 <a:cs typeface="Calibri" pitchFamily="34" charset="-120"/>
               </a:rPr>
-              <a:t>Protocolo de evaluación</a:t>
+              <a:t>Heurística: filtro de escala relativa</a:t>
             </a:r>
             <a:endParaRPr lang="en-US" sz="2400" dirty="0"/>
           </a:p>
         </p:txBody>
       </p:sp>
-      <p:sp>
-        <p:nvSpPr>
-          <p:cNvPr id="3" name="Text 1"/>
+      <p:graphicFrame>
+        <p:nvGraphicFramePr>
+          <p:cNvPr id="3" name="Chart 0" descr=""/>
+          <p:cNvGraphicFramePr/>
+          <p:nvPr/>
+        </p:nvGraphicFramePr>
+        <p:xfrm>
+          <a:off x="274320" y="685800"/>
+          <a:ext cx="4480560" cy="3108960"/>
+        </p:xfrm>
+        <a:graphic xmlns:a="http://schemas.openxmlformats.org/drawingml/2006/main">
+          <a:graphicData uri="http://schemas.openxmlformats.org/drawingml/2006/chart">
+            <c:chart xmlns:c="http://schemas.openxmlformats.org/drawingml/2006/chart" r:id="rId1"/>
+          </a:graphicData>
+        </a:graphic>
+      </p:graphicFrame>
+      <p:sp>
+        <p:nvSpPr>
+          <p:cNvPr id="4" name="Text 1"/>
           <p:cNvSpPr txBox="1"/>
           <p:nvPr/>
         </p:nvSpPr>
         <p:spPr>
           <a:xfrm>
-            <a:off x="457200" y="914400"/>
-            <a:ext cx="3657600" cy="3291840"/>
+            <a:off x="4983480" y="777240"/>
+            <a:ext cx="3840480" cy="2377440"/>
           </a:xfrm>
           <a:prstGeom prst="rect">
             <a:avLst/>
@@ -15500,13 +16361,13 @@
           <a:p>
             <a:pPr marL="342900" indent="-342900">
               <a:spcAft>
-                <a:spcPts val="1000"/>
+                <a:spcPts val="600"/>
               </a:spcAft>
               <a:buSzPct val="100000"/>
               <a:buChar char="●"/>
             </a:pPr>
             <a:r>
-              <a:rPr lang="en-US" sz="1500" dirty="0">
+              <a:rPr lang="en-US" sz="1250" dirty="0">
                 <a:solidFill>
                   <a:srgbClr val="1A1A1A"/>
                 </a:solidFill>
@@ -15514,20 +16375,20 @@
                 <a:ea typeface="Calibri" pitchFamily="34" charset="-122"/>
                 <a:cs typeface="Calibri" pitchFamily="34" charset="-120"/>
               </a:rPr>
-              <a:t>Biblioteca motmetrics</a:t>
+              <a:t>Los falsos positivos que hunden M1101 y M1007 miden la mitad que los vehículos reales (18 frente a 38 px en M1101)</a:t>
             </a:r>
-            <a:endParaRPr lang="en-US" sz="1500" dirty="0"/>
+            <a:endParaRPr lang="en-US" sz="1250" dirty="0"/>
           </a:p>
           <a:p>
             <a:pPr marL="342900" indent="-342900">
               <a:spcAft>
-                <a:spcPts val="1000"/>
+                <a:spcPts val="600"/>
               </a:spcAft>
               <a:buSzPct val="100000"/>
               <a:buChar char="●"/>
             </a:pPr>
             <a:r>
-              <a:rPr lang="en-US" sz="1500" dirty="0">
+              <a:rPr lang="en-US" sz="1250" dirty="0">
                 <a:solidFill>
                   <a:srgbClr val="1A1A1A"/>
                 </a:solidFill>
@@ -15535,20 +16396,20 @@
                 <a:ea typeface="Calibri" pitchFamily="34" charset="-122"/>
                 <a:cs typeface="Calibri" pitchFamily="34" charset="-120"/>
               </a:rPr>
-              <a:t>Emparejamiento por IoU ≥ 0,5, como el toolkit oficial</a:t>
+              <a:t>En general no son autos estacionados: con la cámara compensada (GMC), solo el 12 % de los frames con falsos positivos (20 secuencias) está quieto</a:t>
             </a:r>
-            <a:endParaRPr lang="en-US" sz="1500" dirty="0"/>
+            <a:endParaRPr lang="en-US" sz="1250" dirty="0"/>
           </a:p>
           <a:p>
             <a:pPr marL="342900" indent="-342900">
               <a:spcAft>
-                <a:spcPts val="1000"/>
+                <a:spcPts val="600"/>
               </a:spcAft>
               <a:buSzPct val="100000"/>
               <a:buChar char="●"/>
             </a:pPr>
             <a:r>
-              <a:rPr lang="en-US" sz="1500" dirty="0">
+              <a:rPr lang="en-US" sz="1250" dirty="0">
                 <a:solidFill>
                   <a:srgbClr val="1A1A1A"/>
                 </a:solidFill>
@@ -15556,138 +16417,15 @@
                 <a:ea typeface="Calibri" pitchFamily="34" charset="-122"/>
                 <a:cs typeface="Calibri" pitchFamily="34" charset="-120"/>
               </a:rPr>
-              <a:t>Se ignoran las regiones marcadas en el GT</a:t>
+              <a:t>Un dron vuela a altura casi constante: los vehículos de una escena tienen escala parecida</a:t>
             </a:r>
-            <a:endParaRPr lang="en-US" sz="1500" dirty="0"/>
-          </a:p>
-          <a:p>
-            <a:pPr marL="342900" indent="-342900">
-              <a:spcAft>
-                <a:spcPts val="1000"/>
-              </a:spcAft>
-              <a:buSzPct val="100000"/>
-              <a:buChar char="●"/>
-            </a:pPr>
-            <a:r>
-              <a:rPr lang="en-US" sz="1500" dirty="0">
-                <a:solidFill>
-                  <a:srgbClr val="1A1A1A"/>
-                </a:solidFill>
-                <a:latin typeface="Calibri" pitchFamily="34" charset="0"/>
-                <a:ea typeface="Calibri" pitchFamily="34" charset="-122"/>
-                <a:cs typeface="Calibri" pitchFamily="34" charset="-120"/>
-              </a:rPr>
-              <a:t>Promedio sobre las 20 secuencias de test</a:t>
-            </a:r>
-            <a:endParaRPr lang="en-US" sz="1500" dirty="0"/>
-          </a:p>
-        </p:txBody>
-      </p:sp>
-      <p:sp>
-        <p:nvSpPr>
-          <p:cNvPr id="4" name="Text 2"/>
-          <p:cNvSpPr txBox="1"/>
-          <p:nvPr/>
-        </p:nvSpPr>
-        <p:spPr>
-          <a:xfrm>
-            <a:off x="4389120" y="1051560"/>
-            <a:ext cx="914400" cy="274320"/>
-          </a:xfrm>
-          <a:prstGeom prst="rect">
-            <a:avLst/>
-          </a:prstGeom>
-          <a:noFill/>
-          <a:ln/>
-        </p:spPr>
-        <p:txBody>
-          <a:bodyPr wrap="square" lIns="0" tIns="0" rIns="0" bIns="0" rtlCol="0" anchor="t"/>
-          <a:lstStyle/>
-          <a:p>
-            <a:pPr indent="0" marL="0">
-              <a:buNone/>
-            </a:pPr>
-            <a:r>
-              <a:rPr lang="en-US" sz="1400" b="1" dirty="0">
-                <a:solidFill>
-                  <a:srgbClr val="1B3A66"/>
-                </a:solidFill>
-                <a:latin typeface="Calibri" pitchFamily="34" charset="0"/>
-                <a:ea typeface="Calibri" pitchFamily="34" charset="-122"/>
-                <a:cs typeface="Calibri" pitchFamily="34" charset="-120"/>
-              </a:rPr>
-              <a:t>MOTA</a:t>
-            </a:r>
-            <a:endParaRPr lang="en-US" sz="1400" dirty="0"/>
+            <a:endParaRPr lang="en-US" sz="1250" dirty="0"/>
           </a:p>
         </p:txBody>
       </p:sp>
       <p:pic>
         <p:nvPicPr>
-          <p:cNvPr id="5" name="Image 0" descr="mota">    </p:cNvPr>
-          <p:cNvPicPr>
-            <a:picLocks noChangeAspect="1"/>
-          </p:cNvPicPr>
-          <p:nvPr/>
-        </p:nvPicPr>
-        <p:blipFill>
-          <a:blip r:embed="rId1"/>
-          <a:stretch>
-            <a:fillRect/>
-          </a:stretch>
-        </p:blipFill>
-        <p:spPr>
-          <a:xfrm>
-            <a:off x="5394960" y="960120"/>
-            <a:ext cx="3008376" cy="536478"/>
-          </a:xfrm>
-          <a:prstGeom prst="rect">
-            <a:avLst/>
-          </a:prstGeom>
-        </p:spPr>
-      </p:pic>
-      <p:sp>
-        <p:nvSpPr>
-          <p:cNvPr id="6" name="Text 3"/>
-          <p:cNvSpPr txBox="1"/>
-          <p:nvPr/>
-        </p:nvSpPr>
-        <p:spPr>
-          <a:xfrm>
-            <a:off x="4389120" y="1874520"/>
-            <a:ext cx="914400" cy="274320"/>
-          </a:xfrm>
-          <a:prstGeom prst="rect">
-            <a:avLst/>
-          </a:prstGeom>
-          <a:noFill/>
-          <a:ln/>
-        </p:spPr>
-        <p:txBody>
-          <a:bodyPr wrap="square" lIns="0" tIns="0" rIns="0" bIns="0" rtlCol="0" anchor="t"/>
-          <a:lstStyle/>
-          <a:p>
-            <a:pPr indent="0" marL="0">
-              <a:buNone/>
-            </a:pPr>
-            <a:r>
-              <a:rPr lang="en-US" sz="1400" b="1" dirty="0">
-                <a:solidFill>
-                  <a:srgbClr val="1B3A66"/>
-                </a:solidFill>
-                <a:latin typeface="Calibri" pitchFamily="34" charset="0"/>
-                <a:ea typeface="Calibri" pitchFamily="34" charset="-122"/>
-                <a:cs typeface="Calibri" pitchFamily="34" charset="-120"/>
-              </a:rPr>
-              <a:t>IDF1</a:t>
-            </a:r>
-            <a:endParaRPr lang="en-US" sz="1400" dirty="0"/>
-          </a:p>
-        </p:txBody>
-      </p:sp>
-      <p:pic>
-        <p:nvPicPr>
-          <p:cNvPr id="7" name="Image 1" descr="idf1">    </p:cNvPr>
+          <p:cNvPr id="5" name="Image 0" descr="relsize">    </p:cNvPr>
           <p:cNvPicPr>
             <a:picLocks noChangeAspect="1"/>
           </p:cNvPicPr>
@@ -15701,8 +16439,8 @@
         </p:blipFill>
         <p:spPr>
           <a:xfrm>
-            <a:off x="5394960" y="1783080"/>
-            <a:ext cx="3279678" cy="542514"/>
+            <a:off x="4983480" y="3246120"/>
+            <a:ext cx="3644167" cy="258144"/>
           </a:xfrm>
           <a:prstGeom prst="rect">
             <a:avLst/>
@@ -15711,14 +16449,14 @@
       </p:pic>
       <p:sp>
         <p:nvSpPr>
-          <p:cNvPr id="8" name="Text 4"/>
+          <p:cNvPr id="6" name="Text 2"/>
           <p:cNvSpPr txBox="1"/>
           <p:nvPr/>
         </p:nvSpPr>
         <p:spPr>
           <a:xfrm>
-            <a:off x="4389120" y="3474720"/>
-            <a:ext cx="914400" cy="274320"/>
+            <a:off x="4983480" y="3611880"/>
+            <a:ext cx="3840480" cy="548640"/>
           </a:xfrm>
           <a:prstGeom prst="rect">
             <a:avLst/>
@@ -15734,148 +16472,7 @@
               <a:buNone/>
             </a:pPr>
             <a:r>
-              <a:rPr lang="en-US" sz="1400" b="1" dirty="0">
-                <a:solidFill>
-                  <a:srgbClr val="1B3A66"/>
-                </a:solidFill>
-                <a:latin typeface="Calibri" pitchFamily="34" charset="0"/>
-                <a:ea typeface="Calibri" pitchFamily="34" charset="-122"/>
-                <a:cs typeface="Calibri" pitchFamily="34" charset="-120"/>
-              </a:rPr>
-              <a:t>FPS</a:t>
-            </a:r>
-            <a:endParaRPr lang="en-US" sz="1400" dirty="0"/>
-          </a:p>
-        </p:txBody>
-      </p:sp>
-      <p:pic>
-        <p:nvPicPr>
-          <p:cNvPr id="9" name="Image 2" descr="fps">    </p:cNvPr>
-          <p:cNvPicPr>
-            <a:picLocks noChangeAspect="1"/>
-          </p:cNvPicPr>
-          <p:nvPr/>
-        </p:nvPicPr>
-        <p:blipFill>
-          <a:blip r:embed="rId3"/>
-          <a:stretch>
-            <a:fillRect/>
-          </a:stretch>
-        </p:blipFill>
-        <p:spPr>
-          <a:xfrm>
-            <a:off x="5394960" y="3383280"/>
-            <a:ext cx="1676370" cy="560802"/>
-          </a:xfrm>
-          <a:prstGeom prst="rect">
-            <a:avLst/>
-          </a:prstGeom>
-        </p:spPr>
-      </p:pic>
-      <p:sp>
-        <p:nvSpPr>
-          <p:cNvPr id="10" name="Text 5"/>
-          <p:cNvSpPr txBox="1"/>
-          <p:nvPr/>
-        </p:nvSpPr>
-        <p:spPr>
-          <a:xfrm>
-            <a:off x="4389120" y="2606040"/>
-            <a:ext cx="914400" cy="274320"/>
-          </a:xfrm>
-          <a:prstGeom prst="rect">
-            <a:avLst/>
-          </a:prstGeom>
-          <a:noFill/>
-          <a:ln/>
-        </p:spPr>
-        <p:txBody>
-          <a:bodyPr wrap="square" lIns="0" tIns="0" rIns="0" bIns="0" rtlCol="0" anchor="t"/>
-          <a:lstStyle/>
-          <a:p>
-            <a:pPr indent="0" marL="0">
-              <a:buNone/>
-            </a:pPr>
-            <a:r>
-              <a:rPr lang="en-US" sz="1400" b="1" dirty="0">
-                <a:solidFill>
-                  <a:srgbClr val="1B3A66"/>
-                </a:solidFill>
-                <a:latin typeface="Calibri" pitchFamily="34" charset="0"/>
-                <a:ea typeface="Calibri" pitchFamily="34" charset="-122"/>
-                <a:cs typeface="Calibri" pitchFamily="34" charset="-120"/>
-              </a:rPr>
-              <a:t>IDS</a:t>
-            </a:r>
-            <a:endParaRPr lang="en-US" sz="1400" dirty="0"/>
-          </a:p>
-        </p:txBody>
-      </p:sp>
-      <p:sp>
-        <p:nvSpPr>
-          <p:cNvPr id="11" name="Text 6"/>
-          <p:cNvSpPr txBox="1"/>
-          <p:nvPr/>
-        </p:nvSpPr>
-        <p:spPr>
-          <a:xfrm>
-            <a:off x="5394960" y="2606040"/>
-            <a:ext cx="3383280" cy="548640"/>
-          </a:xfrm>
-          <a:prstGeom prst="rect">
-            <a:avLst/>
-          </a:prstGeom>
-          <a:noFill/>
-          <a:ln/>
-        </p:spPr>
-        <p:txBody>
-          <a:bodyPr wrap="square" lIns="0" tIns="0" rIns="0" bIns="0" rtlCol="0" anchor="t"/>
-          <a:lstStyle/>
-          <a:p>
-            <a:pPr indent="0" marL="0">
-              <a:buNone/>
-            </a:pPr>
-            <a:r>
-              <a:rPr lang="en-US" sz="1300" dirty="0">
-                <a:solidFill>
-                  <a:srgbClr val="1A1A1A"/>
-                </a:solidFill>
-                <a:latin typeface="Calibri" pitchFamily="34" charset="0"/>
-                <a:ea typeface="Calibri" pitchFamily="34" charset="-122"/>
-                <a:cs typeface="Calibri" pitchFamily="34" charset="-120"/>
-              </a:rPr>
-              <a:t>Número de veces que un vehículo cambia de identificador</a:t>
-            </a:r>
-            <a:endParaRPr lang="en-US" sz="1300" dirty="0"/>
-          </a:p>
-        </p:txBody>
-      </p:sp>
-      <p:sp>
-        <p:nvSpPr>
-          <p:cNvPr id="12" name="Text 7"/>
-          <p:cNvSpPr txBox="1"/>
-          <p:nvPr/>
-        </p:nvSpPr>
-        <p:spPr>
-          <a:xfrm>
-            <a:off x="4389120" y="4023360"/>
-            <a:ext cx="4389120" cy="640080"/>
-          </a:xfrm>
-          <a:prstGeom prst="rect">
-            <a:avLst/>
-          </a:prstGeom>
-          <a:noFill/>
-          <a:ln/>
-        </p:spPr>
-        <p:txBody>
-          <a:bodyPr wrap="square" lIns="0" tIns="0" rIns="0" bIns="0" rtlCol="0" anchor="t"/>
-          <a:lstStyle/>
-          <a:p>
-            <a:pPr indent="0" marL="0">
-              <a:buNone/>
-            </a:pPr>
-            <a:r>
-              <a:rPr lang="en-US" sz="1200" dirty="0">
+              <a:rPr lang="en-US" sz="1150" dirty="0">
                 <a:solidFill>
                   <a:srgbClr val="6B7280"/>
                 </a:solidFill>
@@ -15883,15 +16480,15 @@
                 <a:ea typeface="Calibri" pitchFamily="34" charset="-122"/>
                 <a:cs typeface="Calibri" pitchFamily="34" charset="-120"/>
               </a:rPr>
-              <a:t>MOTA penaliza errores de detección y de identidad; IDF1 mide cuánto se conserva el mismo ID a lo largo del video.</a:t>
+              <a:t>La mediana sale de los propios tracks (≥ 10 frames): no usa el GT. ρ se eligió por validación cruzada.</a:t>
             </a:r>
-            <a:endParaRPr lang="en-US" sz="1200" dirty="0"/>
+            <a:endParaRPr lang="en-US" sz="1150" dirty="0"/>
           </a:p>
         </p:txBody>
       </p:sp>
       <p:sp>
         <p:nvSpPr>
-          <p:cNvPr id="13" name="Text 8"/>
+          <p:cNvPr id="7" name="Text 3"/>
           <p:cNvSpPr txBox="1"/>
           <p:nvPr/>
         </p:nvSpPr>
@@ -15922,7 +16519,7 @@
                 <a:ea typeface="Calibri" pitchFamily="34" charset="-122"/>
                 <a:cs typeface="Calibri" pitchFamily="34" charset="-120"/>
               </a:rPr>
-              <a:t>Bernardin y Stiefelhagen [15]; Ristani et al. [16]</a:t>
+              <a:t>Tracks antes del filtro (fusión + ByteTrack). Un track es falso positivo si menos de la mitad de sus cajas empareja con el GT (scripts/m4_fp_analysis.py)</a:t>
             </a:r>
             <a:endParaRPr lang="en-US" sz="1000" dirty="0"/>
           </a:p>
@@ -16036,6 +16633,571 @@
                 <a:ea typeface="Calibri" pitchFamily="34" charset="-122"/>
                 <a:cs typeface="Calibri" pitchFamily="34" charset="-120"/>
               </a:rPr>
+              <a:t>Protocolo de evaluación</a:t>
+            </a:r>
+            <a:endParaRPr lang="en-US" sz="2400" dirty="0"/>
+          </a:p>
+        </p:txBody>
+      </p:sp>
+      <p:sp>
+        <p:nvSpPr>
+          <p:cNvPr id="3" name="Text 1"/>
+          <p:cNvSpPr txBox="1"/>
+          <p:nvPr/>
+        </p:nvSpPr>
+        <p:spPr>
+          <a:xfrm>
+            <a:off x="457200" y="914400"/>
+            <a:ext cx="3657600" cy="3291840"/>
+          </a:xfrm>
+          <a:prstGeom prst="rect">
+            <a:avLst/>
+          </a:prstGeom>
+          <a:noFill/>
+          <a:ln/>
+        </p:spPr>
+        <p:txBody>
+          <a:bodyPr wrap="square" lIns="0" tIns="0" rIns="0" bIns="0" rtlCol="0" anchor="t"/>
+          <a:lstStyle/>
+          <a:p>
+            <a:pPr marL="342900" indent="-342900">
+              <a:spcAft>
+                <a:spcPts val="1000"/>
+              </a:spcAft>
+              <a:buSzPct val="100000"/>
+              <a:buChar char="●"/>
+            </a:pPr>
+            <a:r>
+              <a:rPr lang="en-US" sz="1500" dirty="0">
+                <a:solidFill>
+                  <a:srgbClr val="1A1A1A"/>
+                </a:solidFill>
+                <a:latin typeface="Calibri" pitchFamily="34" charset="0"/>
+                <a:ea typeface="Calibri" pitchFamily="34" charset="-122"/>
+                <a:cs typeface="Calibri" pitchFamily="34" charset="-120"/>
+              </a:rPr>
+              <a:t>Biblioteca motmetrics</a:t>
+            </a:r>
+            <a:endParaRPr lang="en-US" sz="1500" dirty="0"/>
+          </a:p>
+          <a:p>
+            <a:pPr marL="342900" indent="-342900">
+              <a:spcAft>
+                <a:spcPts val="1000"/>
+              </a:spcAft>
+              <a:buSzPct val="100000"/>
+              <a:buChar char="●"/>
+            </a:pPr>
+            <a:r>
+              <a:rPr lang="en-US" sz="1500" dirty="0">
+                <a:solidFill>
+                  <a:srgbClr val="1A1A1A"/>
+                </a:solidFill>
+                <a:latin typeface="Calibri" pitchFamily="34" charset="0"/>
+                <a:ea typeface="Calibri" pitchFamily="34" charset="-122"/>
+                <a:cs typeface="Calibri" pitchFamily="34" charset="-120"/>
+              </a:rPr>
+              <a:t>Emparejamiento por IoU ≥ 0,5, como el toolkit oficial</a:t>
+            </a:r>
+            <a:endParaRPr lang="en-US" sz="1500" dirty="0"/>
+          </a:p>
+          <a:p>
+            <a:pPr marL="342900" indent="-342900">
+              <a:spcAft>
+                <a:spcPts val="1000"/>
+              </a:spcAft>
+              <a:buSzPct val="100000"/>
+              <a:buChar char="●"/>
+            </a:pPr>
+            <a:r>
+              <a:rPr lang="en-US" sz="1500" dirty="0">
+                <a:solidFill>
+                  <a:srgbClr val="1A1A1A"/>
+                </a:solidFill>
+                <a:latin typeface="Calibri" pitchFamily="34" charset="0"/>
+                <a:ea typeface="Calibri" pitchFamily="34" charset="-122"/>
+                <a:cs typeface="Calibri" pitchFamily="34" charset="-120"/>
+              </a:rPr>
+              <a:t>Se ignoran las regiones marcadas en el GT</a:t>
+            </a:r>
+            <a:endParaRPr lang="en-US" sz="1500" dirty="0"/>
+          </a:p>
+          <a:p>
+            <a:pPr marL="342900" indent="-342900">
+              <a:spcAft>
+                <a:spcPts val="1000"/>
+              </a:spcAft>
+              <a:buSzPct val="100000"/>
+              <a:buChar char="●"/>
+            </a:pPr>
+            <a:r>
+              <a:rPr lang="en-US" sz="1500" dirty="0">
+                <a:solidFill>
+                  <a:srgbClr val="1A1A1A"/>
+                </a:solidFill>
+                <a:latin typeface="Calibri" pitchFamily="34" charset="0"/>
+                <a:ea typeface="Calibri" pitchFamily="34" charset="-122"/>
+                <a:cs typeface="Calibri" pitchFamily="34" charset="-120"/>
+              </a:rPr>
+              <a:t>Promedio sobre las 20 secuencias de test</a:t>
+            </a:r>
+            <a:endParaRPr lang="en-US" sz="1500" dirty="0"/>
+          </a:p>
+        </p:txBody>
+      </p:sp>
+      <p:sp>
+        <p:nvSpPr>
+          <p:cNvPr id="4" name="Text 2"/>
+          <p:cNvSpPr txBox="1"/>
+          <p:nvPr/>
+        </p:nvSpPr>
+        <p:spPr>
+          <a:xfrm>
+            <a:off x="4389120" y="1051560"/>
+            <a:ext cx="914400" cy="274320"/>
+          </a:xfrm>
+          <a:prstGeom prst="rect">
+            <a:avLst/>
+          </a:prstGeom>
+          <a:noFill/>
+          <a:ln/>
+        </p:spPr>
+        <p:txBody>
+          <a:bodyPr wrap="square" lIns="0" tIns="0" rIns="0" bIns="0" rtlCol="0" anchor="t"/>
+          <a:lstStyle/>
+          <a:p>
+            <a:pPr indent="0" marL="0">
+              <a:buNone/>
+            </a:pPr>
+            <a:r>
+              <a:rPr lang="en-US" sz="1400" b="1" dirty="0">
+                <a:solidFill>
+                  <a:srgbClr val="1B3A66"/>
+                </a:solidFill>
+                <a:latin typeface="Calibri" pitchFamily="34" charset="0"/>
+                <a:ea typeface="Calibri" pitchFamily="34" charset="-122"/>
+                <a:cs typeface="Calibri" pitchFamily="34" charset="-120"/>
+              </a:rPr>
+              <a:t>MOTA</a:t>
+            </a:r>
+            <a:endParaRPr lang="en-US" sz="1400" dirty="0"/>
+          </a:p>
+        </p:txBody>
+      </p:sp>
+      <p:pic>
+        <p:nvPicPr>
+          <p:cNvPr id="5" name="Image 0" descr="mota">    </p:cNvPr>
+          <p:cNvPicPr>
+            <a:picLocks noChangeAspect="1"/>
+          </p:cNvPicPr>
+          <p:nvPr/>
+        </p:nvPicPr>
+        <p:blipFill>
+          <a:blip r:embed="rId1"/>
+          <a:stretch>
+            <a:fillRect/>
+          </a:stretch>
+        </p:blipFill>
+        <p:spPr>
+          <a:xfrm>
+            <a:off x="5394960" y="960120"/>
+            <a:ext cx="3008376" cy="536478"/>
+          </a:xfrm>
+          <a:prstGeom prst="rect">
+            <a:avLst/>
+          </a:prstGeom>
+        </p:spPr>
+      </p:pic>
+      <p:sp>
+        <p:nvSpPr>
+          <p:cNvPr id="6" name="Text 3"/>
+          <p:cNvSpPr txBox="1"/>
+          <p:nvPr/>
+        </p:nvSpPr>
+        <p:spPr>
+          <a:xfrm>
+            <a:off x="4389120" y="1874520"/>
+            <a:ext cx="914400" cy="274320"/>
+          </a:xfrm>
+          <a:prstGeom prst="rect">
+            <a:avLst/>
+          </a:prstGeom>
+          <a:noFill/>
+          <a:ln/>
+        </p:spPr>
+        <p:txBody>
+          <a:bodyPr wrap="square" lIns="0" tIns="0" rIns="0" bIns="0" rtlCol="0" anchor="t"/>
+          <a:lstStyle/>
+          <a:p>
+            <a:pPr indent="0" marL="0">
+              <a:buNone/>
+            </a:pPr>
+            <a:r>
+              <a:rPr lang="en-US" sz="1400" b="1" dirty="0">
+                <a:solidFill>
+                  <a:srgbClr val="1B3A66"/>
+                </a:solidFill>
+                <a:latin typeface="Calibri" pitchFamily="34" charset="0"/>
+                <a:ea typeface="Calibri" pitchFamily="34" charset="-122"/>
+                <a:cs typeface="Calibri" pitchFamily="34" charset="-120"/>
+              </a:rPr>
+              <a:t>IDF1</a:t>
+            </a:r>
+            <a:endParaRPr lang="en-US" sz="1400" dirty="0"/>
+          </a:p>
+        </p:txBody>
+      </p:sp>
+      <p:pic>
+        <p:nvPicPr>
+          <p:cNvPr id="7" name="Image 1" descr="idf1">    </p:cNvPr>
+          <p:cNvPicPr>
+            <a:picLocks noChangeAspect="1"/>
+          </p:cNvPicPr>
+          <p:nvPr/>
+        </p:nvPicPr>
+        <p:blipFill>
+          <a:blip r:embed="rId2"/>
+          <a:stretch>
+            <a:fillRect/>
+          </a:stretch>
+        </p:blipFill>
+        <p:spPr>
+          <a:xfrm>
+            <a:off x="5394960" y="1783080"/>
+            <a:ext cx="3279678" cy="542514"/>
+          </a:xfrm>
+          <a:prstGeom prst="rect">
+            <a:avLst/>
+          </a:prstGeom>
+        </p:spPr>
+      </p:pic>
+      <p:sp>
+        <p:nvSpPr>
+          <p:cNvPr id="8" name="Text 4"/>
+          <p:cNvSpPr txBox="1"/>
+          <p:nvPr/>
+        </p:nvSpPr>
+        <p:spPr>
+          <a:xfrm>
+            <a:off x="4389120" y="3474720"/>
+            <a:ext cx="914400" cy="274320"/>
+          </a:xfrm>
+          <a:prstGeom prst="rect">
+            <a:avLst/>
+          </a:prstGeom>
+          <a:noFill/>
+          <a:ln/>
+        </p:spPr>
+        <p:txBody>
+          <a:bodyPr wrap="square" lIns="0" tIns="0" rIns="0" bIns="0" rtlCol="0" anchor="t"/>
+          <a:lstStyle/>
+          <a:p>
+            <a:pPr indent="0" marL="0">
+              <a:buNone/>
+            </a:pPr>
+            <a:r>
+              <a:rPr lang="en-US" sz="1400" b="1" dirty="0">
+                <a:solidFill>
+                  <a:srgbClr val="1B3A66"/>
+                </a:solidFill>
+                <a:latin typeface="Calibri" pitchFamily="34" charset="0"/>
+                <a:ea typeface="Calibri" pitchFamily="34" charset="-122"/>
+                <a:cs typeface="Calibri" pitchFamily="34" charset="-120"/>
+              </a:rPr>
+              <a:t>FPS</a:t>
+            </a:r>
+            <a:endParaRPr lang="en-US" sz="1400" dirty="0"/>
+          </a:p>
+        </p:txBody>
+      </p:sp>
+      <p:pic>
+        <p:nvPicPr>
+          <p:cNvPr id="9" name="Image 2" descr="fps">    </p:cNvPr>
+          <p:cNvPicPr>
+            <a:picLocks noChangeAspect="1"/>
+          </p:cNvPicPr>
+          <p:nvPr/>
+        </p:nvPicPr>
+        <p:blipFill>
+          <a:blip r:embed="rId3"/>
+          <a:stretch>
+            <a:fillRect/>
+          </a:stretch>
+        </p:blipFill>
+        <p:spPr>
+          <a:xfrm>
+            <a:off x="5394960" y="3383280"/>
+            <a:ext cx="1676370" cy="560802"/>
+          </a:xfrm>
+          <a:prstGeom prst="rect">
+            <a:avLst/>
+          </a:prstGeom>
+        </p:spPr>
+      </p:pic>
+      <p:sp>
+        <p:nvSpPr>
+          <p:cNvPr id="10" name="Text 5"/>
+          <p:cNvSpPr txBox="1"/>
+          <p:nvPr/>
+        </p:nvSpPr>
+        <p:spPr>
+          <a:xfrm>
+            <a:off x="4389120" y="2606040"/>
+            <a:ext cx="914400" cy="274320"/>
+          </a:xfrm>
+          <a:prstGeom prst="rect">
+            <a:avLst/>
+          </a:prstGeom>
+          <a:noFill/>
+          <a:ln/>
+        </p:spPr>
+        <p:txBody>
+          <a:bodyPr wrap="square" lIns="0" tIns="0" rIns="0" bIns="0" rtlCol="0" anchor="t"/>
+          <a:lstStyle/>
+          <a:p>
+            <a:pPr indent="0" marL="0">
+              <a:buNone/>
+            </a:pPr>
+            <a:r>
+              <a:rPr lang="en-US" sz="1400" b="1" dirty="0">
+                <a:solidFill>
+                  <a:srgbClr val="1B3A66"/>
+                </a:solidFill>
+                <a:latin typeface="Calibri" pitchFamily="34" charset="0"/>
+                <a:ea typeface="Calibri" pitchFamily="34" charset="-122"/>
+                <a:cs typeface="Calibri" pitchFamily="34" charset="-120"/>
+              </a:rPr>
+              <a:t>IDS</a:t>
+            </a:r>
+            <a:endParaRPr lang="en-US" sz="1400" dirty="0"/>
+          </a:p>
+        </p:txBody>
+      </p:sp>
+      <p:sp>
+        <p:nvSpPr>
+          <p:cNvPr id="11" name="Text 6"/>
+          <p:cNvSpPr txBox="1"/>
+          <p:nvPr/>
+        </p:nvSpPr>
+        <p:spPr>
+          <a:xfrm>
+            <a:off x="5394960" y="2606040"/>
+            <a:ext cx="3383280" cy="548640"/>
+          </a:xfrm>
+          <a:prstGeom prst="rect">
+            <a:avLst/>
+          </a:prstGeom>
+          <a:noFill/>
+          <a:ln/>
+        </p:spPr>
+        <p:txBody>
+          <a:bodyPr wrap="square" lIns="0" tIns="0" rIns="0" bIns="0" rtlCol="0" anchor="t"/>
+          <a:lstStyle/>
+          <a:p>
+            <a:pPr indent="0" marL="0">
+              <a:buNone/>
+            </a:pPr>
+            <a:r>
+              <a:rPr lang="en-US" sz="1300" dirty="0">
+                <a:solidFill>
+                  <a:srgbClr val="1A1A1A"/>
+                </a:solidFill>
+                <a:latin typeface="Calibri" pitchFamily="34" charset="0"/>
+                <a:ea typeface="Calibri" pitchFamily="34" charset="-122"/>
+                <a:cs typeface="Calibri" pitchFamily="34" charset="-120"/>
+              </a:rPr>
+              <a:t>Número de veces que un vehículo cambia de identificador</a:t>
+            </a:r>
+            <a:endParaRPr lang="en-US" sz="1300" dirty="0"/>
+          </a:p>
+        </p:txBody>
+      </p:sp>
+      <p:sp>
+        <p:nvSpPr>
+          <p:cNvPr id="12" name="Text 7"/>
+          <p:cNvSpPr txBox="1"/>
+          <p:nvPr/>
+        </p:nvSpPr>
+        <p:spPr>
+          <a:xfrm>
+            <a:off x="4389120" y="4023360"/>
+            <a:ext cx="4389120" cy="640080"/>
+          </a:xfrm>
+          <a:prstGeom prst="rect">
+            <a:avLst/>
+          </a:prstGeom>
+          <a:noFill/>
+          <a:ln/>
+        </p:spPr>
+        <p:txBody>
+          <a:bodyPr wrap="square" lIns="0" tIns="0" rIns="0" bIns="0" rtlCol="0" anchor="t"/>
+          <a:lstStyle/>
+          <a:p>
+            <a:pPr indent="0" marL="0">
+              <a:buNone/>
+            </a:pPr>
+            <a:r>
+              <a:rPr lang="en-US" sz="1200" dirty="0">
+                <a:solidFill>
+                  <a:srgbClr val="6B7280"/>
+                </a:solidFill>
+                <a:latin typeface="Calibri" pitchFamily="34" charset="0"/>
+                <a:ea typeface="Calibri" pitchFamily="34" charset="-122"/>
+                <a:cs typeface="Calibri" pitchFamily="34" charset="-120"/>
+              </a:rPr>
+              <a:t>MOTA penaliza errores de detección y de identidad; IDF1 mide cuánto se conserva el mismo ID a lo largo del video.</a:t>
+            </a:r>
+            <a:endParaRPr lang="en-US" sz="1200" dirty="0"/>
+          </a:p>
+        </p:txBody>
+      </p:sp>
+      <p:sp>
+        <p:nvSpPr>
+          <p:cNvPr id="13" name="Text 8"/>
+          <p:cNvSpPr txBox="1"/>
+          <p:nvPr/>
+        </p:nvSpPr>
+        <p:spPr>
+          <a:xfrm>
+            <a:off x="365760" y="4636008"/>
+            <a:ext cx="8412480" cy="256032"/>
+          </a:xfrm>
+          <a:prstGeom prst="rect">
+            <a:avLst/>
+          </a:prstGeom>
+          <a:noFill/>
+          <a:ln/>
+        </p:spPr>
+        <p:txBody>
+          <a:bodyPr wrap="square" lIns="0" tIns="0" rIns="0" bIns="0" rtlCol="0" anchor="t"/>
+          <a:lstStyle/>
+          <a:p>
+            <a:pPr indent="0" marL="0">
+              <a:buNone/>
+            </a:pPr>
+            <a:r>
+              <a:rPr lang="en-US" sz="1000" i="1" dirty="0">
+                <a:solidFill>
+                  <a:srgbClr val="6B7280"/>
+                </a:solidFill>
+                <a:latin typeface="Calibri" pitchFamily="34" charset="0"/>
+                <a:ea typeface="Calibri" pitchFamily="34" charset="-122"/>
+                <a:cs typeface="Calibri" pitchFamily="34" charset="-120"/>
+              </a:rPr>
+              <a:t>Bernardin y Stiefelhagen [15]; Ristani et al. [16]</a:t>
+            </a:r>
+            <a:endParaRPr lang="en-US" sz="1000" dirty="0"/>
+          </a:p>
+        </p:txBody>
+      </p:sp>
+      <p:sp>
+        <p:nvSpPr>
+          <p:cNvPr id="25" name="Slide Number Placeholder 0"/>
+          <p:cNvSpPr>
+            <a:spLocks noGrp="1"/>
+          </p:cNvSpPr>
+          <p:nvPr>
+            <p:ph type="sldNum" sz="quarter" idx="4294967295"/>
+          </p:nvPr>
+        </p:nvSpPr>
+        <p:spPr>
+          <a:xfrm>
+            <a:off x="8686800" y="4937760"/>
+            <a:ext cx="365760" cy="205740"/>
+          </a:xfrm>
+          <a:prstGeom prst="rect">
+            <a:avLst/>
+          </a:prstGeom>
+          <a:extLst>
+            <a:ext uri="{C572A759-6A51-4108-AA02-DFA0A04FC94B}">
+              <ma14:wrappingTextBoxFlag xmlns:ma14="http://schemas.microsoft.com/office/mac/drawingml/2011/main" val="0"/>
+            </a:ext>
+          </a:extLst>
+        </p:spPr>
+        <p:txBody>
+          <a:bodyPr lIns="0" tIns="0" rIns="0" bIns="0" anchor="ctr"/>
+          <a:lstStyle>
+            <a:lvl1pPr>
+              <a:defRPr sz="800">
+                <a:solidFill>
+                  <a:srgbClr val="4B5563"/>
+                </a:solidFill>
+                <a:latin typeface="Calibri"/>
+                <a:ea typeface="Calibri"/>
+                <a:cs typeface="Calibri"/>
+              </a:defRPr>
+            </a:lvl1pPr>
+          </a:lstStyle>
+          <a:p>
+            <a:pPr algn="l"/>
+            <a:fld id="{F7021451-1387-4CA6-816F-3879F97B5CBC}" type="slidenum">
+              <a:rPr b="0" lang="en-US"/>
+              <a:t>21</a:t>
+            </a:fld>
+            <a:endParaRPr lang="en-US"/>
+          </a:p>
+        </p:txBody>
+      </p:sp>
+    </p:spTree>
+  </p:cSld>
+  <p:clrMapOvr>
+    <a:masterClrMapping/>
+  </p:clrMapOvr>
+</p:sld>
+</file>
+
+<file path=ppt/slides/slide22.xml><?xml version="1.0" encoding="utf-8"?>
+<p:sld xmlns:a="http://schemas.openxmlformats.org/drawingml/2006/main" xmlns:r="http://schemas.openxmlformats.org/officeDocument/2006/relationships" xmlns:p="http://schemas.openxmlformats.org/presentationml/2006/main">
+  <p:cSld name="Slide 22">
+    <p:spTree>
+      <p:nvGrpSpPr>
+        <p:cNvPr id="1" name=""/>
+        <p:cNvGrpSpPr/>
+        <p:nvPr/>
+      </p:nvGrpSpPr>
+      <p:grpSpPr>
+        <a:xfrm>
+          <a:off x="0" y="0"/>
+          <a:ext cx="0" cy="0"/>
+          <a:chOff x="0" y="0"/>
+          <a:chExt cx="0" cy="0"/>
+        </a:xfrm>
+      </p:grpSpPr>
+      <p:sp>
+        <p:nvSpPr>
+          <p:cNvPr id="2" name="Text 1"/>
+          <p:cNvSpPr/>
+          <p:nvPr>
+            <p:ph idx="101" type="title" hasCustomPrompt="1"/>
+          </p:nvPr>
+        </p:nvSpPr>
+        <p:spPr>
+          <a:xfrm>
+            <a:off x="182880" y="36576"/>
+            <a:ext cx="8778240" cy="475488"/>
+          </a:xfrm>
+          <a:prstGeom prst="rect">
+            <a:avLst/>
+          </a:prstGeom>
+          <a:noFill/>
+          <a:ln/>
+        </p:spPr>
+        <p:txBody>
+          <a:bodyPr wrap="square" lIns="0" tIns="0" rIns="0" bIns="0" rtlCol="0" anchor="ctr"/>
+          <a:lstStyle/>
+          <a:p>
+            <a:pPr algn="l" indent="0" marL="0">
+              <a:buNone/>
+            </a:pPr>
+            <a:r>
+              <a:rPr lang="en-US" sz="2400" dirty="0">
+                <a:solidFill>
+                  <a:srgbClr val="FFFFFF"/>
+                </a:solidFill>
+                <a:latin typeface="Calibri" pitchFamily="34" charset="0"/>
+                <a:ea typeface="Calibri" pitchFamily="34" charset="-122"/>
+                <a:cs typeface="Calibri" pitchFamily="34" charset="-120"/>
+              </a:rPr>
               <a:t>Comparación de los cuatro métodos</a:t>
             </a:r>
             <a:endParaRPr lang="en-US" sz="2400" dirty="0"/>
@@ -16044,7 +17206,7 @@
       </p:sp>
       <p:graphicFrame>
         <p:nvGraphicFramePr>
-          <p:cNvPr id="22" name="Table 0"/>
+          <p:cNvPr id="23" name="Table 0"/>
           <p:cNvGraphicFramePr>
             <a:graphicFrameLocks noGrp="1"/>
           </p:cNvGraphicFramePr>
@@ -16694,7 +17856,7 @@
                         <a:buNone/>
                       </a:pPr>
                       <a:r>
-                        <a:rPr lang="en-US" sz="1400" b="1" dirty="0">
+                        <a:rPr lang="en-US" sz="1400" dirty="0">
                           <a:solidFill>
                             <a:srgbClr val="1A1A1A"/>
                           </a:solidFill>
@@ -16724,9 +17886,6 @@
                     <a:lnB w="0" cap="flat" cmpd="sng" algn="ctr">
                       <a:noFill/>
                     </a:lnB>
-                    <a:solidFill>
-                      <a:srgbClr val="FFDE91"/>
-                    </a:solidFill>
                   </a:tcPr>
                 </a:tc>
                 <a:tc>
@@ -16864,7 +18023,7 @@
                         <a:buNone/>
                       </a:pPr>
                       <a:r>
-                        <a:rPr lang="en-US" sz="1400" b="1" dirty="0">
+                        <a:rPr lang="en-US" sz="1400" dirty="0">
                           <a:solidFill>
                             <a:srgbClr val="1A1A1A"/>
                           </a:solidFill>
@@ -16894,9 +18053,6 @@
                     <a:lnB w="0" cap="flat" cmpd="sng" algn="ctr">
                       <a:noFill/>
                     </a:lnB>
-                    <a:solidFill>
-                      <a:srgbClr val="FFDE91"/>
-                    </a:solidFill>
                   </a:tcPr>
                 </a:tc>
               </a:tr>
@@ -17169,54 +18325,7 @@
                           <a:ea typeface="Cambria" pitchFamily="34" charset="-122"/>
                           <a:cs typeface="Cambria" pitchFamily="34" charset="-120"/>
                         </a:rPr>
-                        <a:t>4  SAHI + YOLO26 + ByteTrack</a:t>
-                      </a:r>
-                      <a:endParaRPr lang="en-US" sz="1400" dirty="0">
-                        <a:latin typeface="Cambria" charset="0"/>
-                        <a:ea typeface="Cambria" charset="0"/>
-                        <a:cs typeface="Cambria" charset="0"/>
-                      </a:endParaRPr>
-                    </a:p>
-                  </a:txBody>
-                  <a:tcPr marL="73152" marR="73152" marT="45720" marB="45720" anchor="ctr">
-                    <a:lnL w="0" cap="flat" cmpd="sng" algn="ctr">
-                      <a:noFill/>
-                    </a:lnL>
-                    <a:lnR w="0" cap="flat" cmpd="sng" algn="ctr">
-                      <a:noFill/>
-                    </a:lnR>
-                    <a:lnT w="0" cap="flat" cmpd="sng" algn="ctr">
-                      <a:noFill/>
-                    </a:lnT>
-                    <a:lnB w="19050" cap="flat" cmpd="sng" algn="ctr">
-                      <a:solidFill>
-                        <a:srgbClr val="1A1A1A"/>
-                      </a:solidFill>
-                      <a:prstDash val="solid"/>
-                      <a:round/>
-                      <a:headEnd type="none" w="med" len="med"/>
-                      <a:tailEnd type="none" w="med" len="med"/>
-                    </a:lnB>
-                  </a:tcPr>
-                </a:tc>
-                <a:tc>
-                  <a:txBody>
-                    <a:bodyPr/>
-                    <a:lstStyle/>
-                    <a:p>
-                      <a:pPr algn="ctr" indent="0" marL="0">
-                        <a:buNone/>
-                      </a:pPr>
-                      <a:r>
-                        <a:rPr lang="en-US" sz="1400" dirty="0">
-                          <a:solidFill>
-                            <a:srgbClr val="1A1A1A"/>
-                          </a:solidFill>
-                          <a:latin typeface="Cambria" pitchFamily="34" charset="0"/>
-                          <a:ea typeface="Cambria" pitchFamily="34" charset="-122"/>
-                          <a:cs typeface="Cambria" pitchFamily="34" charset="-120"/>
-                        </a:rPr>
-                        <a:t>0,473</a:t>
+                        <a:t>4  SAHI + fusión + filtro de escala</a:t>
                       </a:r>
                       <a:endParaRPr lang="en-US" sz="1400" dirty="0">
                         <a:latin typeface="Cambria" charset="0"/>
@@ -17263,7 +18372,57 @@
                           <a:ea typeface="Cambria" pitchFamily="34" charset="-122"/>
                           <a:cs typeface="Cambria" pitchFamily="34" charset="-120"/>
                         </a:rPr>
-                        <a:t>0,691</a:t>
+                        <a:t>0,563</a:t>
+                      </a:r>
+                      <a:endParaRPr lang="en-US" sz="1400" dirty="0">
+                        <a:latin typeface="Cambria" charset="0"/>
+                        <a:ea typeface="Cambria" charset="0"/>
+                        <a:cs typeface="Cambria" charset="0"/>
+                      </a:endParaRPr>
+                    </a:p>
+                  </a:txBody>
+                  <a:tcPr marL="73152" marR="73152" marT="45720" marB="45720" anchor="ctr">
+                    <a:lnL w="0" cap="flat" cmpd="sng" algn="ctr">
+                      <a:noFill/>
+                    </a:lnL>
+                    <a:lnR w="0" cap="flat" cmpd="sng" algn="ctr">
+                      <a:noFill/>
+                    </a:lnR>
+                    <a:lnT w="0" cap="flat" cmpd="sng" algn="ctr">
+                      <a:noFill/>
+                    </a:lnT>
+                    <a:lnB w="19050" cap="flat" cmpd="sng" algn="ctr">
+                      <a:solidFill>
+                        <a:srgbClr val="1A1A1A"/>
+                      </a:solidFill>
+                      <a:prstDash val="solid"/>
+                      <a:round/>
+                      <a:headEnd type="none" w="med" len="med"/>
+                      <a:tailEnd type="none" w="med" len="med"/>
+                    </a:lnB>
+                    <a:solidFill>
+                      <a:srgbClr val="FFDE91"/>
+                    </a:solidFill>
+                  </a:tcPr>
+                </a:tc>
+                <a:tc>
+                  <a:txBody>
+                    <a:bodyPr/>
+                    <a:lstStyle/>
+                    <a:p>
+                      <a:pPr algn="ctr" indent="0" marL="0">
+                        <a:buNone/>
+                      </a:pPr>
+                      <a:r>
+                        <a:rPr lang="en-US" sz="1400" b="1" dirty="0">
+                          <a:solidFill>
+                            <a:srgbClr val="1A1A1A"/>
+                          </a:solidFill>
+                          <a:latin typeface="Cambria" pitchFamily="34" charset="0"/>
+                          <a:ea typeface="Cambria" pitchFamily="34" charset="-122"/>
+                          <a:cs typeface="Cambria" pitchFamily="34" charset="-120"/>
+                        </a:rPr>
+                        <a:t>0,756</a:t>
                       </a:r>
                       <a:endParaRPr lang="en-US" sz="1400" dirty="0">
                         <a:latin typeface="Cambria" charset="0"/>
@@ -17313,7 +18472,7 @@
                           <a:ea typeface="Cambria" pitchFamily="34" charset="-122"/>
                           <a:cs typeface="Cambria" pitchFamily="34" charset="-120"/>
                         </a:rPr>
-                        <a:t>162</a:t>
+                        <a:t>88</a:t>
                       </a:r>
                       <a:endParaRPr lang="en-US" sz="1400" dirty="0">
                         <a:latin typeface="Cambria" charset="0"/>
@@ -17360,7 +18519,7 @@
                           <a:ea typeface="Cambria" pitchFamily="34" charset="-122"/>
                           <a:cs typeface="Cambria" pitchFamily="34" charset="-120"/>
                         </a:rPr>
-                        <a:t>9,1</a:t>
+                        <a:t>11,9</a:t>
                       </a:r>
                       <a:endParaRPr lang="en-US" sz="1400" dirty="0">
                         <a:latin typeface="Cambria" charset="0"/>
@@ -17399,7 +18558,7 @@
                         <a:buNone/>
                       </a:pPr>
                       <a:r>
-                        <a:rPr lang="en-US" sz="1400" dirty="0">
+                        <a:rPr lang="en-US" sz="1400" b="1" dirty="0">
                           <a:solidFill>
                             <a:srgbClr val="1A1A1A"/>
                           </a:solidFill>
@@ -17407,7 +18566,7 @@
                           <a:ea typeface="Cambria" pitchFamily="34" charset="-122"/>
                           <a:cs typeface="Cambria" pitchFamily="34" charset="-120"/>
                         </a:rPr>
-                        <a:t>0,452</a:t>
+                        <a:t>0,559 †</a:t>
                       </a:r>
                       <a:endParaRPr lang="en-US" sz="1400" dirty="0">
                         <a:latin typeface="Cambria" charset="0"/>
@@ -17435,6 +18594,9 @@
                       <a:headEnd type="none" w="med" len="med"/>
                       <a:tailEnd type="none" w="med" len="med"/>
                     </a:lnB>
+                    <a:solidFill>
+                      <a:srgbClr val="FFDE91"/>
+                    </a:solidFill>
                   </a:tcPr>
                 </a:tc>
               </a:tr>
@@ -17450,8 +18612,8 @@
         </p:nvSpPr>
         <p:spPr>
           <a:xfrm>
-            <a:off x="457200" y="3794760"/>
-            <a:ext cx="8321040" cy="1005840"/>
+            <a:off x="457200" y="3657600"/>
+            <a:ext cx="8321040" cy="1097280"/>
           </a:xfrm>
           <a:prstGeom prst="rect">
             <a:avLst/>
@@ -17465,13 +18627,13 @@
           <a:p>
             <a:pPr marL="342900" indent="-342900">
               <a:spcAft>
-                <a:spcPts val="600"/>
+                <a:spcPts val="500"/>
               </a:spcAft>
               <a:buSzPct val="100000"/>
               <a:buChar char="●"/>
             </a:pPr>
             <a:r>
-              <a:rPr lang="en-US" sz="1300" dirty="0">
+              <a:rPr lang="en-US" sz="1200" dirty="0">
                 <a:solidFill>
                   <a:srgbClr val="1A1A1A"/>
                 </a:solidFill>
@@ -17479,20 +18641,20 @@
                 <a:ea typeface="Calibri" pitchFamily="34" charset="-122"/>
                 <a:cs typeface="Calibri" pitchFamily="34" charset="-120"/>
               </a:rPr>
-              <a:t>Promedio sobre las 20 secuencias de test, con hiperparámetros ajustados por validación cruzada</a:t>
+              <a:t>Promedio sobre las 20 secuencias de test, con hiperparámetros ajustados por validación cruzada. Resaltado: mejor de cada columna</a:t>
             </a:r>
-            <a:endParaRPr lang="en-US" sz="1300" dirty="0"/>
+            <a:endParaRPr lang="en-US" sz="1200" dirty="0"/>
           </a:p>
           <a:p>
             <a:pPr marL="342900" indent="-342900">
               <a:spcAft>
-                <a:spcPts val="600"/>
+                <a:spcPts val="500"/>
               </a:spcAft>
               <a:buSzPct val="100000"/>
               <a:buChar char="●"/>
             </a:pPr>
             <a:r>
-              <a:rPr lang="en-US" sz="1300" dirty="0">
+              <a:rPr lang="en-US" sz="1200" dirty="0">
                 <a:solidFill>
                   <a:srgbClr val="1A1A1A"/>
                 </a:solidFill>
@@ -17500,20 +18662,20 @@
                 <a:ea typeface="Calibri" pitchFamily="34" charset="-122"/>
                 <a:cs typeface="Calibri" pitchFamily="34" charset="-120"/>
               </a:rPr>
-              <a:t>Resaltado: mejor valor de cada columna. FPS medido en GPU sobre 5 secuencias, con valores por defecto</a:t>
+              <a:t>FPS en GPU sobre las 5 primeras secuencias; el método 4 se midió de punta a punta (3 detectores + fusión + tracking)</a:t>
             </a:r>
-            <a:endParaRPr lang="en-US" sz="1300" dirty="0"/>
+            <a:endParaRPr lang="en-US" sz="1200" dirty="0"/>
           </a:p>
           <a:p>
             <a:pPr marL="342900" indent="-342900">
               <a:spcAft>
-                <a:spcPts val="600"/>
+                <a:spcPts val="500"/>
               </a:spcAft>
               <a:buSzPct val="100000"/>
               <a:buChar char="●"/>
             </a:pPr>
             <a:r>
-              <a:rPr lang="en-US" sz="1300" dirty="0">
+              <a:rPr lang="en-US" sz="1200" dirty="0">
                 <a:solidFill>
                   <a:srgbClr val="1A1A1A"/>
                 </a:solidFill>
@@ -17521,9 +18683,9 @@
                 <a:ea typeface="Calibri" pitchFamily="34" charset="-122"/>
                 <a:cs typeface="Calibri" pitchFamily="34" charset="-120"/>
               </a:rPr>
-              <a:t>Entre los métodos 1, 2 y 4 hay ≈ 0,02 de MOTA: dentro del ruido entre secuencias</a:t>
+              <a:t>† Validación cruzada sobre secuencias completas (ByteTrack fijo + grilla de post-proceso); los métodos 1–3 usan ventanas de 300 frames</a:t>
             </a:r>
-            <a:endParaRPr lang="en-US" sz="1300" dirty="0"/>
+            <a:endParaRPr lang="en-US" sz="1200" dirty="0"/>
           </a:p>
         </p:txBody>
       </p:sp>
@@ -17569,7 +18731,7 @@
             <a:pPr algn="l"/>
             <a:fld id="{F7021451-1387-4CA6-816F-3879F97B5CBC}" type="slidenum">
               <a:rPr b="0" lang="en-US"/>
-              <a:t>21</a:t>
+              <a:t>22</a:t>
             </a:fld>
             <a:endParaRPr lang="en-US"/>
           </a:p>
@@ -17583,9 +18745,9 @@
 </p:sld>
 </file>
 
-<file path=ppt/slides/slide22.xml><?xml version="1.0" encoding="utf-8"?>
+<file path=ppt/slides/slide23.xml><?xml version="1.0" encoding="utf-8"?>
 <p:sld xmlns:a="http://schemas.openxmlformats.org/drawingml/2006/main" xmlns:r="http://schemas.openxmlformats.org/officeDocument/2006/relationships" xmlns:p="http://schemas.openxmlformats.org/presentationml/2006/main">
-  <p:cSld name="Slide 22">
+  <p:cSld name="Slide 23">
     <p:spTree>
       <p:nvGrpSpPr>
         <p:cNvPr id="1" name=""/>
@@ -17699,7 +18861,7 @@
             <a:pPr algn="l"/>
             <a:fld id="{F7021451-1387-4CA6-816F-3879F97B5CBC}" type="slidenum">
               <a:rPr b="0" lang="en-US"/>
-              <a:t>22</a:t>
+              <a:t>23</a:t>
             </a:fld>
             <a:endParaRPr lang="en-US"/>
           </a:p>
@@ -17713,9 +18875,9 @@
 </p:sld>
 </file>
 
-<file path=ppt/slides/slide23.xml><?xml version="1.0" encoding="utf-8"?>
+<file path=ppt/slides/slide24.xml><?xml version="1.0" encoding="utf-8"?>
 <p:sld xmlns:a="http://schemas.openxmlformats.org/drawingml/2006/main" xmlns:r="http://schemas.openxmlformats.org/officeDocument/2006/relationships" xmlns:p="http://schemas.openxmlformats.org/presentationml/2006/main">
-  <p:cSld name="Slide 23">
+  <p:cSld name="Slide 24">
     <p:spTree>
       <p:nvGrpSpPr>
         <p:cNvPr id="1" name=""/>
@@ -17773,7 +18935,7 @@
       </p:sp>
       <p:graphicFrame>
         <p:nvGraphicFramePr>
-          <p:cNvPr id="24" name="Table 0"/>
+          <p:cNvPr id="25" name="Table 0"/>
           <p:cNvGraphicFramePr>
             <a:graphicFrameLocks noGrp="1"/>
           </p:cNvGraphicFramePr>
@@ -17786,7 +18948,7 @@
           </p:nvPr>
         </p:nvGraphicFramePr>
         <p:xfrm>
-          <a:off x="365760" y="822960"/>
+          <a:off x="365760" y="777240"/>
           <a:ext cx="8412480" cy="914400"/>
         </p:xfrm>
         <a:graphic>
@@ -17799,7 +18961,7 @@
                 <a:gridCol w="1005840"/>
                 <a:gridCol w="3566160"/>
               </a:tblGrid>
-              <a:tr h="457200">
+              <a:tr h="411480">
                 <a:tc>
                   <a:txBody>
                     <a:bodyPr/>
@@ -17809,7 +18971,7 @@
                         <a:buNone/>
                       </a:pPr>
                       <a:r>
-                        <a:rPr lang="en-US" sz="1250" b="1" dirty="0">
+                        <a:rPr lang="en-US" sz="1200" b="1" dirty="0">
                           <a:solidFill>
                             <a:srgbClr val="1A1A1A"/>
                           </a:solidFill>
@@ -17819,7 +18981,7 @@
                         </a:rPr>
                         <a:t>Método</a:t>
                       </a:r>
-                      <a:endParaRPr lang="en-US" sz="1250" dirty="0">
+                      <a:endParaRPr lang="en-US" sz="1200" dirty="0">
                         <a:latin typeface="Cambria" charset="0"/>
                         <a:ea typeface="Cambria" charset="0"/>
                         <a:cs typeface="Cambria" charset="0"/>
@@ -17862,7 +19024,7 @@
                         <a:buNone/>
                       </a:pPr>
                       <a:r>
-                        <a:rPr lang="en-US" sz="1250" b="1" dirty="0">
+                        <a:rPr lang="en-US" sz="1200" b="1" dirty="0">
                           <a:solidFill>
                             <a:srgbClr val="1A1A1A"/>
                           </a:solidFill>
@@ -17872,7 +19034,7 @@
                         </a:rPr>
                         <a:t>Por defecto</a:t>
                       </a:r>
-                      <a:endParaRPr lang="en-US" sz="1250" dirty="0">
+                      <a:endParaRPr lang="en-US" sz="1200" dirty="0">
                         <a:latin typeface="Cambria" charset="0"/>
                         <a:ea typeface="Cambria" charset="0"/>
                         <a:cs typeface="Cambria" charset="0"/>
@@ -17915,7 +19077,7 @@
                         <a:buNone/>
                       </a:pPr>
                       <a:r>
-                        <a:rPr lang="en-US" sz="1250" b="1" dirty="0">
+                        <a:rPr lang="en-US" sz="1200" b="1" dirty="0">
                           <a:solidFill>
                             <a:srgbClr val="1A1A1A"/>
                           </a:solidFill>
@@ -17925,7 +19087,7 @@
                         </a:rPr>
                         <a:t>Ajustado</a:t>
                       </a:r>
-                      <a:endParaRPr lang="en-US" sz="1250" dirty="0">
+                      <a:endParaRPr lang="en-US" sz="1200" dirty="0">
                         <a:latin typeface="Cambria" charset="0"/>
                         <a:ea typeface="Cambria" charset="0"/>
                         <a:cs typeface="Cambria" charset="0"/>
@@ -17968,7 +19130,7 @@
                         <a:buNone/>
                       </a:pPr>
                       <a:r>
-                        <a:rPr lang="en-US" sz="1250" b="1" dirty="0">
+                        <a:rPr lang="en-US" sz="1200" b="1" dirty="0">
                           <a:solidFill>
                             <a:srgbClr val="1A1A1A"/>
                           </a:solidFill>
@@ -17978,7 +19140,7 @@
                         </a:rPr>
                         <a:t>Parámetros finales</a:t>
                       </a:r>
-                      <a:endParaRPr lang="en-US" sz="1250" dirty="0">
+                      <a:endParaRPr lang="en-US" sz="1200" dirty="0">
                         <a:latin typeface="Cambria" charset="0"/>
                         <a:ea typeface="Cambria" charset="0"/>
                         <a:cs typeface="Cambria" charset="0"/>
@@ -18013,7 +19175,7 @@
                   </a:tcPr>
                 </a:tc>
               </a:tr>
-              <a:tr h="457200">
+              <a:tr h="411480">
                 <a:tc>
                   <a:txBody>
                     <a:bodyPr/>
@@ -18023,7 +19185,7 @@
                         <a:buNone/>
                       </a:pPr>
                       <a:r>
-                        <a:rPr lang="en-US" sz="1250" dirty="0">
+                        <a:rPr lang="en-US" sz="1200" dirty="0">
                           <a:solidFill>
                             <a:srgbClr val="1A1A1A"/>
                           </a:solidFill>
@@ -18033,7 +19195,7 @@
                         </a:rPr>
                         <a:t>1  YOLOv11 + SORT</a:t>
                       </a:r>
-                      <a:endParaRPr lang="en-US" sz="1250" dirty="0">
+                      <a:endParaRPr lang="en-US" sz="1200" dirty="0">
                         <a:latin typeface="Cambria" charset="0"/>
                         <a:ea typeface="Cambria" charset="0"/>
                         <a:cs typeface="Cambria" charset="0"/>
@@ -18064,7 +19226,7 @@
                         <a:buNone/>
                       </a:pPr>
                       <a:r>
-                        <a:rPr lang="en-US" sz="1250" dirty="0">
+                        <a:rPr lang="en-US" sz="1200" dirty="0">
                           <a:solidFill>
                             <a:srgbClr val="1A1A1A"/>
                           </a:solidFill>
@@ -18074,7 +19236,7 @@
                         </a:rPr>
                         <a:t>0,472</a:t>
                       </a:r>
-                      <a:endParaRPr lang="en-US" sz="1250" dirty="0">
+                      <a:endParaRPr lang="en-US" sz="1200" dirty="0">
                         <a:latin typeface="Cambria" charset="0"/>
                         <a:ea typeface="Cambria" charset="0"/>
                         <a:cs typeface="Cambria" charset="0"/>
@@ -18105,7 +19267,7 @@
                         <a:buNone/>
                       </a:pPr>
                       <a:r>
-                        <a:rPr lang="en-US" sz="1250" b="1" dirty="0">
+                        <a:rPr lang="en-US" sz="1200" b="1" dirty="0">
                           <a:solidFill>
                             <a:srgbClr val="1A1A1A"/>
                           </a:solidFill>
@@ -18115,7 +19277,7 @@
                         </a:rPr>
                         <a:t>0,460</a:t>
                       </a:r>
-                      <a:endParaRPr lang="en-US" sz="1250" dirty="0">
+                      <a:endParaRPr lang="en-US" sz="1200" dirty="0">
                         <a:latin typeface="Cambria" charset="0"/>
                         <a:ea typeface="Cambria" charset="0"/>
                         <a:cs typeface="Cambria" charset="0"/>
@@ -18149,7 +19311,7 @@
                         <a:buNone/>
                       </a:pPr>
                       <a:r>
-                        <a:rPr lang="en-US" sz="1250" dirty="0">
+                        <a:rPr lang="en-US" sz="1200" dirty="0">
                           <a:solidFill>
                             <a:srgbClr val="1A1A1A"/>
                           </a:solidFill>
@@ -18159,7 +19321,7 @@
                         </a:rPr>
                         <a:t>conf 0,25 · min_hits 5 · iou 0,5</a:t>
                       </a:r>
-                      <a:endParaRPr lang="en-US" sz="1250" dirty="0">
+                      <a:endParaRPr lang="en-US" sz="1200" dirty="0">
                         <a:latin typeface="Cambria" charset="0"/>
                         <a:ea typeface="Cambria" charset="0"/>
                         <a:cs typeface="Cambria" charset="0"/>
@@ -18182,7 +19344,7 @@
                   </a:tcPr>
                 </a:tc>
               </a:tr>
-              <a:tr h="457200">
+              <a:tr h="411480">
                 <a:tc>
                   <a:txBody>
                     <a:bodyPr/>
@@ -18192,7 +19354,7 @@
                         <a:buNone/>
                       </a:pPr>
                       <a:r>
-                        <a:rPr lang="en-US" sz="1250" dirty="0">
+                        <a:rPr lang="en-US" sz="1200" dirty="0">
                           <a:solidFill>
                             <a:srgbClr val="1A1A1A"/>
                           </a:solidFill>
@@ -18202,7 +19364,7 @@
                         </a:rPr>
                         <a:t>2  YOLO26 + ByteTrack</a:t>
                       </a:r>
-                      <a:endParaRPr lang="en-US" sz="1250" dirty="0">
+                      <a:endParaRPr lang="en-US" sz="1200" dirty="0">
                         <a:latin typeface="Cambria" charset="0"/>
                         <a:ea typeface="Cambria" charset="0"/>
                         <a:cs typeface="Cambria" charset="0"/>
@@ -18233,7 +19395,7 @@
                         <a:buNone/>
                       </a:pPr>
                       <a:r>
-                        <a:rPr lang="en-US" sz="1250" dirty="0">
+                        <a:rPr lang="en-US" sz="1200" dirty="0">
                           <a:solidFill>
                             <a:srgbClr val="1A1A1A"/>
                           </a:solidFill>
@@ -18243,7 +19405,7 @@
                         </a:rPr>
                         <a:t>0,446</a:t>
                       </a:r>
-                      <a:endParaRPr lang="en-US" sz="1250" dirty="0">
+                      <a:endParaRPr lang="en-US" sz="1200" dirty="0">
                         <a:latin typeface="Cambria" charset="0"/>
                         <a:ea typeface="Cambria" charset="0"/>
                         <a:cs typeface="Cambria" charset="0"/>
@@ -18274,7 +19436,7 @@
                         <a:buNone/>
                       </a:pPr>
                       <a:r>
-                        <a:rPr lang="en-US" sz="1250" b="1" dirty="0">
+                        <a:rPr lang="en-US" sz="1200" b="1" dirty="0">
                           <a:solidFill>
                             <a:srgbClr val="1A1A1A"/>
                           </a:solidFill>
@@ -18284,7 +19446,7 @@
                         </a:rPr>
                         <a:t>0,479</a:t>
                       </a:r>
-                      <a:endParaRPr lang="en-US" sz="1250" dirty="0">
+                      <a:endParaRPr lang="en-US" sz="1200" dirty="0">
                         <a:latin typeface="Cambria" charset="0"/>
                         <a:ea typeface="Cambria" charset="0"/>
                         <a:cs typeface="Cambria" charset="0"/>
@@ -18318,7 +19480,7 @@
                         <a:buNone/>
                       </a:pPr>
                       <a:r>
-                        <a:rPr lang="en-US" sz="1250" dirty="0">
+                        <a:rPr lang="en-US" sz="1200" dirty="0">
                           <a:solidFill>
                             <a:srgbClr val="1A1A1A"/>
                           </a:solidFill>
@@ -18328,7 +19490,7 @@
                         </a:rPr>
                         <a:t>alta 0,75 · baja 0,05 · buffer 60 · match 0,7</a:t>
                       </a:r>
-                      <a:endParaRPr lang="en-US" sz="1250" dirty="0">
+                      <a:endParaRPr lang="en-US" sz="1200" dirty="0">
                         <a:latin typeface="Cambria" charset="0"/>
                         <a:ea typeface="Cambria" charset="0"/>
                         <a:cs typeface="Cambria" charset="0"/>
@@ -18351,7 +19513,7 @@
                   </a:tcPr>
                 </a:tc>
               </a:tr>
-              <a:tr h="457200">
+              <a:tr h="411480">
                 <a:tc>
                   <a:txBody>
                     <a:bodyPr/>
@@ -18361,7 +19523,7 @@
                         <a:buNone/>
                       </a:pPr>
                       <a:r>
-                        <a:rPr lang="en-US" sz="1250" dirty="0">
+                        <a:rPr lang="en-US" sz="1200" dirty="0">
                           <a:solidFill>
                             <a:srgbClr val="1A1A1A"/>
                           </a:solidFill>
@@ -18371,7 +19533,7 @@
                         </a:rPr>
                         <a:t>3  RT-DETRv4 + BoT-SORT</a:t>
                       </a:r>
-                      <a:endParaRPr lang="en-US" sz="1250" dirty="0">
+                      <a:endParaRPr lang="en-US" sz="1200" dirty="0">
                         <a:latin typeface="Cambria" charset="0"/>
                         <a:ea typeface="Cambria" charset="0"/>
                         <a:cs typeface="Cambria" charset="0"/>
@@ -18402,7 +19564,7 @@
                         <a:buNone/>
                       </a:pPr>
                       <a:r>
-                        <a:rPr lang="en-US" sz="1250" dirty="0">
+                        <a:rPr lang="en-US" sz="1200" dirty="0">
                           <a:solidFill>
                             <a:srgbClr val="1A1A1A"/>
                           </a:solidFill>
@@ -18412,7 +19574,7 @@
                         </a:rPr>
                         <a:t>−1,128</a:t>
                       </a:r>
-                      <a:endParaRPr lang="en-US" sz="1250" dirty="0">
+                      <a:endParaRPr lang="en-US" sz="1200" dirty="0">
                         <a:latin typeface="Cambria" charset="0"/>
                         <a:ea typeface="Cambria" charset="0"/>
                         <a:cs typeface="Cambria" charset="0"/>
@@ -18443,7 +19605,7 @@
                         <a:buNone/>
                       </a:pPr>
                       <a:r>
-                        <a:rPr lang="en-US" sz="1250" b="1" dirty="0">
+                        <a:rPr lang="en-US" sz="1200" b="1" dirty="0">
                           <a:solidFill>
                             <a:srgbClr val="1A1A1A"/>
                           </a:solidFill>
@@ -18453,7 +19615,7 @@
                         </a:rPr>
                         <a:t>0,402</a:t>
                       </a:r>
-                      <a:endParaRPr lang="en-US" sz="1250" dirty="0">
+                      <a:endParaRPr lang="en-US" sz="1200" dirty="0">
                         <a:latin typeface="Cambria" charset="0"/>
                         <a:ea typeface="Cambria" charset="0"/>
                         <a:cs typeface="Cambria" charset="0"/>
@@ -18487,7 +19649,7 @@
                         <a:buNone/>
                       </a:pPr>
                       <a:r>
-                        <a:rPr lang="en-US" sz="1250" dirty="0">
+                        <a:rPr lang="en-US" sz="1200" dirty="0">
                           <a:solidFill>
                             <a:srgbClr val="1A1A1A"/>
                           </a:solidFill>
@@ -18497,7 +19659,7 @@
                         </a:rPr>
                         <a:t>alta 0,75 · baja 0,40 · buffer 60 · match 0,8 · sin GMC</a:t>
                       </a:r>
-                      <a:endParaRPr lang="en-US" sz="1250" dirty="0">
+                      <a:endParaRPr lang="en-US" sz="1200" dirty="0">
                         <a:latin typeface="Cambria" charset="0"/>
                         <a:ea typeface="Cambria" charset="0"/>
                         <a:cs typeface="Cambria" charset="0"/>
@@ -18520,7 +19682,7 @@
                   </a:tcPr>
                 </a:tc>
               </a:tr>
-              <a:tr h="457200">
+              <a:tr h="411480">
                 <a:tc>
                   <a:txBody>
                     <a:bodyPr/>
@@ -18530,7 +19692,7 @@
                         <a:buNone/>
                       </a:pPr>
                       <a:r>
-                        <a:rPr lang="en-US" sz="1250" dirty="0">
+                        <a:rPr lang="en-US" sz="1200" dirty="0">
                           <a:solidFill>
                             <a:srgbClr val="1A1A1A"/>
                           </a:solidFill>
@@ -18538,9 +19700,9 @@
                           <a:ea typeface="Cambria" pitchFamily="34" charset="-122"/>
                           <a:cs typeface="Cambria" pitchFamily="34" charset="-120"/>
                         </a:rPr>
-                        <a:t>4  SAHI + YOLO26 + ByteTrack</a:t>
+                        <a:t>SAHI + YOLO26 (versión inicial)</a:t>
                       </a:r>
-                      <a:endParaRPr lang="en-US" sz="1250" dirty="0">
+                      <a:endParaRPr lang="en-US" sz="1200" dirty="0">
                         <a:latin typeface="Cambria" charset="0"/>
                         <a:ea typeface="Cambria" charset="0"/>
                         <a:cs typeface="Cambria" charset="0"/>
@@ -18571,7 +19733,7 @@
                         <a:buNone/>
                       </a:pPr>
                       <a:r>
-                        <a:rPr lang="en-US" sz="1250" dirty="0">
+                        <a:rPr lang="en-US" sz="1200" dirty="0">
                           <a:solidFill>
                             <a:srgbClr val="1A1A1A"/>
                           </a:solidFill>
@@ -18581,7 +19743,7 @@
                         </a:rPr>
                         <a:t>0,345</a:t>
                       </a:r>
-                      <a:endParaRPr lang="en-US" sz="1250" dirty="0">
+                      <a:endParaRPr lang="en-US" sz="1200" dirty="0">
                         <a:latin typeface="Cambria" charset="0"/>
                         <a:ea typeface="Cambria" charset="0"/>
                         <a:cs typeface="Cambria" charset="0"/>
@@ -18612,7 +19774,7 @@
                         <a:buNone/>
                       </a:pPr>
                       <a:r>
-                        <a:rPr lang="en-US" sz="1250" b="1" dirty="0">
+                        <a:rPr lang="en-US" sz="1200" b="1" dirty="0">
                           <a:solidFill>
                             <a:srgbClr val="1A1A1A"/>
                           </a:solidFill>
@@ -18622,7 +19784,7 @@
                         </a:rPr>
                         <a:t>0,452</a:t>
                       </a:r>
-                      <a:endParaRPr lang="en-US" sz="1250" dirty="0">
+                      <a:endParaRPr lang="en-US" sz="1200" dirty="0">
                         <a:latin typeface="Cambria" charset="0"/>
                         <a:ea typeface="Cambria" charset="0"/>
                         <a:cs typeface="Cambria" charset="0"/>
@@ -18656,7 +19818,7 @@
                         <a:buNone/>
                       </a:pPr>
                       <a:r>
-                        <a:rPr lang="en-US" sz="1250" dirty="0">
+                        <a:rPr lang="en-US" sz="1200" dirty="0">
                           <a:solidFill>
                             <a:srgbClr val="1A1A1A"/>
                           </a:solidFill>
@@ -18666,7 +19828,7 @@
                         </a:rPr>
                         <a:t>alta 0,70 · baja 0,15 · buffer 60 · match 0,8</a:t>
                       </a:r>
-                      <a:endParaRPr lang="en-US" sz="1250" dirty="0">
+                      <a:endParaRPr lang="en-US" sz="1200" dirty="0">
                         <a:latin typeface="Cambria" charset="0"/>
                         <a:ea typeface="Cambria" charset="0"/>
                         <a:cs typeface="Cambria" charset="0"/>
@@ -18689,7 +19851,7 @@
                   </a:tcPr>
                 </a:tc>
               </a:tr>
-              <a:tr h="457200">
+              <a:tr h="411480">
                 <a:tc>
                   <a:txBody>
                     <a:bodyPr/>
@@ -18699,7 +19861,7 @@
                         <a:buNone/>
                       </a:pPr>
                       <a:r>
-                        <a:rPr lang="en-US" sz="1250" dirty="0">
+                        <a:rPr lang="en-US" sz="1200" dirty="0">
                           <a:solidFill>
                             <a:srgbClr val="1A1A1A"/>
                           </a:solidFill>
@@ -18707,9 +19869,178 @@
                           <a:ea typeface="Cambria" pitchFamily="34" charset="-122"/>
                           <a:cs typeface="Cambria" pitchFamily="34" charset="-120"/>
                         </a:rPr>
-                        <a:t>Fusión YOLO26 + RT-DETR</a:t>
+                        <a:t>Fusión YOLO26 + RT-DETR (sin SAHI)</a:t>
                       </a:r>
-                      <a:endParaRPr lang="en-US" sz="1250" dirty="0">
+                      <a:endParaRPr lang="en-US" sz="1200" dirty="0">
+                        <a:latin typeface="Cambria" charset="0"/>
+                        <a:ea typeface="Cambria" charset="0"/>
+                        <a:cs typeface="Cambria" charset="0"/>
+                      </a:endParaRPr>
+                    </a:p>
+                  </a:txBody>
+                  <a:tcPr marL="73152" marR="73152" marT="45720" marB="45720" anchor="ctr">
+                    <a:lnL w="0" cap="flat" cmpd="sng" algn="ctr">
+                      <a:noFill/>
+                    </a:lnL>
+                    <a:lnR w="0" cap="flat" cmpd="sng" algn="ctr">
+                      <a:noFill/>
+                    </a:lnR>
+                    <a:lnT w="0" cap="flat" cmpd="sng" algn="ctr">
+                      <a:noFill/>
+                    </a:lnT>
+                    <a:lnB w="0" cap="flat" cmpd="sng" algn="ctr">
+                      <a:noFill/>
+                    </a:lnB>
+                  </a:tcPr>
+                </a:tc>
+                <a:tc>
+                  <a:txBody>
+                    <a:bodyPr/>
+                    <a:lstStyle/>
+                    <a:p>
+                      <a:pPr algn="ctr" indent="0" marL="0">
+                        <a:buNone/>
+                      </a:pPr>
+                      <a:r>
+                        <a:rPr lang="en-US" sz="1200" dirty="0">
+                          <a:solidFill>
+                            <a:srgbClr val="1A1A1A"/>
+                          </a:solidFill>
+                          <a:latin typeface="Cambria" pitchFamily="34" charset="0"/>
+                          <a:ea typeface="Cambria" pitchFamily="34" charset="-122"/>
+                          <a:cs typeface="Cambria" pitchFamily="34" charset="-120"/>
+                        </a:rPr>
+                        <a:t>0,167</a:t>
+                      </a:r>
+                      <a:endParaRPr lang="en-US" sz="1200" dirty="0">
+                        <a:latin typeface="Cambria" charset="0"/>
+                        <a:ea typeface="Cambria" charset="0"/>
+                        <a:cs typeface="Cambria" charset="0"/>
+                      </a:endParaRPr>
+                    </a:p>
+                  </a:txBody>
+                  <a:tcPr marL="73152" marR="73152" marT="45720" marB="45720" anchor="ctr">
+                    <a:lnL w="0" cap="flat" cmpd="sng" algn="ctr">
+                      <a:noFill/>
+                    </a:lnL>
+                    <a:lnR w="0" cap="flat" cmpd="sng" algn="ctr">
+                      <a:noFill/>
+                    </a:lnR>
+                    <a:lnT w="0" cap="flat" cmpd="sng" algn="ctr">
+                      <a:noFill/>
+                    </a:lnT>
+                    <a:lnB w="0" cap="flat" cmpd="sng" algn="ctr">
+                      <a:noFill/>
+                    </a:lnB>
+                  </a:tcPr>
+                </a:tc>
+                <a:tc>
+                  <a:txBody>
+                    <a:bodyPr/>
+                    <a:lstStyle/>
+                    <a:p>
+                      <a:pPr algn="ctr" indent="0" marL="0">
+                        <a:buNone/>
+                      </a:pPr>
+                      <a:r>
+                        <a:rPr lang="en-US" sz="1200" b="1" dirty="0">
+                          <a:solidFill>
+                            <a:srgbClr val="1A1A1A"/>
+                          </a:solidFill>
+                          <a:latin typeface="Cambria" pitchFamily="34" charset="0"/>
+                          <a:ea typeface="Cambria" pitchFamily="34" charset="-122"/>
+                          <a:cs typeface="Cambria" pitchFamily="34" charset="-120"/>
+                        </a:rPr>
+                        <a:t>0,529</a:t>
+                      </a:r>
+                      <a:endParaRPr lang="en-US" sz="1200" dirty="0">
+                        <a:latin typeface="Cambria" charset="0"/>
+                        <a:ea typeface="Cambria" charset="0"/>
+                        <a:cs typeface="Cambria" charset="0"/>
+                      </a:endParaRPr>
+                    </a:p>
+                  </a:txBody>
+                  <a:tcPr marL="73152" marR="73152" marT="45720" marB="45720" anchor="ctr">
+                    <a:lnL w="0" cap="flat" cmpd="sng" algn="ctr">
+                      <a:noFill/>
+                    </a:lnL>
+                    <a:lnR w="0" cap="flat" cmpd="sng" algn="ctr">
+                      <a:noFill/>
+                    </a:lnR>
+                    <a:lnT w="0" cap="flat" cmpd="sng" algn="ctr">
+                      <a:noFill/>
+                    </a:lnT>
+                    <a:lnB w="0" cap="flat" cmpd="sng" algn="ctr">
+                      <a:noFill/>
+                    </a:lnB>
+                    <a:solidFill>
+                      <a:srgbClr val="FFDE91"/>
+                    </a:solidFill>
+                  </a:tcPr>
+                </a:tc>
+                <a:tc>
+                  <a:txBody>
+                    <a:bodyPr/>
+                    <a:lstStyle/>
+                    <a:p>
+                      <a:pPr algn="l" indent="0" marL="0">
+                        <a:buNone/>
+                      </a:pPr>
+                      <a:r>
+                        <a:rPr lang="en-US" sz="1200" dirty="0">
+                          <a:solidFill>
+                            <a:srgbClr val="1A1A1A"/>
+                          </a:solidFill>
+                          <a:latin typeface="Cambria" pitchFamily="34" charset="0"/>
+                          <a:ea typeface="Cambria" pitchFamily="34" charset="-122"/>
+                          <a:cs typeface="Cambria" pitchFamily="34" charset="-120"/>
+                        </a:rPr>
+                        <a:t>alta 0,65 · baja 0,20 · buffer 30 · match 0,8</a:t>
+                      </a:r>
+                      <a:endParaRPr lang="en-US" sz="1200" dirty="0">
+                        <a:latin typeface="Cambria" charset="0"/>
+                        <a:ea typeface="Cambria" charset="0"/>
+                        <a:cs typeface="Cambria" charset="0"/>
+                      </a:endParaRPr>
+                    </a:p>
+                  </a:txBody>
+                  <a:tcPr marL="73152" marR="73152" marT="45720" marB="45720" anchor="ctr">
+                    <a:lnL w="0" cap="flat" cmpd="sng" algn="ctr">
+                      <a:noFill/>
+                    </a:lnL>
+                    <a:lnR w="0" cap="flat" cmpd="sng" algn="ctr">
+                      <a:noFill/>
+                    </a:lnR>
+                    <a:lnT w="0" cap="flat" cmpd="sng" algn="ctr">
+                      <a:noFill/>
+                    </a:lnT>
+                    <a:lnB w="0" cap="flat" cmpd="sng" algn="ctr">
+                      <a:noFill/>
+                    </a:lnB>
+                  </a:tcPr>
+                </a:tc>
+              </a:tr>
+              <a:tr h="411480">
+                <a:tc>
+                  <a:txBody>
+                    <a:bodyPr/>
+                    <a:lstStyle/>
+                    <a:p>
+                      <a:pPr algn="l" indent="0" marL="0">
+                        <a:buNone/>
+                      </a:pPr>
+                      <a:r>
+                        <a:rPr lang="en-US" sz="1200" dirty="0">
+                          <a:solidFill>
+                            <a:srgbClr val="1A1A1A"/>
+                          </a:solidFill>
+                          <a:latin typeface="Cambria" pitchFamily="34" charset="0"/>
+                          <a:ea typeface="Cambria" pitchFamily="34" charset="-122"/>
+                          <a:cs typeface="Cambria" pitchFamily="34" charset="-120"/>
+                        </a:rPr>
+                        <a:t>4  SAHI + fusión + filtro de escala</a:t>
+                      </a:r>
+                      <a:endParaRPr lang="en-US" sz="1200" dirty="0">
                         <a:latin typeface="Cambria" charset="0"/>
                         <a:ea typeface="Cambria" charset="0"/>
                         <a:cs typeface="Cambria" charset="0"/>
@@ -18746,17 +20077,17 @@
                         <a:buNone/>
                       </a:pPr>
                       <a:r>
-                        <a:rPr lang="en-US" sz="1250" dirty="0">
+                        <a:rPr lang="en-US" sz="1200" dirty="0">
                           <a:solidFill>
-                            <a:srgbClr val="1A1A1A"/>
+                            <a:srgbClr val="9AA0A6"/>
                           </a:solidFill>
                           <a:latin typeface="Cambria" pitchFamily="34" charset="0"/>
                           <a:ea typeface="Cambria" pitchFamily="34" charset="-122"/>
                           <a:cs typeface="Cambria" pitchFamily="34" charset="-120"/>
                         </a:rPr>
-                        <a:t>0,167</a:t>
+                        <a:t>—</a:t>
                       </a:r>
-                      <a:endParaRPr lang="en-US" sz="1250" dirty="0">
+                      <a:endParaRPr lang="en-US" sz="1200" dirty="0">
                         <a:latin typeface="Cambria" charset="0"/>
                         <a:ea typeface="Cambria" charset="0"/>
                         <a:cs typeface="Cambria" charset="0"/>
@@ -18793,7 +20124,7 @@
                         <a:buNone/>
                       </a:pPr>
                       <a:r>
-                        <a:rPr lang="en-US" sz="1250" b="1" dirty="0">
+                        <a:rPr lang="en-US" sz="1200" b="1" dirty="0">
                           <a:solidFill>
                             <a:srgbClr val="1A1A1A"/>
                           </a:solidFill>
@@ -18801,9 +20132,9 @@
                           <a:ea typeface="Cambria" pitchFamily="34" charset="-122"/>
                           <a:cs typeface="Cambria" pitchFamily="34" charset="-120"/>
                         </a:rPr>
-                        <a:t>0,529</a:t>
+                        <a:t>0,559 †</a:t>
                       </a:r>
-                      <a:endParaRPr lang="en-US" sz="1250" dirty="0">
+                      <a:endParaRPr lang="en-US" sz="1200" dirty="0">
                         <a:latin typeface="Cambria" charset="0"/>
                         <a:ea typeface="Cambria" charset="0"/>
                         <a:cs typeface="Cambria" charset="0"/>
@@ -18843,7 +20174,7 @@
                         <a:buNone/>
                       </a:pPr>
                       <a:r>
-                        <a:rPr lang="en-US" sz="1250" dirty="0">
+                        <a:rPr lang="en-US" sz="1200" dirty="0">
                           <a:solidFill>
                             <a:srgbClr val="1A1A1A"/>
                           </a:solidFill>
@@ -18851,9 +20182,9 @@
                           <a:ea typeface="Cambria" pitchFamily="34" charset="-122"/>
                           <a:cs typeface="Cambria" pitchFamily="34" charset="-120"/>
                         </a:rPr>
-                        <a:t>alta 0,65 · baja 0,20 · buffer 30 · match 0,8</a:t>
+                        <a:t>alta 0,65 · baja 0,20 · ρ 0,6 · largo ≥ 20</a:t>
                       </a:r>
-                      <a:endParaRPr lang="en-US" sz="1250" dirty="0">
+                      <a:endParaRPr lang="en-US" sz="1200" dirty="0">
                         <a:latin typeface="Cambria" charset="0"/>
                         <a:ea typeface="Cambria" charset="0"/>
                         <a:cs typeface="Cambria" charset="0"/>
@@ -18894,8 +20225,8 @@
         </p:nvSpPr>
         <p:spPr>
           <a:xfrm>
-            <a:off x="457200" y="3931920"/>
-            <a:ext cx="8321040" cy="868680"/>
+            <a:off x="457200" y="3794760"/>
+            <a:ext cx="8321040" cy="1005840"/>
           </a:xfrm>
           <a:prstGeom prst="rect">
             <a:avLst/>
@@ -18909,7 +20240,7 @@
           <a:p>
             <a:pPr marL="342900" indent="-342900">
               <a:spcAft>
-                <a:spcPts val="500"/>
+                <a:spcPts val="400"/>
               </a:spcAft>
               <a:buSzPct val="100000"/>
               <a:buChar char="●"/>
@@ -18923,14 +20254,14 @@
                 <a:ea typeface="Calibri" pitchFamily="34" charset="-122"/>
                 <a:cs typeface="Calibri" pitchFamily="34" charset="-120"/>
               </a:rPr>
-              <a:t>MOTA en secuencias no vistas al ajustar: 4 pliegues de 5 secuencias (se ajusta con 15 y se mide en 5)</a:t>
+              <a:t>MOTA en secuencias no vistas al ajustar: 4 pliegues de 5 secuencias (se ajusta con 15 y se mide en 5). † secuencias completas</a:t>
             </a:r>
             <a:endParaRPr lang="en-US" sz="1200" dirty="0"/>
           </a:p>
           <a:p>
             <a:pPr marL="342900" indent="-342900">
               <a:spcAft>
-                <a:spcPts val="500"/>
+                <a:spcPts val="400"/>
               </a:spcAft>
               <a:buSzPct val="100000"/>
               <a:buChar char="●"/>
@@ -18951,7 +20282,7 @@
           <a:p>
             <a:pPr marL="342900" indent="-342900">
               <a:spcAft>
-                <a:spcPts val="500"/>
+                <a:spcPts val="400"/>
               </a:spcAft>
               <a:buSzPct val="100000"/>
               <a:buChar char="●"/>
@@ -18965,7 +20296,7 @@
                 <a:ea typeface="Calibri" pitchFamily="34" charset="-122"/>
                 <a:cs typeface="Calibri" pitchFamily="34" charset="-120"/>
               </a:rPr>
-              <a:t>En SORT el ajuste no ayuda: ya estaba cerca de su óptimo</a:t>
+              <a:t>Ajustar muchos parámetros a la vez sobreajusta: en el método 4 se fijó ByteTrack y solo se ajustó ρ y el largo mínimo</a:t>
             </a:r>
             <a:endParaRPr lang="en-US" sz="1200" dirty="0"/>
           </a:p>
@@ -19013,7 +20344,7 @@
             <a:pPr algn="l"/>
             <a:fld id="{F7021451-1387-4CA6-816F-3879F97B5CBC}" type="slidenum">
               <a:rPr b="0" lang="en-US"/>
-              <a:t>23</a:t>
+              <a:t>24</a:t>
             </a:fld>
             <a:endParaRPr lang="en-US"/>
           </a:p>
@@ -19027,9 +20358,9 @@
 </p:sld>
 </file>
 
-<file path=ppt/slides/slide24.xml><?xml version="1.0" encoding="utf-8"?>
+<file path=ppt/slides/slide25.xml><?xml version="1.0" encoding="utf-8"?>
 <p:sld xmlns:a="http://schemas.openxmlformats.org/drawingml/2006/main" xmlns:r="http://schemas.openxmlformats.org/officeDocument/2006/relationships" xmlns:p="http://schemas.openxmlformats.org/presentationml/2006/main">
-  <p:cSld name="Slide 24">
+  <p:cSld name="Slide 25">
     <p:spTree>
       <p:nvGrpSpPr>
         <p:cNvPr id="1" name=""/>
@@ -19087,7 +20418,7 @@
       </p:sp>
       <p:graphicFrame>
         <p:nvGraphicFramePr>
-          <p:cNvPr id="25" name="Table 0"/>
+          <p:cNvPr id="26" name="Table 0"/>
           <p:cNvGraphicFramePr>
             <a:graphicFrameLocks noGrp="1"/>
           </p:cNvGraphicFramePr>
@@ -20089,7 +21420,7 @@
             <a:pPr algn="l"/>
             <a:fld id="{F7021451-1387-4CA6-816F-3879F97B5CBC}" type="slidenum">
               <a:rPr b="0" lang="en-US"/>
-              <a:t>24</a:t>
+              <a:t>25</a:t>
             </a:fld>
             <a:endParaRPr lang="en-US"/>
           </a:p>
@@ -20103,9 +21434,9 @@
 </p:sld>
 </file>
 
-<file path=ppt/slides/slide25.xml><?xml version="1.0" encoding="utf-8"?>
+<file path=ppt/slides/slide26.xml><?xml version="1.0" encoding="utf-8"?>
 <p:sld xmlns:a="http://schemas.openxmlformats.org/drawingml/2006/main" xmlns:r="http://schemas.openxmlformats.org/officeDocument/2006/relationships" xmlns:p="http://schemas.openxmlformats.org/presentationml/2006/main">
-  <p:cSld name="Slide 25">
+  <p:cSld name="Slide 26">
     <p:spTree>
       <p:nvGrpSpPr>
         <p:cNvPr id="1" name=""/>
@@ -20163,7 +21494,7 @@
       </p:sp>
       <p:graphicFrame>
         <p:nvGraphicFramePr>
-          <p:cNvPr id="26" name="Table 0"/>
+          <p:cNvPr id="27" name="Table 0"/>
           <p:cNvGraphicFramePr>
             <a:graphicFrameLocks noGrp="1"/>
           </p:cNvGraphicFramePr>
@@ -21296,7 +22627,7 @@
             <a:pPr algn="l"/>
             <a:fld id="{F7021451-1387-4CA6-816F-3879F97B5CBC}" type="slidenum">
               <a:rPr b="0" lang="en-US"/>
-              <a:t>25</a:t>
+              <a:t>26</a:t>
             </a:fld>
             <a:endParaRPr lang="en-US"/>
           </a:p>
@@ -21310,9 +22641,9 @@
 </p:sld>
 </file>
 
-<file path=ppt/slides/slide26.xml><?xml version="1.0" encoding="utf-8"?>
+<file path=ppt/slides/slide27.xml><?xml version="1.0" encoding="utf-8"?>
 <p:sld xmlns:a="http://schemas.openxmlformats.org/drawingml/2006/main" xmlns:r="http://schemas.openxmlformats.org/officeDocument/2006/relationships" xmlns:p="http://schemas.openxmlformats.org/presentationml/2006/main">
-  <p:cSld name="Slide 26">
+  <p:cSld name="Slide 27">
     <p:spTree>
       <p:nvGrpSpPr>
         <p:cNvPr id="1" name=""/>
@@ -21370,7 +22701,7 @@
       </p:sp>
       <p:graphicFrame>
         <p:nvGraphicFramePr>
-          <p:cNvPr id="27" name="Table 0"/>
+          <p:cNvPr id="28" name="Table 0"/>
           <p:cNvGraphicFramePr>
             <a:graphicFrameLocks noGrp="1"/>
           </p:cNvGraphicFramePr>
@@ -22632,7 +23963,7 @@
             <a:pPr algn="l"/>
             <a:fld id="{F7021451-1387-4CA6-816F-3879F97B5CBC}" type="slidenum">
               <a:rPr b="0" lang="en-US"/>
-              <a:t>26</a:t>
+              <a:t>27</a:t>
             </a:fld>
             <a:endParaRPr lang="en-US"/>
           </a:p>
@@ -22646,9 +23977,9 @@
 </p:sld>
 </file>
 
-<file path=ppt/slides/slide27.xml><?xml version="1.0" encoding="utf-8"?>
+<file path=ppt/slides/slide28.xml><?xml version="1.0" encoding="utf-8"?>
 <p:sld xmlns:a="http://schemas.openxmlformats.org/drawingml/2006/main" xmlns:r="http://schemas.openxmlformats.org/officeDocument/2006/relationships" xmlns:p="http://schemas.openxmlformats.org/presentationml/2006/main">
-  <p:cSld name="Slide 27">
+  <p:cSld name="Slide 28">
     <p:spTree>
       <p:nvGrpSpPr>
         <p:cNvPr id="1" name=""/>
@@ -22698,7 +24029,7 @@
                 <a:ea typeface="Calibri" pitchFamily="34" charset="-122"/>
                 <a:cs typeface="Calibri" pitchFamily="34" charset="-120"/>
               </a:rPr>
-              <a:t>Heurística adicional: resultados de la fusión</a:t>
+              <a:t>Método 4: ablación paso a paso</a:t>
             </a:r>
             <a:endParaRPr lang="en-US" sz="2400" dirty="0"/>
           </a:p>
@@ -22706,7 +24037,7 @@
       </p:sp>
       <p:graphicFrame>
         <p:nvGraphicFramePr>
-          <p:cNvPr id="28" name="Table 0"/>
+          <p:cNvPr id="29" name="Table 0"/>
           <p:cNvGraphicFramePr>
             <a:graphicFrameLocks noGrp="1"/>
           </p:cNvGraphicFramePr>
@@ -22719,7 +24050,7 @@
           </p:nvPr>
         </p:nvGraphicFramePr>
         <p:xfrm>
-          <a:off x="365760" y="914400"/>
+          <a:off x="365760" y="685800"/>
           <a:ext cx="8412480" cy="914400"/>
         </p:xfrm>
         <a:graphic>
@@ -22727,15 +24058,13 @@
             <a:tbl>
               <a:tblPr/>
               <a:tblGrid>
-                <a:gridCol w="2743200"/>
-                <a:gridCol w="822960"/>
-                <a:gridCol w="822960"/>
+                <a:gridCol w="640080"/>
+                <a:gridCol w="4480560"/>
+                <a:gridCol w="1371600"/>
+                <a:gridCol w="914400"/>
                 <a:gridCol w="1005840"/>
-                <a:gridCol w="1188720"/>
-                <a:gridCol w="1097280"/>
-                <a:gridCol w="731520"/>
               </a:tblGrid>
-              <a:tr h="457200">
+              <a:tr h="310896">
                 <a:tc>
                   <a:txBody>
                     <a:bodyPr/>
@@ -22745,7 +24074,7 @@
                         <a:buNone/>
                       </a:pPr>
                       <a:r>
-                        <a:rPr lang="en-US" sz="1300" b="1" dirty="0">
+                        <a:rPr lang="en-US" sz="1200" b="1" dirty="0">
                           <a:solidFill>
                             <a:srgbClr val="1A1A1A"/>
                           </a:solidFill>
@@ -22753,9 +24082,9 @@
                           <a:ea typeface="Cambria" pitchFamily="34" charset="-122"/>
                           <a:cs typeface="Cambria" pitchFamily="34" charset="-120"/>
                         </a:rPr>
-                        <a:t>Método</a:t>
+                        <a:t>Paso</a:t>
                       </a:r>
-                      <a:endParaRPr lang="en-US" sz="1300" dirty="0">
+                      <a:endParaRPr lang="en-US" sz="1200" dirty="0">
                         <a:latin typeface="Cambria" charset="0"/>
                         <a:ea typeface="Cambria" charset="0"/>
                         <a:cs typeface="Cambria" charset="0"/>
@@ -22798,7 +24127,7 @@
                         <a:buNone/>
                       </a:pPr>
                       <a:r>
-                        <a:rPr lang="en-US" sz="1300" b="1" dirty="0">
+                        <a:rPr lang="en-US" sz="1200" b="1" dirty="0">
                           <a:solidFill>
                             <a:srgbClr val="1A1A1A"/>
                           </a:solidFill>
@@ -22806,9 +24135,9 @@
                           <a:ea typeface="Cambria" pitchFamily="34" charset="-122"/>
                           <a:cs typeface="Cambria" pitchFamily="34" charset="-120"/>
                         </a:rPr>
-                        <a:t>MOTA</a:t>
+                        <a:t>Configuración</a:t>
                       </a:r>
-                      <a:endParaRPr lang="en-US" sz="1300" dirty="0">
+                      <a:endParaRPr lang="en-US" sz="1200" dirty="0">
                         <a:latin typeface="Cambria" charset="0"/>
                         <a:ea typeface="Cambria" charset="0"/>
                         <a:cs typeface="Cambria" charset="0"/>
@@ -22851,7 +24180,7 @@
                         <a:buNone/>
                       </a:pPr>
                       <a:r>
-                        <a:rPr lang="en-US" sz="1300" b="1" dirty="0">
+                        <a:rPr lang="en-US" sz="1200" b="1" dirty="0">
                           <a:solidFill>
                             <a:srgbClr val="1A1A1A"/>
                           </a:solidFill>
@@ -22859,9 +24188,9 @@
                           <a:ea typeface="Cambria" pitchFamily="34" charset="-122"/>
                           <a:cs typeface="Cambria" pitchFamily="34" charset="-120"/>
                         </a:rPr>
-                        <a:t>IDF1</a:t>
+                        <a:t>MOTA (val. cruzada)</a:t>
                       </a:r>
-                      <a:endParaRPr lang="en-US" sz="1300" dirty="0">
+                      <a:endParaRPr lang="en-US" sz="1200" dirty="0">
                         <a:latin typeface="Cambria" charset="0"/>
                         <a:ea typeface="Cambria" charset="0"/>
                         <a:cs typeface="Cambria" charset="0"/>
@@ -22904,7 +24233,7 @@
                         <a:buNone/>
                       </a:pPr>
                       <a:r>
-                        <a:rPr lang="en-US" sz="1300" b="1" dirty="0">
+                        <a:rPr lang="en-US" sz="1200" b="1" dirty="0">
                           <a:solidFill>
                             <a:srgbClr val="1A1A1A"/>
                           </a:solidFill>
@@ -22912,9 +24241,9 @@
                           <a:ea typeface="Cambria" pitchFamily="34" charset="-122"/>
                           <a:cs typeface="Cambria" pitchFamily="34" charset="-120"/>
                         </a:rPr>
-                        <a:t>FN</a:t>
+                        <a:t>IDF1</a:t>
                       </a:r>
-                      <a:endParaRPr lang="en-US" sz="1300" dirty="0">
+                      <a:endParaRPr lang="en-US" sz="1200" dirty="0">
                         <a:latin typeface="Cambria" charset="0"/>
                         <a:ea typeface="Cambria" charset="0"/>
                         <a:cs typeface="Cambria" charset="0"/>
@@ -22957,7 +24286,7 @@
                         <a:buNone/>
                       </a:pPr>
                       <a:r>
-                        <a:rPr lang="en-US" sz="1300" b="1" dirty="0">
+                        <a:rPr lang="en-US" sz="1200" b="1" dirty="0">
                           <a:solidFill>
                             <a:srgbClr val="1A1A1A"/>
                           </a:solidFill>
@@ -22965,115 +24294,9 @@
                           <a:ea typeface="Cambria" pitchFamily="34" charset="-122"/>
                           <a:cs typeface="Cambria" pitchFamily="34" charset="-120"/>
                         </a:rPr>
-                        <a:t>Recall pequeño</a:t>
+                        <a:t>IDS</a:t>
                       </a:r>
-                      <a:endParaRPr lang="en-US" sz="1300" dirty="0">
-                        <a:latin typeface="Cambria" charset="0"/>
-                        <a:ea typeface="Cambria" charset="0"/>
-                        <a:cs typeface="Cambria" charset="0"/>
-                      </a:endParaRPr>
-                    </a:p>
-                  </a:txBody>
-                  <a:tcPr marL="73152" marR="73152" marT="45720" marB="45720" anchor="ctr">
-                    <a:lnL w="0" cap="flat" cmpd="sng" algn="ctr">
-                      <a:noFill/>
-                    </a:lnL>
-                    <a:lnR w="0" cap="flat" cmpd="sng" algn="ctr">
-                      <a:noFill/>
-                    </a:lnR>
-                    <a:lnT w="19050" cap="flat" cmpd="sng" algn="ctr">
-                      <a:solidFill>
-                        <a:srgbClr val="1A1A1A"/>
-                      </a:solidFill>
-                      <a:prstDash val="solid"/>
-                      <a:round/>
-                      <a:headEnd type="none" w="med" len="med"/>
-                      <a:tailEnd type="none" w="med" len="med"/>
-                    </a:lnT>
-                    <a:lnB w="9525" cap="flat" cmpd="sng" algn="ctr">
-                      <a:solidFill>
-                        <a:srgbClr val="1A1A1A"/>
-                      </a:solidFill>
-                      <a:prstDash val="solid"/>
-                      <a:round/>
-                      <a:headEnd type="none" w="med" len="med"/>
-                      <a:tailEnd type="none" w="med" len="med"/>
-                    </a:lnB>
-                  </a:tcPr>
-                </a:tc>
-                <a:tc>
-                  <a:txBody>
-                    <a:bodyPr/>
-                    <a:lstStyle/>
-                    <a:p>
-                      <a:pPr algn="ctr" indent="0" marL="0">
-                        <a:buNone/>
-                      </a:pPr>
-                      <a:r>
-                        <a:rPr lang="en-US" sz="1300" b="1" dirty="0">
-                          <a:solidFill>
-                            <a:srgbClr val="1A1A1A"/>
-                          </a:solidFill>
-                          <a:latin typeface="Cambria" pitchFamily="34" charset="0"/>
-                          <a:ea typeface="Cambria" pitchFamily="34" charset="-122"/>
-                          <a:cs typeface="Cambria" pitchFamily="34" charset="-120"/>
-                        </a:rPr>
-                        <a:t>MOTA (val. cruzada)</a:t>
-                      </a:r>
-                      <a:endParaRPr lang="en-US" sz="1300" dirty="0">
-                        <a:latin typeface="Cambria" charset="0"/>
-                        <a:ea typeface="Cambria" charset="0"/>
-                        <a:cs typeface="Cambria" charset="0"/>
-                      </a:endParaRPr>
-                    </a:p>
-                  </a:txBody>
-                  <a:tcPr marL="73152" marR="73152" marT="45720" marB="45720" anchor="ctr">
-                    <a:lnL w="0" cap="flat" cmpd="sng" algn="ctr">
-                      <a:noFill/>
-                    </a:lnL>
-                    <a:lnR w="0" cap="flat" cmpd="sng" algn="ctr">
-                      <a:noFill/>
-                    </a:lnR>
-                    <a:lnT w="19050" cap="flat" cmpd="sng" algn="ctr">
-                      <a:solidFill>
-                        <a:srgbClr val="1A1A1A"/>
-                      </a:solidFill>
-                      <a:prstDash val="solid"/>
-                      <a:round/>
-                      <a:headEnd type="none" w="med" len="med"/>
-                      <a:tailEnd type="none" w="med" len="med"/>
-                    </a:lnT>
-                    <a:lnB w="9525" cap="flat" cmpd="sng" algn="ctr">
-                      <a:solidFill>
-                        <a:srgbClr val="1A1A1A"/>
-                      </a:solidFill>
-                      <a:prstDash val="solid"/>
-                      <a:round/>
-                      <a:headEnd type="none" w="med" len="med"/>
-                      <a:tailEnd type="none" w="med" len="med"/>
-                    </a:lnB>
-                  </a:tcPr>
-                </a:tc>
-                <a:tc>
-                  <a:txBody>
-                    <a:bodyPr/>
-                    <a:lstStyle/>
-                    <a:p>
-                      <a:pPr algn="ctr" indent="0" marL="0">
-                        <a:buNone/>
-                      </a:pPr>
-                      <a:r>
-                        <a:rPr lang="en-US" sz="1300" b="1" dirty="0">
-                          <a:solidFill>
-                            <a:srgbClr val="1A1A1A"/>
-                          </a:solidFill>
-                          <a:latin typeface="Cambria" pitchFamily="34" charset="0"/>
-                          <a:ea typeface="Cambria" pitchFamily="34" charset="-122"/>
-                          <a:cs typeface="Cambria" pitchFamily="34" charset="-120"/>
-                        </a:rPr>
-                        <a:t>FPS</a:t>
-                      </a:r>
-                      <a:endParaRPr lang="en-US" sz="1300" dirty="0">
+                      <a:endParaRPr lang="en-US" sz="1200" dirty="0">
                         <a:latin typeface="Cambria" charset="0"/>
                         <a:ea typeface="Cambria" charset="0"/>
                         <a:cs typeface="Cambria" charset="0"/>
@@ -23108,7 +24331,7 @@
                   </a:tcPr>
                 </a:tc>
               </a:tr>
-              <a:tr h="457200">
+              <a:tr h="310896">
                 <a:tc>
                   <a:txBody>
                     <a:bodyPr/>
@@ -23118,7 +24341,7 @@
                         <a:buNone/>
                       </a:pPr>
                       <a:r>
-                        <a:rPr lang="en-US" sz="1300" dirty="0">
+                        <a:rPr lang="en-US" sz="1200" dirty="0">
                           <a:solidFill>
                             <a:srgbClr val="1A1A1A"/>
                           </a:solidFill>
@@ -23126,9 +24349,50 @@
                           <a:ea typeface="Cambria" pitchFamily="34" charset="-122"/>
                           <a:cs typeface="Cambria" pitchFamily="34" charset="-120"/>
                         </a:rPr>
-                        <a:t>2  YOLO26 + ByteTrack</a:t>
+                        <a:t>1</a:t>
                       </a:r>
-                      <a:endParaRPr lang="en-US" sz="1300" dirty="0">
+                      <a:endParaRPr lang="en-US" sz="1200" dirty="0">
+                        <a:latin typeface="Cambria" charset="0"/>
+                        <a:ea typeface="Cambria" charset="0"/>
+                        <a:cs typeface="Cambria" charset="0"/>
+                      </a:endParaRPr>
+                    </a:p>
+                  </a:txBody>
+                  <a:tcPr marL="73152" marR="73152" marT="45720" marB="45720" anchor="ctr">
+                    <a:lnL w="0" cap="flat" cmpd="sng" algn="ctr">
+                      <a:noFill/>
+                    </a:lnL>
+                    <a:lnR w="0" cap="flat" cmpd="sng" algn="ctr">
+                      <a:noFill/>
+                    </a:lnR>
+                    <a:lnT w="0" cap="flat" cmpd="sng" algn="ctr">
+                      <a:noFill/>
+                    </a:lnT>
+                    <a:lnB w="0" cap="flat" cmpd="sng" algn="ctr">
+                      <a:noFill/>
+                    </a:lnB>
+                  </a:tcPr>
+                </a:tc>
+                <a:tc>
+                  <a:txBody>
+                    <a:bodyPr/>
+                    <a:lstStyle/>
+                    <a:p>
+                      <a:pPr algn="l" indent="0" marL="0">
+                        <a:buNone/>
+                      </a:pPr>
+                      <a:r>
+                        <a:rPr lang="en-US" sz="1200" dirty="0">
+                          <a:solidFill>
+                            <a:srgbClr val="1A1A1A"/>
+                          </a:solidFill>
+                          <a:latin typeface="Cambria" pitchFamily="34" charset="0"/>
+                          <a:ea typeface="Cambria" pitchFamily="34" charset="-122"/>
+                          <a:cs typeface="Cambria" pitchFamily="34" charset="-120"/>
+                        </a:rPr>
+                        <a:t>SAHI 640 + YOLO26 (método 4 anterior)</a:t>
+                      </a:r>
+                      <a:endParaRPr lang="en-US" sz="1200" dirty="0">
                         <a:latin typeface="Cambria" charset="0"/>
                         <a:ea typeface="Cambria" charset="0"/>
                         <a:cs typeface="Cambria" charset="0"/>
@@ -23159,7 +24423,7 @@
                         <a:buNone/>
                       </a:pPr>
                       <a:r>
-                        <a:rPr lang="en-US" sz="1300" dirty="0">
+                        <a:rPr lang="en-US" sz="1200" dirty="0">
                           <a:solidFill>
                             <a:srgbClr val="1A1A1A"/>
                           </a:solidFill>
@@ -23167,9 +24431,9 @@
                           <a:ea typeface="Cambria" pitchFamily="34" charset="-122"/>
                           <a:cs typeface="Cambria" pitchFamily="34" charset="-120"/>
                         </a:rPr>
-                        <a:t>0,498</a:t>
+                        <a:t>0,465</a:t>
                       </a:r>
-                      <a:endParaRPr lang="en-US" sz="1300" dirty="0">
+                      <a:endParaRPr lang="en-US" sz="1200" dirty="0">
                         <a:latin typeface="Cambria" charset="0"/>
                         <a:ea typeface="Cambria" charset="0"/>
                         <a:cs typeface="Cambria" charset="0"/>
@@ -23200,7 +24464,7 @@
                         <a:buNone/>
                       </a:pPr>
                       <a:r>
-                        <a:rPr lang="en-US" sz="1300" dirty="0">
+                        <a:rPr lang="en-US" sz="1200" dirty="0">
                           <a:solidFill>
                             <a:srgbClr val="1A1A1A"/>
                           </a:solidFill>
@@ -23208,9 +24472,9 @@
                           <a:ea typeface="Cambria" pitchFamily="34" charset="-122"/>
                           <a:cs typeface="Cambria" pitchFamily="34" charset="-120"/>
                         </a:rPr>
-                        <a:t>0,677</a:t>
+                        <a:t>0,651</a:t>
                       </a:r>
-                      <a:endParaRPr lang="en-US" sz="1300" dirty="0">
+                      <a:endParaRPr lang="en-US" sz="1200" dirty="0">
                         <a:latin typeface="Cambria" charset="0"/>
                         <a:ea typeface="Cambria" charset="0"/>
                         <a:cs typeface="Cambria" charset="0"/>
@@ -23241,7 +24505,7 @@
                         <a:buNone/>
                       </a:pPr>
                       <a:r>
-                        <a:rPr lang="en-US" sz="1300" dirty="0">
+                        <a:rPr lang="en-US" sz="1200" dirty="0">
                           <a:solidFill>
                             <a:srgbClr val="1A1A1A"/>
                           </a:solidFill>
@@ -23249,9 +24513,93 @@
                           <a:ea typeface="Cambria" pitchFamily="34" charset="-122"/>
                           <a:cs typeface="Cambria" pitchFamily="34" charset="-120"/>
                         </a:rPr>
-                        <a:t>134 467</a:t>
+                        <a:t>82</a:t>
                       </a:r>
-                      <a:endParaRPr lang="en-US" sz="1300" dirty="0">
+                      <a:endParaRPr lang="en-US" sz="1200" dirty="0">
+                        <a:latin typeface="Cambria" charset="0"/>
+                        <a:ea typeface="Cambria" charset="0"/>
+                        <a:cs typeface="Cambria" charset="0"/>
+                      </a:endParaRPr>
+                    </a:p>
+                  </a:txBody>
+                  <a:tcPr marL="73152" marR="73152" marT="45720" marB="45720" anchor="ctr">
+                    <a:lnL w="0" cap="flat" cmpd="sng" algn="ctr">
+                      <a:noFill/>
+                    </a:lnL>
+                    <a:lnR w="0" cap="flat" cmpd="sng" algn="ctr">
+                      <a:noFill/>
+                    </a:lnR>
+                    <a:lnT w="0" cap="flat" cmpd="sng" algn="ctr">
+                      <a:noFill/>
+                    </a:lnT>
+                    <a:lnB w="0" cap="flat" cmpd="sng" algn="ctr">
+                      <a:noFill/>
+                    </a:lnB>
+                  </a:tcPr>
+                </a:tc>
+              </a:tr>
+              <a:tr h="310896">
+                <a:tc>
+                  <a:txBody>
+                    <a:bodyPr/>
+                    <a:lstStyle/>
+                    <a:p>
+                      <a:pPr algn="l" indent="0" marL="0">
+                        <a:buNone/>
+                      </a:pPr>
+                      <a:r>
+                        <a:rPr lang="en-US" sz="1200" dirty="0">
+                          <a:solidFill>
+                            <a:srgbClr val="1A1A1A"/>
+                          </a:solidFill>
+                          <a:latin typeface="Cambria" pitchFamily="34" charset="0"/>
+                          <a:ea typeface="Cambria" pitchFamily="34" charset="-122"/>
+                          <a:cs typeface="Cambria" pitchFamily="34" charset="-120"/>
+                        </a:rPr>
+                        <a:t>2</a:t>
+                      </a:r>
+                      <a:endParaRPr lang="en-US" sz="1200" dirty="0">
+                        <a:latin typeface="Cambria" charset="0"/>
+                        <a:ea typeface="Cambria" charset="0"/>
+                        <a:cs typeface="Cambria" charset="0"/>
+                      </a:endParaRPr>
+                    </a:p>
+                  </a:txBody>
+                  <a:tcPr marL="73152" marR="73152" marT="45720" marB="45720" anchor="ctr">
+                    <a:lnL w="0" cap="flat" cmpd="sng" algn="ctr">
+                      <a:noFill/>
+                    </a:lnL>
+                    <a:lnR w="0" cap="flat" cmpd="sng" algn="ctr">
+                      <a:noFill/>
+                    </a:lnR>
+                    <a:lnT w="0" cap="flat" cmpd="sng" algn="ctr">
+                      <a:noFill/>
+                    </a:lnT>
+                    <a:lnB w="0" cap="flat" cmpd="sng" algn="ctr">
+                      <a:noFill/>
+                    </a:lnB>
+                  </a:tcPr>
+                </a:tc>
+                <a:tc>
+                  <a:txBody>
+                    <a:bodyPr/>
+                    <a:lstStyle/>
+                    <a:p>
+                      <a:pPr algn="l" indent="0" marL="0">
+                        <a:buNone/>
+                      </a:pPr>
+                      <a:r>
+                        <a:rPr lang="en-US" sz="1200" dirty="0">
+                          <a:solidFill>
+                            <a:srgbClr val="1A1A1A"/>
+                          </a:solidFill>
+                          <a:latin typeface="Cambria" pitchFamily="34" charset="0"/>
+                          <a:ea typeface="Cambria" pitchFamily="34" charset="-122"/>
+                          <a:cs typeface="Cambria" pitchFamily="34" charset="-120"/>
+                        </a:rPr>
+                        <a:t>YOLO26 solo, imagen completa (método 2)</a:t>
+                      </a:r>
+                      <a:endParaRPr lang="en-US" sz="1200" dirty="0">
                         <a:latin typeface="Cambria" charset="0"/>
                         <a:ea typeface="Cambria" charset="0"/>
                         <a:cs typeface="Cambria" charset="0"/>
@@ -23282,7 +24630,7 @@
                         <a:buNone/>
                       </a:pPr>
                       <a:r>
-                        <a:rPr lang="en-US" sz="1300" dirty="0">
+                        <a:rPr lang="en-US" sz="1200" dirty="0">
                           <a:solidFill>
                             <a:srgbClr val="1A1A1A"/>
                           </a:solidFill>
@@ -23290,9 +24638,9 @@
                           <a:ea typeface="Cambria" pitchFamily="34" charset="-122"/>
                           <a:cs typeface="Cambria" pitchFamily="34" charset="-120"/>
                         </a:rPr>
-                        <a:t>0,293</a:t>
+                        <a:t>0,485</a:t>
                       </a:r>
-                      <a:endParaRPr lang="en-US" sz="1300" dirty="0">
+                      <a:endParaRPr lang="en-US" sz="1200" dirty="0">
                         <a:latin typeface="Cambria" charset="0"/>
                         <a:ea typeface="Cambria" charset="0"/>
                         <a:cs typeface="Cambria" charset="0"/>
@@ -23323,7 +24671,7 @@
                         <a:buNone/>
                       </a:pPr>
                       <a:r>
-                        <a:rPr lang="en-US" sz="1300" dirty="0">
+                        <a:rPr lang="en-US" sz="1200" dirty="0">
                           <a:solidFill>
                             <a:srgbClr val="1A1A1A"/>
                           </a:solidFill>
@@ -23331,9 +24679,9 @@
                           <a:ea typeface="Cambria" pitchFamily="34" charset="-122"/>
                           <a:cs typeface="Cambria" pitchFamily="34" charset="-120"/>
                         </a:rPr>
-                        <a:t>0,479</a:t>
+                        <a:t>0,686</a:t>
                       </a:r>
-                      <a:endParaRPr lang="en-US" sz="1300" dirty="0">
+                      <a:endParaRPr lang="en-US" sz="1200" dirty="0">
                         <a:latin typeface="Cambria" charset="0"/>
                         <a:ea typeface="Cambria" charset="0"/>
                         <a:cs typeface="Cambria" charset="0"/>
@@ -23364,7 +24712,7 @@
                         <a:buNone/>
                       </a:pPr>
                       <a:r>
-                        <a:rPr lang="en-US" sz="1300" dirty="0">
+                        <a:rPr lang="en-US" sz="1200" dirty="0">
                           <a:solidFill>
                             <a:srgbClr val="1A1A1A"/>
                           </a:solidFill>
@@ -23372,9 +24720,9 @@
                           <a:ea typeface="Cambria" pitchFamily="34" charset="-122"/>
                           <a:cs typeface="Cambria" pitchFamily="34" charset="-120"/>
                         </a:rPr>
-                        <a:t>39,0</a:t>
+                        <a:t>238</a:t>
                       </a:r>
-                      <a:endParaRPr lang="en-US" sz="1300" dirty="0">
+                      <a:endParaRPr lang="en-US" sz="1200" dirty="0">
                         <a:latin typeface="Cambria" charset="0"/>
                         <a:ea typeface="Cambria" charset="0"/>
                         <a:cs typeface="Cambria" charset="0"/>
@@ -23397,7 +24745,7 @@
                   </a:tcPr>
                 </a:tc>
               </a:tr>
-              <a:tr h="457200">
+              <a:tr h="310896">
                 <a:tc>
                   <a:txBody>
                     <a:bodyPr/>
@@ -23407,7 +24755,7 @@
                         <a:buNone/>
                       </a:pPr>
                       <a:r>
-                        <a:rPr lang="en-US" sz="1300" dirty="0">
+                        <a:rPr lang="en-US" sz="1200" dirty="0">
                           <a:solidFill>
                             <a:srgbClr val="1A1A1A"/>
                           </a:solidFill>
@@ -23415,9 +24763,50 @@
                           <a:ea typeface="Cambria" pitchFamily="34" charset="-122"/>
                           <a:cs typeface="Cambria" pitchFamily="34" charset="-120"/>
                         </a:rPr>
-                        <a:t>3  RT-DETRv4 + BoT-SORT</a:t>
+                        <a:t>3</a:t>
                       </a:r>
-                      <a:endParaRPr lang="en-US" sz="1300" dirty="0">
+                      <a:endParaRPr lang="en-US" sz="1200" dirty="0">
+                        <a:latin typeface="Cambria" charset="0"/>
+                        <a:ea typeface="Cambria" charset="0"/>
+                        <a:cs typeface="Cambria" charset="0"/>
+                      </a:endParaRPr>
+                    </a:p>
+                  </a:txBody>
+                  <a:tcPr marL="73152" marR="73152" marT="45720" marB="45720" anchor="ctr">
+                    <a:lnL w="0" cap="flat" cmpd="sng" algn="ctr">
+                      <a:noFill/>
+                    </a:lnL>
+                    <a:lnR w="0" cap="flat" cmpd="sng" algn="ctr">
+                      <a:noFill/>
+                    </a:lnR>
+                    <a:lnT w="0" cap="flat" cmpd="sng" algn="ctr">
+                      <a:noFill/>
+                    </a:lnT>
+                    <a:lnB w="0" cap="flat" cmpd="sng" algn="ctr">
+                      <a:noFill/>
+                    </a:lnB>
+                  </a:tcPr>
+                </a:tc>
+                <a:tc>
+                  <a:txBody>
+                    <a:bodyPr/>
+                    <a:lstStyle/>
+                    <a:p>
+                      <a:pPr algn="l" indent="0" marL="0">
+                        <a:buNone/>
+                      </a:pPr>
+                      <a:r>
+                        <a:rPr lang="en-US" sz="1200" dirty="0">
+                          <a:solidFill>
+                            <a:srgbClr val="1A1A1A"/>
+                          </a:solidFill>
+                          <a:latin typeface="Cambria" pitchFamily="34" charset="0"/>
+                          <a:ea typeface="Cambria" pitchFamily="34" charset="-122"/>
+                          <a:cs typeface="Cambria" pitchFamily="34" charset="-120"/>
+                        </a:rPr>
+                        <a:t>YOLO26 + RT-DETR fusionados (método 5 anterior)</a:t>
+                      </a:r>
+                      <a:endParaRPr lang="en-US" sz="1200" dirty="0">
                         <a:latin typeface="Cambria" charset="0"/>
                         <a:ea typeface="Cambria" charset="0"/>
                         <a:cs typeface="Cambria" charset="0"/>
@@ -23448,7 +24837,7 @@
                         <a:buNone/>
                       </a:pPr>
                       <a:r>
-                        <a:rPr lang="en-US" sz="1300" dirty="0">
+                        <a:rPr lang="en-US" sz="1200" dirty="0">
                           <a:solidFill>
                             <a:srgbClr val="1A1A1A"/>
                           </a:solidFill>
@@ -23456,9 +24845,9 @@
                           <a:ea typeface="Cambria" pitchFamily="34" charset="-122"/>
                           <a:cs typeface="Cambria" pitchFamily="34" charset="-120"/>
                         </a:rPr>
-                        <a:t>0,436</a:t>
+                        <a:t>0,549</a:t>
                       </a:r>
-                      <a:endParaRPr lang="en-US" sz="1300" dirty="0">
+                      <a:endParaRPr lang="en-US" sz="1200" dirty="0">
                         <a:latin typeface="Cambria" charset="0"/>
                         <a:ea typeface="Cambria" charset="0"/>
                         <a:cs typeface="Cambria" charset="0"/>
@@ -23489,7 +24878,7 @@
                         <a:buNone/>
                       </a:pPr>
                       <a:r>
-                        <a:rPr lang="en-US" sz="1300" dirty="0">
+                        <a:rPr lang="en-US" sz="1200" dirty="0">
                           <a:solidFill>
                             <a:srgbClr val="1A1A1A"/>
                           </a:solidFill>
@@ -23497,9 +24886,9 @@
                           <a:ea typeface="Cambria" pitchFamily="34" charset="-122"/>
                           <a:cs typeface="Cambria" pitchFamily="34" charset="-120"/>
                         </a:rPr>
-                        <a:t>0,684</a:t>
+                        <a:t>0,754</a:t>
                       </a:r>
-                      <a:endParaRPr lang="en-US" sz="1300" dirty="0">
+                      <a:endParaRPr lang="en-US" sz="1200" dirty="0">
                         <a:latin typeface="Cambria" charset="0"/>
                         <a:ea typeface="Cambria" charset="0"/>
                         <a:cs typeface="Cambria" charset="0"/>
@@ -23530,7 +24919,7 @@
                         <a:buNone/>
                       </a:pPr>
                       <a:r>
-                        <a:rPr lang="en-US" sz="1300" dirty="0">
+                        <a:rPr lang="en-US" sz="1200" dirty="0">
                           <a:solidFill>
                             <a:srgbClr val="1A1A1A"/>
                           </a:solidFill>
@@ -23538,9 +24927,93 @@
                           <a:ea typeface="Cambria" pitchFamily="34" charset="-122"/>
                           <a:cs typeface="Cambria" pitchFamily="34" charset="-120"/>
                         </a:rPr>
-                        <a:t>112 837</a:t>
+                        <a:t>125</a:t>
                       </a:r>
-                      <a:endParaRPr lang="en-US" sz="1300" dirty="0">
+                      <a:endParaRPr lang="en-US" sz="1200" dirty="0">
+                        <a:latin typeface="Cambria" charset="0"/>
+                        <a:ea typeface="Cambria" charset="0"/>
+                        <a:cs typeface="Cambria" charset="0"/>
+                      </a:endParaRPr>
+                    </a:p>
+                  </a:txBody>
+                  <a:tcPr marL="73152" marR="73152" marT="45720" marB="45720" anchor="ctr">
+                    <a:lnL w="0" cap="flat" cmpd="sng" algn="ctr">
+                      <a:noFill/>
+                    </a:lnL>
+                    <a:lnR w="0" cap="flat" cmpd="sng" algn="ctr">
+                      <a:noFill/>
+                    </a:lnR>
+                    <a:lnT w="0" cap="flat" cmpd="sng" algn="ctr">
+                      <a:noFill/>
+                    </a:lnT>
+                    <a:lnB w="0" cap="flat" cmpd="sng" algn="ctr">
+                      <a:noFill/>
+                    </a:lnB>
+                  </a:tcPr>
+                </a:tc>
+              </a:tr>
+              <a:tr h="310896">
+                <a:tc>
+                  <a:txBody>
+                    <a:bodyPr/>
+                    <a:lstStyle/>
+                    <a:p>
+                      <a:pPr algn="l" indent="0" marL="0">
+                        <a:buNone/>
+                      </a:pPr>
+                      <a:r>
+                        <a:rPr lang="en-US" sz="1200" dirty="0">
+                          <a:solidFill>
+                            <a:srgbClr val="1A1A1A"/>
+                          </a:solidFill>
+                          <a:latin typeface="Cambria" pitchFamily="34" charset="0"/>
+                          <a:ea typeface="Cambria" pitchFamily="34" charset="-122"/>
+                          <a:cs typeface="Cambria" pitchFamily="34" charset="-120"/>
+                        </a:rPr>
+                        <a:t>4</a:t>
+                      </a:r>
+                      <a:endParaRPr lang="en-US" sz="1200" dirty="0">
+                        <a:latin typeface="Cambria" charset="0"/>
+                        <a:ea typeface="Cambria" charset="0"/>
+                        <a:cs typeface="Cambria" charset="0"/>
+                      </a:endParaRPr>
+                    </a:p>
+                  </a:txBody>
+                  <a:tcPr marL="73152" marR="73152" marT="45720" marB="45720" anchor="ctr">
+                    <a:lnL w="0" cap="flat" cmpd="sng" algn="ctr">
+                      <a:noFill/>
+                    </a:lnL>
+                    <a:lnR w="0" cap="flat" cmpd="sng" algn="ctr">
+                      <a:noFill/>
+                    </a:lnR>
+                    <a:lnT w="0" cap="flat" cmpd="sng" algn="ctr">
+                      <a:noFill/>
+                    </a:lnT>
+                    <a:lnB w="0" cap="flat" cmpd="sng" algn="ctr">
+                      <a:noFill/>
+                    </a:lnB>
+                  </a:tcPr>
+                </a:tc>
+                <a:tc>
+                  <a:txBody>
+                    <a:bodyPr/>
+                    <a:lstStyle/>
+                    <a:p>
+                      <a:pPr algn="l" indent="0" marL="0">
+                        <a:buNone/>
+                      </a:pPr>
+                      <a:r>
+                        <a:rPr lang="en-US" sz="1200" dirty="0">
+                          <a:solidFill>
+                            <a:srgbClr val="1A1A1A"/>
+                          </a:solidFill>
+                          <a:latin typeface="Cambria" pitchFamily="34" charset="0"/>
+                          <a:ea typeface="Cambria" pitchFamily="34" charset="-122"/>
+                          <a:cs typeface="Cambria" pitchFamily="34" charset="-120"/>
+                        </a:rPr>
+                        <a:t>+ SAHI como respaldo de YOLO26</a:t>
+                      </a:r>
+                      <a:endParaRPr lang="en-US" sz="1200" dirty="0">
                         <a:latin typeface="Cambria" charset="0"/>
                         <a:ea typeface="Cambria" charset="0"/>
                         <a:cs typeface="Cambria" charset="0"/>
@@ -23571,7 +25044,7 @@
                         <a:buNone/>
                       </a:pPr>
                       <a:r>
-                        <a:rPr lang="en-US" sz="1300" dirty="0">
+                        <a:rPr lang="en-US" sz="1200" dirty="0">
                           <a:solidFill>
                             <a:srgbClr val="1A1A1A"/>
                           </a:solidFill>
@@ -23579,9 +25052,9 @@
                           <a:ea typeface="Cambria" pitchFamily="34" charset="-122"/>
                           <a:cs typeface="Cambria" pitchFamily="34" charset="-120"/>
                         </a:rPr>
-                        <a:t>0,356</a:t>
+                        <a:t>0,544</a:t>
                       </a:r>
-                      <a:endParaRPr lang="en-US" sz="1300" dirty="0">
+                      <a:endParaRPr lang="en-US" sz="1200" dirty="0">
                         <a:latin typeface="Cambria" charset="0"/>
                         <a:ea typeface="Cambria" charset="0"/>
                         <a:cs typeface="Cambria" charset="0"/>
@@ -23612,7 +25085,7 @@
                         <a:buNone/>
                       </a:pPr>
                       <a:r>
-                        <a:rPr lang="en-US" sz="1300" dirty="0">
+                        <a:rPr lang="en-US" sz="1200" dirty="0">
                           <a:solidFill>
                             <a:srgbClr val="1A1A1A"/>
                           </a:solidFill>
@@ -23620,9 +25093,9 @@
                           <a:ea typeface="Cambria" pitchFamily="34" charset="-122"/>
                           <a:cs typeface="Cambria" pitchFamily="34" charset="-120"/>
                         </a:rPr>
-                        <a:t>0,402</a:t>
+                        <a:t>0,758</a:t>
                       </a:r>
-                      <a:endParaRPr lang="en-US" sz="1300" dirty="0">
+                      <a:endParaRPr lang="en-US" sz="1200" dirty="0">
                         <a:latin typeface="Cambria" charset="0"/>
                         <a:ea typeface="Cambria" charset="0"/>
                         <a:cs typeface="Cambria" charset="0"/>
@@ -23653,7 +25126,7 @@
                         <a:buNone/>
                       </a:pPr>
                       <a:r>
-                        <a:rPr lang="en-US" sz="1300" dirty="0">
+                        <a:rPr lang="en-US" sz="1200" dirty="0">
                           <a:solidFill>
                             <a:srgbClr val="1A1A1A"/>
                           </a:solidFill>
@@ -23661,9 +25134,9 @@
                           <a:ea typeface="Cambria" pitchFamily="34" charset="-122"/>
                           <a:cs typeface="Cambria" pitchFamily="34" charset="-120"/>
                         </a:rPr>
-                        <a:t>17,3</a:t>
+                        <a:t>135</a:t>
                       </a:r>
-                      <a:endParaRPr lang="en-US" sz="1300" dirty="0">
+                      <a:endParaRPr lang="en-US" sz="1200" dirty="0">
                         <a:latin typeface="Cambria" charset="0"/>
                         <a:ea typeface="Cambria" charset="0"/>
                         <a:cs typeface="Cambria" charset="0"/>
@@ -23686,7 +25159,7 @@
                   </a:tcPr>
                 </a:tc>
               </a:tr>
-              <a:tr h="457200">
+              <a:tr h="310896">
                 <a:tc>
                   <a:txBody>
                     <a:bodyPr/>
@@ -23696,7 +25169,7 @@
                         <a:buNone/>
                       </a:pPr>
                       <a:r>
-                        <a:rPr lang="en-US" sz="1300" dirty="0">
+                        <a:rPr lang="en-US" sz="1200" dirty="0">
                           <a:solidFill>
                             <a:srgbClr val="1A1A1A"/>
                           </a:solidFill>
@@ -23704,9 +25177,473 @@
                           <a:ea typeface="Cambria" pitchFamily="34" charset="-122"/>
                           <a:cs typeface="Cambria" pitchFamily="34" charset="-120"/>
                         </a:rPr>
-                        <a:t>Fusión YOLO26 + RT-DETR</a:t>
+                        <a:t>5</a:t>
                       </a:r>
-                      <a:endParaRPr lang="en-US" sz="1300" dirty="0">
+                      <a:endParaRPr lang="en-US" sz="1200" dirty="0">
+                        <a:latin typeface="Cambria" charset="0"/>
+                        <a:ea typeface="Cambria" charset="0"/>
+                        <a:cs typeface="Cambria" charset="0"/>
+                      </a:endParaRPr>
+                    </a:p>
+                  </a:txBody>
+                  <a:tcPr marL="73152" marR="73152" marT="45720" marB="45720" anchor="ctr">
+                    <a:lnL w="0" cap="flat" cmpd="sng" algn="ctr">
+                      <a:noFill/>
+                    </a:lnL>
+                    <a:lnR w="0" cap="flat" cmpd="sng" algn="ctr">
+                      <a:noFill/>
+                    </a:lnR>
+                    <a:lnT w="0" cap="flat" cmpd="sng" algn="ctr">
+                      <a:noFill/>
+                    </a:lnT>
+                    <a:lnB w="0" cap="flat" cmpd="sng" algn="ctr">
+                      <a:noFill/>
+                    </a:lnB>
+                  </a:tcPr>
+                </a:tc>
+                <a:tc>
+                  <a:txBody>
+                    <a:bodyPr/>
+                    <a:lstStyle/>
+                    <a:p>
+                      <a:pPr algn="l" indent="0" marL="0">
+                        <a:buNone/>
+                      </a:pPr>
+                      <a:r>
+                        <a:rPr lang="en-US" sz="1200" dirty="0">
+                          <a:solidFill>
+                            <a:srgbClr val="1A1A1A"/>
+                          </a:solidFill>
+                          <a:latin typeface="Cambria" pitchFamily="34" charset="0"/>
+                          <a:ea typeface="Cambria" pitchFamily="34" charset="-122"/>
+                          <a:cs typeface="Cambria" pitchFamily="34" charset="-120"/>
+                        </a:rPr>
+                        <a:t>+ filtro de escala relativa (0,6)</a:t>
+                      </a:r>
+                      <a:endParaRPr lang="en-US" sz="1200" dirty="0">
+                        <a:latin typeface="Cambria" charset="0"/>
+                        <a:ea typeface="Cambria" charset="0"/>
+                        <a:cs typeface="Cambria" charset="0"/>
+                      </a:endParaRPr>
+                    </a:p>
+                  </a:txBody>
+                  <a:tcPr marL="73152" marR="73152" marT="45720" marB="45720" anchor="ctr">
+                    <a:lnL w="0" cap="flat" cmpd="sng" algn="ctr">
+                      <a:noFill/>
+                    </a:lnL>
+                    <a:lnR w="0" cap="flat" cmpd="sng" algn="ctr">
+                      <a:noFill/>
+                    </a:lnR>
+                    <a:lnT w="0" cap="flat" cmpd="sng" algn="ctr">
+                      <a:noFill/>
+                    </a:lnT>
+                    <a:lnB w="0" cap="flat" cmpd="sng" algn="ctr">
+                      <a:noFill/>
+                    </a:lnB>
+                  </a:tcPr>
+                </a:tc>
+                <a:tc>
+                  <a:txBody>
+                    <a:bodyPr/>
+                    <a:lstStyle/>
+                    <a:p>
+                      <a:pPr algn="ctr" indent="0" marL="0">
+                        <a:buNone/>
+                      </a:pPr>
+                      <a:r>
+                        <a:rPr lang="en-US" sz="1200" dirty="0">
+                          <a:solidFill>
+                            <a:srgbClr val="1A1A1A"/>
+                          </a:solidFill>
+                          <a:latin typeface="Cambria" pitchFamily="34" charset="0"/>
+                          <a:ea typeface="Cambria" pitchFamily="34" charset="-122"/>
+                          <a:cs typeface="Cambria" pitchFamily="34" charset="-120"/>
+                        </a:rPr>
+                        <a:t>0,557</a:t>
+                      </a:r>
+                      <a:endParaRPr lang="en-US" sz="1200" dirty="0">
+                        <a:latin typeface="Cambria" charset="0"/>
+                        <a:ea typeface="Cambria" charset="0"/>
+                        <a:cs typeface="Cambria" charset="0"/>
+                      </a:endParaRPr>
+                    </a:p>
+                  </a:txBody>
+                  <a:tcPr marL="73152" marR="73152" marT="45720" marB="45720" anchor="ctr">
+                    <a:lnL w="0" cap="flat" cmpd="sng" algn="ctr">
+                      <a:noFill/>
+                    </a:lnL>
+                    <a:lnR w="0" cap="flat" cmpd="sng" algn="ctr">
+                      <a:noFill/>
+                    </a:lnR>
+                    <a:lnT w="0" cap="flat" cmpd="sng" algn="ctr">
+                      <a:noFill/>
+                    </a:lnT>
+                    <a:lnB w="0" cap="flat" cmpd="sng" algn="ctr">
+                      <a:noFill/>
+                    </a:lnB>
+                  </a:tcPr>
+                </a:tc>
+                <a:tc>
+                  <a:txBody>
+                    <a:bodyPr/>
+                    <a:lstStyle/>
+                    <a:p>
+                      <a:pPr algn="ctr" indent="0" marL="0">
+                        <a:buNone/>
+                      </a:pPr>
+                      <a:r>
+                        <a:rPr lang="en-US" sz="1200" dirty="0">
+                          <a:solidFill>
+                            <a:srgbClr val="1A1A1A"/>
+                          </a:solidFill>
+                          <a:latin typeface="Cambria" pitchFamily="34" charset="0"/>
+                          <a:ea typeface="Cambria" pitchFamily="34" charset="-122"/>
+                          <a:cs typeface="Cambria" pitchFamily="34" charset="-120"/>
+                        </a:rPr>
+                        <a:t>0,753</a:t>
+                      </a:r>
+                      <a:endParaRPr lang="en-US" sz="1200" dirty="0">
+                        <a:latin typeface="Cambria" charset="0"/>
+                        <a:ea typeface="Cambria" charset="0"/>
+                        <a:cs typeface="Cambria" charset="0"/>
+                      </a:endParaRPr>
+                    </a:p>
+                  </a:txBody>
+                  <a:tcPr marL="73152" marR="73152" marT="45720" marB="45720" anchor="ctr">
+                    <a:lnL w="0" cap="flat" cmpd="sng" algn="ctr">
+                      <a:noFill/>
+                    </a:lnL>
+                    <a:lnR w="0" cap="flat" cmpd="sng" algn="ctr">
+                      <a:noFill/>
+                    </a:lnR>
+                    <a:lnT w="0" cap="flat" cmpd="sng" algn="ctr">
+                      <a:noFill/>
+                    </a:lnT>
+                    <a:lnB w="0" cap="flat" cmpd="sng" algn="ctr">
+                      <a:noFill/>
+                    </a:lnB>
+                  </a:tcPr>
+                </a:tc>
+                <a:tc>
+                  <a:txBody>
+                    <a:bodyPr/>
+                    <a:lstStyle/>
+                    <a:p>
+                      <a:pPr algn="ctr" indent="0" marL="0">
+                        <a:buNone/>
+                      </a:pPr>
+                      <a:r>
+                        <a:rPr lang="en-US" sz="1200" dirty="0">
+                          <a:solidFill>
+                            <a:srgbClr val="1A1A1A"/>
+                          </a:solidFill>
+                          <a:latin typeface="Cambria" pitchFamily="34" charset="0"/>
+                          <a:ea typeface="Cambria" pitchFamily="34" charset="-122"/>
+                          <a:cs typeface="Cambria" pitchFamily="34" charset="-120"/>
+                        </a:rPr>
+                        <a:t>129</a:t>
+                      </a:r>
+                      <a:endParaRPr lang="en-US" sz="1200" dirty="0">
+                        <a:latin typeface="Cambria" charset="0"/>
+                        <a:ea typeface="Cambria" charset="0"/>
+                        <a:cs typeface="Cambria" charset="0"/>
+                      </a:endParaRPr>
+                    </a:p>
+                  </a:txBody>
+                  <a:tcPr marL="73152" marR="73152" marT="45720" marB="45720" anchor="ctr">
+                    <a:lnL w="0" cap="flat" cmpd="sng" algn="ctr">
+                      <a:noFill/>
+                    </a:lnL>
+                    <a:lnR w="0" cap="flat" cmpd="sng" algn="ctr">
+                      <a:noFill/>
+                    </a:lnR>
+                    <a:lnT w="0" cap="flat" cmpd="sng" algn="ctr">
+                      <a:noFill/>
+                    </a:lnT>
+                    <a:lnB w="0" cap="flat" cmpd="sng" algn="ctr">
+                      <a:noFill/>
+                    </a:lnB>
+                  </a:tcPr>
+                </a:tc>
+              </a:tr>
+              <a:tr h="310896">
+                <a:tc>
+                  <a:txBody>
+                    <a:bodyPr/>
+                    <a:lstStyle/>
+                    <a:p>
+                      <a:pPr algn="l" indent="0" marL="0">
+                        <a:buNone/>
+                      </a:pPr>
+                      <a:r>
+                        <a:rPr lang="en-US" sz="1200" dirty="0">
+                          <a:solidFill>
+                            <a:srgbClr val="1A1A1A"/>
+                          </a:solidFill>
+                          <a:latin typeface="Cambria" pitchFamily="34" charset="0"/>
+                          <a:ea typeface="Cambria" pitchFamily="34" charset="-122"/>
+                          <a:cs typeface="Cambria" pitchFamily="34" charset="-120"/>
+                        </a:rPr>
+                        <a:t>6</a:t>
+                      </a:r>
+                      <a:endParaRPr lang="en-US" sz="1200" dirty="0">
+                        <a:latin typeface="Cambria" charset="0"/>
+                        <a:ea typeface="Cambria" charset="0"/>
+                        <a:cs typeface="Cambria" charset="0"/>
+                      </a:endParaRPr>
+                    </a:p>
+                  </a:txBody>
+                  <a:tcPr marL="73152" marR="73152" marT="45720" marB="45720" anchor="ctr">
+                    <a:lnL w="0" cap="flat" cmpd="sng" algn="ctr">
+                      <a:noFill/>
+                    </a:lnL>
+                    <a:lnR w="0" cap="flat" cmpd="sng" algn="ctr">
+                      <a:noFill/>
+                    </a:lnR>
+                    <a:lnT w="0" cap="flat" cmpd="sng" algn="ctr">
+                      <a:noFill/>
+                    </a:lnT>
+                    <a:lnB w="0" cap="flat" cmpd="sng" algn="ctr">
+                      <a:noFill/>
+                    </a:lnB>
+                  </a:tcPr>
+                </a:tc>
+                <a:tc>
+                  <a:txBody>
+                    <a:bodyPr/>
+                    <a:lstStyle/>
+                    <a:p>
+                      <a:pPr algn="l" indent="0" marL="0">
+                        <a:buNone/>
+                      </a:pPr>
+                      <a:r>
+                        <a:rPr lang="en-US" sz="1200" b="1" dirty="0">
+                          <a:solidFill>
+                            <a:srgbClr val="1A1A1A"/>
+                          </a:solidFill>
+                          <a:latin typeface="Cambria" pitchFamily="34" charset="0"/>
+                          <a:ea typeface="Cambria" pitchFamily="34" charset="-122"/>
+                          <a:cs typeface="Cambria" pitchFamily="34" charset="-120"/>
+                        </a:rPr>
+                        <a:t>+ largo mínimo 20 frames</a:t>
+                      </a:r>
+                      <a:endParaRPr lang="en-US" sz="1200" dirty="0">
+                        <a:latin typeface="Cambria" charset="0"/>
+                        <a:ea typeface="Cambria" charset="0"/>
+                        <a:cs typeface="Cambria" charset="0"/>
+                      </a:endParaRPr>
+                    </a:p>
+                  </a:txBody>
+                  <a:tcPr marL="73152" marR="73152" marT="45720" marB="45720" anchor="ctr">
+                    <a:lnL w="0" cap="flat" cmpd="sng" algn="ctr">
+                      <a:noFill/>
+                    </a:lnL>
+                    <a:lnR w="0" cap="flat" cmpd="sng" algn="ctr">
+                      <a:noFill/>
+                    </a:lnR>
+                    <a:lnT w="0" cap="flat" cmpd="sng" algn="ctr">
+                      <a:noFill/>
+                    </a:lnT>
+                    <a:lnB w="0" cap="flat" cmpd="sng" algn="ctr">
+                      <a:noFill/>
+                    </a:lnB>
+                  </a:tcPr>
+                </a:tc>
+                <a:tc>
+                  <a:txBody>
+                    <a:bodyPr/>
+                    <a:lstStyle/>
+                    <a:p>
+                      <a:pPr algn="ctr" indent="0" marL="0">
+                        <a:buNone/>
+                      </a:pPr>
+                      <a:r>
+                        <a:rPr lang="en-US" sz="1200" b="1" dirty="0">
+                          <a:solidFill>
+                            <a:srgbClr val="1A1A1A"/>
+                          </a:solidFill>
+                          <a:latin typeface="Cambria" pitchFamily="34" charset="0"/>
+                          <a:ea typeface="Cambria" pitchFamily="34" charset="-122"/>
+                          <a:cs typeface="Cambria" pitchFamily="34" charset="-120"/>
+                        </a:rPr>
+                        <a:t>0,559</a:t>
+                      </a:r>
+                      <a:endParaRPr lang="en-US" sz="1200" dirty="0">
+                        <a:latin typeface="Cambria" charset="0"/>
+                        <a:ea typeface="Cambria" charset="0"/>
+                        <a:cs typeface="Cambria" charset="0"/>
+                      </a:endParaRPr>
+                    </a:p>
+                  </a:txBody>
+                  <a:tcPr marL="73152" marR="73152" marT="45720" marB="45720" anchor="ctr">
+                    <a:lnL w="0" cap="flat" cmpd="sng" algn="ctr">
+                      <a:noFill/>
+                    </a:lnL>
+                    <a:lnR w="0" cap="flat" cmpd="sng" algn="ctr">
+                      <a:noFill/>
+                    </a:lnR>
+                    <a:lnT w="0" cap="flat" cmpd="sng" algn="ctr">
+                      <a:noFill/>
+                    </a:lnT>
+                    <a:lnB w="0" cap="flat" cmpd="sng" algn="ctr">
+                      <a:noFill/>
+                    </a:lnB>
+                    <a:solidFill>
+                      <a:srgbClr val="FFDE91"/>
+                    </a:solidFill>
+                  </a:tcPr>
+                </a:tc>
+                <a:tc>
+                  <a:txBody>
+                    <a:bodyPr/>
+                    <a:lstStyle/>
+                    <a:p>
+                      <a:pPr algn="ctr" indent="0" marL="0">
+                        <a:buNone/>
+                      </a:pPr>
+                      <a:r>
+                        <a:rPr lang="en-US" sz="1200" dirty="0">
+                          <a:solidFill>
+                            <a:srgbClr val="1A1A1A"/>
+                          </a:solidFill>
+                          <a:latin typeface="Cambria" pitchFamily="34" charset="0"/>
+                          <a:ea typeface="Cambria" pitchFamily="34" charset="-122"/>
+                          <a:cs typeface="Cambria" pitchFamily="34" charset="-120"/>
+                        </a:rPr>
+                        <a:t>0,754</a:t>
+                      </a:r>
+                      <a:endParaRPr lang="en-US" sz="1200" dirty="0">
+                        <a:latin typeface="Cambria" charset="0"/>
+                        <a:ea typeface="Cambria" charset="0"/>
+                        <a:cs typeface="Cambria" charset="0"/>
+                      </a:endParaRPr>
+                    </a:p>
+                  </a:txBody>
+                  <a:tcPr marL="73152" marR="73152" marT="45720" marB="45720" anchor="ctr">
+                    <a:lnL w="0" cap="flat" cmpd="sng" algn="ctr">
+                      <a:noFill/>
+                    </a:lnL>
+                    <a:lnR w="0" cap="flat" cmpd="sng" algn="ctr">
+                      <a:noFill/>
+                    </a:lnR>
+                    <a:lnT w="0" cap="flat" cmpd="sng" algn="ctr">
+                      <a:noFill/>
+                    </a:lnT>
+                    <a:lnB w="0" cap="flat" cmpd="sng" algn="ctr">
+                      <a:noFill/>
+                    </a:lnB>
+                  </a:tcPr>
+                </a:tc>
+                <a:tc>
+                  <a:txBody>
+                    <a:bodyPr/>
+                    <a:lstStyle/>
+                    <a:p>
+                      <a:pPr algn="ctr" indent="0" marL="0">
+                        <a:buNone/>
+                      </a:pPr>
+                      <a:r>
+                        <a:rPr lang="en-US" sz="1200" dirty="0">
+                          <a:solidFill>
+                            <a:srgbClr val="1A1A1A"/>
+                          </a:solidFill>
+                          <a:latin typeface="Cambria" pitchFamily="34" charset="0"/>
+                          <a:ea typeface="Cambria" pitchFamily="34" charset="-122"/>
+                          <a:cs typeface="Cambria" pitchFamily="34" charset="-120"/>
+                        </a:rPr>
+                        <a:t>87</a:t>
+                      </a:r>
+                      <a:endParaRPr lang="en-US" sz="1200" dirty="0">
+                        <a:latin typeface="Cambria" charset="0"/>
+                        <a:ea typeface="Cambria" charset="0"/>
+                        <a:cs typeface="Cambria" charset="0"/>
+                      </a:endParaRPr>
+                    </a:p>
+                  </a:txBody>
+                  <a:tcPr marL="73152" marR="73152" marT="45720" marB="45720" anchor="ctr">
+                    <a:lnL w="0" cap="flat" cmpd="sng" algn="ctr">
+                      <a:noFill/>
+                    </a:lnL>
+                    <a:lnR w="0" cap="flat" cmpd="sng" algn="ctr">
+                      <a:noFill/>
+                    </a:lnR>
+                    <a:lnT w="0" cap="flat" cmpd="sng" algn="ctr">
+                      <a:noFill/>
+                    </a:lnT>
+                    <a:lnB w="0" cap="flat" cmpd="sng" algn="ctr">
+                      <a:noFill/>
+                    </a:lnB>
+                  </a:tcPr>
+                </a:tc>
+              </a:tr>
+              <a:tr h="310896">
+                <a:tc>
+                  <a:txBody>
+                    <a:bodyPr/>
+                    <a:lstStyle/>
+                    <a:p>
+                      <a:pPr algn="l" indent="0" marL="0">
+                        <a:buNone/>
+                      </a:pPr>
+                      <a:r>
+                        <a:rPr lang="en-US" sz="1200" dirty="0">
+                          <a:solidFill>
+                            <a:srgbClr val="1A1A1A"/>
+                          </a:solidFill>
+                          <a:latin typeface="Cambria" pitchFamily="34" charset="0"/>
+                          <a:ea typeface="Cambria" pitchFamily="34" charset="-122"/>
+                          <a:cs typeface="Cambria" pitchFamily="34" charset="-120"/>
+                        </a:rPr>
+                        <a:t>ctrl.</a:t>
+                      </a:r>
+                      <a:endParaRPr lang="en-US" sz="1200" dirty="0">
+                        <a:latin typeface="Cambria" charset="0"/>
+                        <a:ea typeface="Cambria" charset="0"/>
+                        <a:cs typeface="Cambria" charset="0"/>
+                      </a:endParaRPr>
+                    </a:p>
+                  </a:txBody>
+                  <a:tcPr marL="73152" marR="73152" marT="45720" marB="45720" anchor="ctr">
+                    <a:lnL w="0" cap="flat" cmpd="sng" algn="ctr">
+                      <a:noFill/>
+                    </a:lnL>
+                    <a:lnR w="0" cap="flat" cmpd="sng" algn="ctr">
+                      <a:noFill/>
+                    </a:lnR>
+                    <a:lnT w="0" cap="flat" cmpd="sng" algn="ctr">
+                      <a:noFill/>
+                    </a:lnT>
+                    <a:lnB w="19050" cap="flat" cmpd="sng" algn="ctr">
+                      <a:solidFill>
+                        <a:srgbClr val="1A1A1A"/>
+                      </a:solidFill>
+                      <a:prstDash val="solid"/>
+                      <a:round/>
+                      <a:headEnd type="none" w="med" len="med"/>
+                      <a:tailEnd type="none" w="med" len="med"/>
+                    </a:lnB>
+                  </a:tcPr>
+                </a:tc>
+                <a:tc>
+                  <a:txBody>
+                    <a:bodyPr/>
+                    <a:lstStyle/>
+                    <a:p>
+                      <a:pPr algn="l" indent="0" marL="0">
+                        <a:buNone/>
+                      </a:pPr>
+                      <a:r>
+                        <a:rPr lang="en-US" sz="1200" dirty="0">
+                          <a:solidFill>
+                            <a:srgbClr val="1A1A1A"/>
+                          </a:solidFill>
+                          <a:latin typeface="Cambria" pitchFamily="34" charset="0"/>
+                          <a:ea typeface="Cambria" pitchFamily="34" charset="-122"/>
+                          <a:cs typeface="Cambria" pitchFamily="34" charset="-120"/>
+                        </a:rPr>
+                        <a:t>paso 6 sin SAHI</a:t>
+                      </a:r>
+                      <a:endParaRPr lang="en-US" sz="1200" dirty="0">
                         <a:latin typeface="Cambria" charset="0"/>
                         <a:ea typeface="Cambria" charset="0"/>
                         <a:cs typeface="Cambria" charset="0"/>
@@ -23743,7 +25680,7 @@
                         <a:buNone/>
                       </a:pPr>
                       <a:r>
-                        <a:rPr lang="en-US" sz="1300" b="1" dirty="0">
+                        <a:rPr lang="en-US" sz="1200" dirty="0">
                           <a:solidFill>
                             <a:srgbClr val="1A1A1A"/>
                           </a:solidFill>
@@ -23751,109 +25688,9 @@
                           <a:ea typeface="Cambria" pitchFamily="34" charset="-122"/>
                           <a:cs typeface="Cambria" pitchFamily="34" charset="-120"/>
                         </a:rPr>
-                        <a:t>0,549</a:t>
+                        <a:t>0,565</a:t>
                       </a:r>
-                      <a:endParaRPr lang="en-US" sz="1300" dirty="0">
-                        <a:latin typeface="Cambria" charset="0"/>
-                        <a:ea typeface="Cambria" charset="0"/>
-                        <a:cs typeface="Cambria" charset="0"/>
-                      </a:endParaRPr>
-                    </a:p>
-                  </a:txBody>
-                  <a:tcPr marL="73152" marR="73152" marT="45720" marB="45720" anchor="ctr">
-                    <a:lnL w="0" cap="flat" cmpd="sng" algn="ctr">
-                      <a:noFill/>
-                    </a:lnL>
-                    <a:lnR w="0" cap="flat" cmpd="sng" algn="ctr">
-                      <a:noFill/>
-                    </a:lnR>
-                    <a:lnT w="0" cap="flat" cmpd="sng" algn="ctr">
-                      <a:noFill/>
-                    </a:lnT>
-                    <a:lnB w="19050" cap="flat" cmpd="sng" algn="ctr">
-                      <a:solidFill>
-                        <a:srgbClr val="1A1A1A"/>
-                      </a:solidFill>
-                      <a:prstDash val="solid"/>
-                      <a:round/>
-                      <a:headEnd type="none" w="med" len="med"/>
-                      <a:tailEnd type="none" w="med" len="med"/>
-                    </a:lnB>
-                    <a:solidFill>
-                      <a:srgbClr val="FFDE91"/>
-                    </a:solidFill>
-                  </a:tcPr>
-                </a:tc>
-                <a:tc>
-                  <a:txBody>
-                    <a:bodyPr/>
-                    <a:lstStyle/>
-                    <a:p>
-                      <a:pPr algn="ctr" indent="0" marL="0">
-                        <a:buNone/>
-                      </a:pPr>
-                      <a:r>
-                        <a:rPr lang="en-US" sz="1300" b="1" dirty="0">
-                          <a:solidFill>
-                            <a:srgbClr val="1A1A1A"/>
-                          </a:solidFill>
-                          <a:latin typeface="Cambria" pitchFamily="34" charset="0"/>
-                          <a:ea typeface="Cambria" pitchFamily="34" charset="-122"/>
-                          <a:cs typeface="Cambria" pitchFamily="34" charset="-120"/>
-                        </a:rPr>
-                        <a:t>0,754</a:t>
-                      </a:r>
-                      <a:endParaRPr lang="en-US" sz="1300" dirty="0">
-                        <a:latin typeface="Cambria" charset="0"/>
-                        <a:ea typeface="Cambria" charset="0"/>
-                        <a:cs typeface="Cambria" charset="0"/>
-                      </a:endParaRPr>
-                    </a:p>
-                  </a:txBody>
-                  <a:tcPr marL="73152" marR="73152" marT="45720" marB="45720" anchor="ctr">
-                    <a:lnL w="0" cap="flat" cmpd="sng" algn="ctr">
-                      <a:noFill/>
-                    </a:lnL>
-                    <a:lnR w="0" cap="flat" cmpd="sng" algn="ctr">
-                      <a:noFill/>
-                    </a:lnR>
-                    <a:lnT w="0" cap="flat" cmpd="sng" algn="ctr">
-                      <a:noFill/>
-                    </a:lnT>
-                    <a:lnB w="19050" cap="flat" cmpd="sng" algn="ctr">
-                      <a:solidFill>
-                        <a:srgbClr val="1A1A1A"/>
-                      </a:solidFill>
-                      <a:prstDash val="solid"/>
-                      <a:round/>
-                      <a:headEnd type="none" w="med" len="med"/>
-                      <a:tailEnd type="none" w="med" len="med"/>
-                    </a:lnB>
-                    <a:solidFill>
-                      <a:srgbClr val="FFDE91"/>
-                    </a:solidFill>
-                  </a:tcPr>
-                </a:tc>
-                <a:tc>
-                  <a:txBody>
-                    <a:bodyPr/>
-                    <a:lstStyle/>
-                    <a:p>
-                      <a:pPr algn="ctr" indent="0" marL="0">
-                        <a:buNone/>
-                      </a:pPr>
-                      <a:r>
-                        <a:rPr lang="en-US" sz="1300" dirty="0">
-                          <a:solidFill>
-                            <a:srgbClr val="1A1A1A"/>
-                          </a:solidFill>
-                          <a:latin typeface="Cambria" pitchFamily="34" charset="0"/>
-                          <a:ea typeface="Cambria" pitchFamily="34" charset="-122"/>
-                          <a:cs typeface="Cambria" pitchFamily="34" charset="-120"/>
-                        </a:rPr>
-                        <a:t>90 953</a:t>
-                      </a:r>
-                      <a:endParaRPr lang="en-US" sz="1300" dirty="0">
+                      <a:endParaRPr lang="en-US" sz="1200" dirty="0">
                         <a:latin typeface="Cambria" charset="0"/>
                         <a:ea typeface="Cambria" charset="0"/>
                         <a:cs typeface="Cambria" charset="0"/>
@@ -23890,7 +25727,7 @@
                         <a:buNone/>
                       </a:pPr>
                       <a:r>
-                        <a:rPr lang="en-US" sz="1300" b="1" dirty="0">
+                        <a:rPr lang="en-US" sz="1200" dirty="0">
                           <a:solidFill>
                             <a:srgbClr val="1A1A1A"/>
                           </a:solidFill>
@@ -23898,9 +25735,9 @@
                           <a:ea typeface="Cambria" pitchFamily="34" charset="-122"/>
                           <a:cs typeface="Cambria" pitchFamily="34" charset="-120"/>
                         </a:rPr>
-                        <a:t>0,505</a:t>
+                        <a:t>0,751</a:t>
                       </a:r>
-                      <a:endParaRPr lang="en-US" sz="1300" dirty="0">
+                      <a:endParaRPr lang="en-US" sz="1200" dirty="0">
                         <a:latin typeface="Cambria" charset="0"/>
                         <a:ea typeface="Cambria" charset="0"/>
                         <a:cs typeface="Cambria" charset="0"/>
@@ -23926,9 +25763,6 @@
                       <a:headEnd type="none" w="med" len="med"/>
                       <a:tailEnd type="none" w="med" len="med"/>
                     </a:lnB>
-                    <a:solidFill>
-                      <a:srgbClr val="FFDE91"/>
-                    </a:solidFill>
                   </a:tcPr>
                 </a:tc>
                 <a:tc>
@@ -23940,7 +25774,7 @@
                         <a:buNone/>
                       </a:pPr>
                       <a:r>
-                        <a:rPr lang="en-US" sz="1300" b="1" dirty="0">
+                        <a:rPr lang="en-US" sz="1200" dirty="0">
                           <a:solidFill>
                             <a:srgbClr val="1A1A1A"/>
                           </a:solidFill>
@@ -23948,59 +25782,9 @@
                           <a:ea typeface="Cambria" pitchFamily="34" charset="-122"/>
                           <a:cs typeface="Cambria" pitchFamily="34" charset="-120"/>
                         </a:rPr>
-                        <a:t>0,529</a:t>
+                        <a:t>109</a:t>
                       </a:r>
-                      <a:endParaRPr lang="en-US" sz="1300" dirty="0">
-                        <a:latin typeface="Cambria" charset="0"/>
-                        <a:ea typeface="Cambria" charset="0"/>
-                        <a:cs typeface="Cambria" charset="0"/>
-                      </a:endParaRPr>
-                    </a:p>
-                  </a:txBody>
-                  <a:tcPr marL="73152" marR="73152" marT="45720" marB="45720" anchor="ctr">
-                    <a:lnL w="0" cap="flat" cmpd="sng" algn="ctr">
-                      <a:noFill/>
-                    </a:lnL>
-                    <a:lnR w="0" cap="flat" cmpd="sng" algn="ctr">
-                      <a:noFill/>
-                    </a:lnR>
-                    <a:lnT w="0" cap="flat" cmpd="sng" algn="ctr">
-                      <a:noFill/>
-                    </a:lnT>
-                    <a:lnB w="19050" cap="flat" cmpd="sng" algn="ctr">
-                      <a:solidFill>
-                        <a:srgbClr val="1A1A1A"/>
-                      </a:solidFill>
-                      <a:prstDash val="solid"/>
-                      <a:round/>
-                      <a:headEnd type="none" w="med" len="med"/>
-                      <a:tailEnd type="none" w="med" len="med"/>
-                    </a:lnB>
-                    <a:solidFill>
-                      <a:srgbClr val="FFDE91"/>
-                    </a:solidFill>
-                  </a:tcPr>
-                </a:tc>
-                <a:tc>
-                  <a:txBody>
-                    <a:bodyPr/>
-                    <a:lstStyle/>
-                    <a:p>
-                      <a:pPr algn="ctr" indent="0" marL="0">
-                        <a:buNone/>
-                      </a:pPr>
-                      <a:r>
-                        <a:rPr lang="en-US" sz="1300" dirty="0">
-                          <a:solidFill>
-                            <a:srgbClr val="1A1A1A"/>
-                          </a:solidFill>
-                          <a:latin typeface="Cambria" pitchFamily="34" charset="0"/>
-                          <a:ea typeface="Cambria" pitchFamily="34" charset="-122"/>
-                          <a:cs typeface="Cambria" pitchFamily="34" charset="-120"/>
-                        </a:rPr>
-                        <a:t>≈ 13,1</a:t>
-                      </a:r>
-                      <a:endParaRPr lang="en-US" sz="1300" dirty="0">
+                      <a:endParaRPr lang="en-US" sz="1200" dirty="0">
                         <a:latin typeface="Cambria" charset="0"/>
                         <a:ea typeface="Cambria" charset="0"/>
                         <a:cs typeface="Cambria" charset="0"/>
@@ -24041,8 +25825,8 @@
         </p:nvSpPr>
         <p:spPr>
           <a:xfrm>
-            <a:off x="457200" y="3200400"/>
-            <a:ext cx="8321040" cy="1554480"/>
+            <a:off x="457200" y="3383280"/>
+            <a:ext cx="8321040" cy="1188720"/>
           </a:xfrm>
           <a:prstGeom prst="rect">
             <a:avLst/>
@@ -24056,13 +25840,13 @@
           <a:p>
             <a:pPr marL="342900" indent="-342900">
               <a:spcAft>
-                <a:spcPts val="500"/>
+                <a:spcPts val="400"/>
               </a:spcAft>
               <a:buSzPct val="100000"/>
               <a:buChar char="●"/>
             </a:pPr>
             <a:r>
-              <a:rPr lang="en-US" sz="1250" dirty="0">
+              <a:rPr lang="en-US" sz="1150" dirty="0">
                 <a:solidFill>
                   <a:srgbClr val="1A1A1A"/>
                 </a:solidFill>
@@ -24070,20 +25854,20 @@
                 <a:ea typeface="Calibri" pitchFamily="34" charset="-122"/>
                 <a:cs typeface="Calibri" pitchFamily="34" charset="-120"/>
               </a:rPr>
-              <a:t>Mejor MOTA en 10 de 20 secuencias y mejora al método 2 en 15 de 20</a:t>
+              <a:t>La fusión aporta lo más grande (+0,08 sobre SAHI solo); el filtro de escala suma +0,015 y el largo mínimo baja los IDS de 129 a 87</a:t>
             </a:r>
-            <a:endParaRPr lang="en-US" sz="1250" dirty="0"/>
+            <a:endParaRPr lang="en-US" sz="1150" dirty="0"/>
           </a:p>
           <a:p>
             <a:pPr marL="342900" indent="-342900">
               <a:spcAft>
-                <a:spcPts val="500"/>
+                <a:spcPts val="400"/>
               </a:spcAft>
               <a:buSzPct val="100000"/>
               <a:buChar char="●"/>
             </a:pPr>
             <a:r>
-              <a:rPr lang="en-US" sz="1250" dirty="0">
+              <a:rPr lang="en-US" sz="1150" dirty="0">
                 <a:solidFill>
                   <a:srgbClr val="1A1A1A"/>
                 </a:solidFill>
@@ -24091,20 +25875,20 @@
                 <a:ea typeface="Calibri" pitchFamily="34" charset="-122"/>
                 <a:cs typeface="Calibri" pitchFamily="34" charset="-120"/>
               </a:rPr>
-              <a:t>Combina la precisión de YOLO26 con el recall de RT-DETR (mejor en vistas oblicuas como M0209)</a:t>
+              <a:t>SAHI no cambia el MOTA promedio (control sin SAHI: dentro del ruido), pero sube el recall de pequeños 2,4 puntos y el MOTA global (0,548)</a:t>
             </a:r>
-            <a:endParaRPr lang="en-US" sz="1250" dirty="0"/>
+            <a:endParaRPr lang="en-US" sz="1150" dirty="0"/>
           </a:p>
           <a:p>
             <a:pPr marL="342900" indent="-342900">
               <a:spcAft>
-                <a:spcPts val="500"/>
+                <a:spcPts val="400"/>
               </a:spcAft>
               <a:buSzPct val="100000"/>
               <a:buChar char="●"/>
             </a:pPr>
             <a:r>
-              <a:rPr lang="en-US" sz="1250" dirty="0">
+              <a:rPr lang="en-US" sz="1150" dirty="0">
                 <a:solidFill>
                   <a:srgbClr val="1A1A1A"/>
                 </a:solidFill>
@@ -24112,30 +25896,48 @@
                 <a:ea typeface="Calibri" pitchFamily="34" charset="-122"/>
                 <a:cs typeface="Calibri" pitchFamily="34" charset="-120"/>
               </a:rPr>
-              <a:t>Costo: dos detectores. FPS estimado a partir de las latencias medidas de cada uno; no se midió directamente</a:t>
+              <a:t>Frente a la fusión sin SAHI ni filtros, el método 4 gana en 15 de 20 secuencias. Interpolación, filtro por confianza y filtro estático: sin ganancia</a:t>
             </a:r>
-            <a:endParaRPr lang="en-US" sz="1250" dirty="0"/>
-          </a:p>
-          <a:p>
-            <a:pPr marL="342900" indent="-342900">
-              <a:spcAft>
-                <a:spcPts val="500"/>
-              </a:spcAft>
-              <a:buSzPct val="100000"/>
-              <a:buChar char="●"/>
+            <a:endParaRPr lang="en-US" sz="1150" dirty="0"/>
+          </a:p>
+        </p:txBody>
+      </p:sp>
+      <p:sp>
+        <p:nvSpPr>
+          <p:cNvPr id="5" name="Text 2"/>
+          <p:cNvSpPr txBox="1"/>
+          <p:nvPr/>
+        </p:nvSpPr>
+        <p:spPr>
+          <a:xfrm>
+            <a:off x="365760" y="4636008"/>
+            <a:ext cx="8412480" cy="256032"/>
+          </a:xfrm>
+          <a:prstGeom prst="rect">
+            <a:avLst/>
+          </a:prstGeom>
+          <a:noFill/>
+          <a:ln/>
+        </p:spPr>
+        <p:txBody>
+          <a:bodyPr wrap="square" lIns="0" tIns="0" rIns="0" bIns="0" rtlCol="0" anchor="t"/>
+          <a:lstStyle/>
+          <a:p>
+            <a:pPr indent="0" marL="0">
+              <a:buNone/>
             </a:pPr>
             <a:r>
-              <a:rPr lang="en-US" sz="1250" dirty="0">
+              <a:rPr lang="en-US" sz="1000" i="1" dirty="0">
                 <a:solidFill>
-                  <a:srgbClr val="1A1A1A"/>
+                  <a:srgbClr val="6B7280"/>
                 </a:solidFill>
                 <a:latin typeface="Calibri" pitchFamily="34" charset="0"/>
                 <a:ea typeface="Calibri" pitchFamily="34" charset="-122"/>
                 <a:cs typeface="Calibri" pitchFamily="34" charset="-120"/>
               </a:rPr>
-              <a:t>Falla de noche (M1007, M1101): suma los falsos positivos de ambos</a:t>
+              <a:t>Mismo protocolo en todas las filas: validación cruzada en 4 pliegues sobre secuencias completas (results/m4_exp/ablation_m4.csv)</a:t>
             </a:r>
-            <a:endParaRPr lang="en-US" sz="1250" dirty="0"/>
+            <a:endParaRPr lang="en-US" sz="1000" dirty="0"/>
           </a:p>
         </p:txBody>
       </p:sp>
@@ -24181,7 +25983,7 @@
             <a:pPr algn="l"/>
             <a:fld id="{F7021451-1387-4CA6-816F-3879F97B5CBC}" type="slidenum">
               <a:rPr b="0" lang="en-US"/>
-              <a:t>27</a:t>
+              <a:t>28</a:t>
             </a:fld>
             <a:endParaRPr lang="en-US"/>
           </a:p>
@@ -24195,9 +25997,9 @@
 </p:sld>
 </file>
 
-<file path=ppt/slides/slide28.xml><?xml version="1.0" encoding="utf-8"?>
+<file path=ppt/slides/slide29.xml><?xml version="1.0" encoding="utf-8"?>
 <p:sld xmlns:a="http://schemas.openxmlformats.org/drawingml/2006/main" xmlns:r="http://schemas.openxmlformats.org/officeDocument/2006/relationships" xmlns:p="http://schemas.openxmlformats.org/presentationml/2006/main">
-  <p:cSld name="Slide 28">
+  <p:cSld name="Slide 29">
     <p:spTree>
       <p:nvGrpSpPr>
         <p:cNvPr id="1" name=""/>
@@ -24255,7 +26057,7 @@
       </p:sp>
       <p:graphicFrame>
         <p:nvGraphicFramePr>
-          <p:cNvPr id="29" name="Table 0"/>
+          <p:cNvPr id="30" name="Table 0"/>
           <p:cNvGraphicFramePr>
             <a:graphicFrameLocks noGrp="1"/>
           </p:cNvGraphicFramePr>
@@ -24276,13 +26078,12 @@
             <a:tbl>
               <a:tblPr/>
               <a:tblGrid>
-                <a:gridCol w="2103120"/>
+                <a:gridCol w="2377440"/>
                 <a:gridCol w="548640"/>
-                <a:gridCol w="1188720"/>
-                <a:gridCol w="1188720"/>
-                <a:gridCol w="1188720"/>
-                <a:gridCol w="1188720"/>
-                <a:gridCol w="1005840"/>
+                <a:gridCol w="1371600"/>
+                <a:gridCol w="1371600"/>
+                <a:gridCol w="1371600"/>
+                <a:gridCol w="1371600"/>
               </a:tblGrid>
               <a:tr h="310896">
                 <a:tc>
@@ -24568,59 +26369,6 @@
                           <a:cs typeface="Cambria" pitchFamily="34" charset="-120"/>
                         </a:rPr>
                         <a:t>Método 4</a:t>
-                      </a:r>
-                      <a:endParaRPr lang="en-US" sz="1250" dirty="0">
-                        <a:latin typeface="Cambria" charset="0"/>
-                        <a:ea typeface="Cambria" charset="0"/>
-                        <a:cs typeface="Cambria" charset="0"/>
-                      </a:endParaRPr>
-                    </a:p>
-                  </a:txBody>
-                  <a:tcPr marL="73152" marR="73152" marT="45720" marB="45720" anchor="ctr">
-                    <a:lnL w="0" cap="flat" cmpd="sng" algn="ctr">
-                      <a:noFill/>
-                    </a:lnL>
-                    <a:lnR w="0" cap="flat" cmpd="sng" algn="ctr">
-                      <a:noFill/>
-                    </a:lnR>
-                    <a:lnT w="19050" cap="flat" cmpd="sng" algn="ctr">
-                      <a:solidFill>
-                        <a:srgbClr val="1A1A1A"/>
-                      </a:solidFill>
-                      <a:prstDash val="solid"/>
-                      <a:round/>
-                      <a:headEnd type="none" w="med" len="med"/>
-                      <a:tailEnd type="none" w="med" len="med"/>
-                    </a:lnT>
-                    <a:lnB w="9525" cap="flat" cmpd="sng" algn="ctr">
-                      <a:solidFill>
-                        <a:srgbClr val="1A1A1A"/>
-                      </a:solidFill>
-                      <a:prstDash val="solid"/>
-                      <a:round/>
-                      <a:headEnd type="none" w="med" len="med"/>
-                      <a:tailEnd type="none" w="med" len="med"/>
-                    </a:lnB>
-                  </a:tcPr>
-                </a:tc>
-                <a:tc>
-                  <a:txBody>
-                    <a:bodyPr/>
-                    <a:lstStyle/>
-                    <a:p>
-                      <a:pPr algn="ctr" indent="0" marL="0">
-                        <a:buNone/>
-                      </a:pPr>
-                      <a:r>
-                        <a:rPr lang="en-US" sz="1250" b="1" dirty="0">
-                          <a:solidFill>
-                            <a:srgbClr val="1A1A1A"/>
-                          </a:solidFill>
-                          <a:latin typeface="Cambria" pitchFamily="34" charset="0"/>
-                          <a:ea typeface="Cambria" pitchFamily="34" charset="-122"/>
-                          <a:cs typeface="Cambria" pitchFamily="34" charset="-120"/>
-                        </a:rPr>
-                        <a:t>Fusión</a:t>
                       </a:r>
                       <a:endParaRPr lang="en-US" sz="1250" dirty="0">
                         <a:latin typeface="Cambria" charset="0"/>
@@ -24872,48 +26620,7 @@
                         <a:buNone/>
                       </a:pPr>
                       <a:r>
-                        <a:rPr lang="en-US" sz="1250" dirty="0">
-                          <a:solidFill>
-                            <a:srgbClr val="1A1A1A"/>
-                          </a:solidFill>
-                          <a:latin typeface="Cambria" pitchFamily="34" charset="0"/>
-                          <a:ea typeface="Cambria" pitchFamily="34" charset="-122"/>
-                          <a:cs typeface="Cambria" pitchFamily="34" charset="-120"/>
-                        </a:rPr>
-                        <a:t>0,60</a:t>
-                      </a:r>
-                      <a:endParaRPr lang="en-US" sz="1250" dirty="0">
-                        <a:latin typeface="Cambria" charset="0"/>
-                        <a:ea typeface="Cambria" charset="0"/>
-                        <a:cs typeface="Cambria" charset="0"/>
-                      </a:endParaRPr>
-                    </a:p>
-                  </a:txBody>
-                  <a:tcPr marL="73152" marR="73152" marT="45720" marB="45720" anchor="ctr">
-                    <a:lnL w="0" cap="flat" cmpd="sng" algn="ctr">
-                      <a:noFill/>
-                    </a:lnL>
-                    <a:lnR w="0" cap="flat" cmpd="sng" algn="ctr">
-                      <a:noFill/>
-                    </a:lnR>
-                    <a:lnT w="0" cap="flat" cmpd="sng" algn="ctr">
-                      <a:noFill/>
-                    </a:lnT>
-                    <a:lnB w="0" cap="flat" cmpd="sng" algn="ctr">
-                      <a:noFill/>
-                    </a:lnB>
-                  </a:tcPr>
-                </a:tc>
-                <a:tc>
-                  <a:txBody>
-                    <a:bodyPr/>
-                    <a:lstStyle/>
-                    <a:p>
-                      <a:pPr algn="ctr" indent="0" marL="0">
-                        <a:buNone/>
-                      </a:pPr>
-                      <a:r>
-                        <a:rPr lang="en-US" sz="1250" dirty="0">
+                        <a:rPr lang="en-US" sz="1250" b="1" dirty="0">
                           <a:solidFill>
                             <a:srgbClr val="1A1A1A"/>
                           </a:solidFill>
@@ -24943,6 +26650,9 @@
                     <a:lnB w="0" cap="flat" cmpd="sng" algn="ctr">
                       <a:noFill/>
                     </a:lnB>
+                    <a:solidFill>
+                      <a:srgbClr val="FFDE91"/>
+                    </a:solidFill>
                   </a:tcPr>
                 </a:tc>
               </a:tr>
@@ -25161,7 +26871,7 @@
                         <a:buNone/>
                       </a:pPr>
                       <a:r>
-                        <a:rPr lang="en-US" sz="1250" dirty="0">
+                        <a:rPr lang="en-US" sz="1250" b="1" dirty="0">
                           <a:solidFill>
                             <a:srgbClr val="1A1A1A"/>
                           </a:solidFill>
@@ -25169,7 +26879,7 @@
                           <a:ea typeface="Cambria" pitchFamily="34" charset="-122"/>
                           <a:cs typeface="Cambria" pitchFamily="34" charset="-120"/>
                         </a:rPr>
-                        <a:t>0,47</a:t>
+                        <a:t>0,61</a:t>
                       </a:r>
                       <a:endParaRPr lang="en-US" sz="1250" dirty="0">
                         <a:latin typeface="Cambria" charset="0"/>
@@ -25191,47 +26901,9 @@
                     <a:lnB w="0" cap="flat" cmpd="sng" algn="ctr">
                       <a:noFill/>
                     </a:lnB>
-                  </a:tcPr>
-                </a:tc>
-                <a:tc>
-                  <a:txBody>
-                    <a:bodyPr/>
-                    <a:lstStyle/>
-                    <a:p>
-                      <a:pPr algn="ctr" indent="0" marL="0">
-                        <a:buNone/>
-                      </a:pPr>
-                      <a:r>
-                        <a:rPr lang="en-US" sz="1250" dirty="0">
-                          <a:solidFill>
-                            <a:srgbClr val="1A1A1A"/>
-                          </a:solidFill>
-                          <a:latin typeface="Cambria" pitchFamily="34" charset="0"/>
-                          <a:ea typeface="Cambria" pitchFamily="34" charset="-122"/>
-                          <a:cs typeface="Cambria" pitchFamily="34" charset="-120"/>
-                        </a:rPr>
-                        <a:t>0,59</a:t>
-                      </a:r>
-                      <a:endParaRPr lang="en-US" sz="1250" dirty="0">
-                        <a:latin typeface="Cambria" charset="0"/>
-                        <a:ea typeface="Cambria" charset="0"/>
-                        <a:cs typeface="Cambria" charset="0"/>
-                      </a:endParaRPr>
-                    </a:p>
-                  </a:txBody>
-                  <a:tcPr marL="73152" marR="73152" marT="45720" marB="45720" anchor="ctr">
-                    <a:lnL w="0" cap="flat" cmpd="sng" algn="ctr">
-                      <a:noFill/>
-                    </a:lnL>
-                    <a:lnR w="0" cap="flat" cmpd="sng" algn="ctr">
-                      <a:noFill/>
-                    </a:lnR>
-                    <a:lnT w="0" cap="flat" cmpd="sng" algn="ctr">
-                      <a:noFill/>
-                    </a:lnT>
-                    <a:lnB w="0" cap="flat" cmpd="sng" algn="ctr">
-                      <a:noFill/>
-                    </a:lnB>
+                    <a:solidFill>
+                      <a:srgbClr val="FFDE91"/>
+                    </a:solidFill>
                   </a:tcPr>
                 </a:tc>
               </a:tr>
@@ -25450,7 +27122,7 @@
                         <a:buNone/>
                       </a:pPr>
                       <a:r>
-                        <a:rPr lang="en-US" sz="1250" dirty="0">
+                        <a:rPr lang="en-US" sz="1250" b="1" dirty="0">
                           <a:solidFill>
                             <a:srgbClr val="1A1A1A"/>
                           </a:solidFill>
@@ -25458,7 +27130,7 @@
                           <a:ea typeface="Cambria" pitchFamily="34" charset="-122"/>
                           <a:cs typeface="Cambria" pitchFamily="34" charset="-120"/>
                         </a:rPr>
-                        <a:t>0,53</a:t>
+                        <a:t>0,64</a:t>
                       </a:r>
                       <a:endParaRPr lang="en-US" sz="1250" dirty="0">
                         <a:latin typeface="Cambria" charset="0"/>
@@ -25480,47 +27152,9 @@
                     <a:lnB w="0" cap="flat" cmpd="sng" algn="ctr">
                       <a:noFill/>
                     </a:lnB>
-                  </a:tcPr>
-                </a:tc>
-                <a:tc>
-                  <a:txBody>
-                    <a:bodyPr/>
-                    <a:lstStyle/>
-                    <a:p>
-                      <a:pPr algn="ctr" indent="0" marL="0">
-                        <a:buNone/>
-                      </a:pPr>
-                      <a:r>
-                        <a:rPr lang="en-US" sz="1250" dirty="0">
-                          <a:solidFill>
-                            <a:srgbClr val="1A1A1A"/>
-                          </a:solidFill>
-                          <a:latin typeface="Cambria" pitchFamily="34" charset="0"/>
-                          <a:ea typeface="Cambria" pitchFamily="34" charset="-122"/>
-                          <a:cs typeface="Cambria" pitchFamily="34" charset="-120"/>
-                        </a:rPr>
-                        <a:t>0,63</a:t>
-                      </a:r>
-                      <a:endParaRPr lang="en-US" sz="1250" dirty="0">
-                        <a:latin typeface="Cambria" charset="0"/>
-                        <a:ea typeface="Cambria" charset="0"/>
-                        <a:cs typeface="Cambria" charset="0"/>
-                      </a:endParaRPr>
-                    </a:p>
-                  </a:txBody>
-                  <a:tcPr marL="73152" marR="73152" marT="45720" marB="45720" anchor="ctr">
-                    <a:lnL w="0" cap="flat" cmpd="sng" algn="ctr">
-                      <a:noFill/>
-                    </a:lnL>
-                    <a:lnR w="0" cap="flat" cmpd="sng" algn="ctr">
-                      <a:noFill/>
-                    </a:lnR>
-                    <a:lnT w="0" cap="flat" cmpd="sng" algn="ctr">
-                      <a:noFill/>
-                    </a:lnT>
-                    <a:lnB w="0" cap="flat" cmpd="sng" algn="ctr">
-                      <a:noFill/>
-                    </a:lnB>
+                    <a:solidFill>
+                      <a:srgbClr val="FFDE91"/>
+                    </a:solidFill>
                   </a:tcPr>
                 </a:tc>
               </a:tr>
@@ -25739,7 +27373,7 @@
                         <a:buNone/>
                       </a:pPr>
                       <a:r>
-                        <a:rPr lang="en-US" sz="1250" dirty="0">
+                        <a:rPr lang="en-US" sz="1250" b="1" dirty="0">
                           <a:solidFill>
                             <a:srgbClr val="1A1A1A"/>
                           </a:solidFill>
@@ -25747,7 +27381,7 @@
                           <a:ea typeface="Cambria" pitchFamily="34" charset="-122"/>
                           <a:cs typeface="Cambria" pitchFamily="34" charset="-120"/>
                         </a:rPr>
-                        <a:t>0,54</a:t>
+                        <a:t>0,62</a:t>
                       </a:r>
                       <a:endParaRPr lang="en-US" sz="1250" dirty="0">
                         <a:latin typeface="Cambria" charset="0"/>
@@ -25769,47 +27403,9 @@
                     <a:lnB w="0" cap="flat" cmpd="sng" algn="ctr">
                       <a:noFill/>
                     </a:lnB>
-                  </a:tcPr>
-                </a:tc>
-                <a:tc>
-                  <a:txBody>
-                    <a:bodyPr/>
-                    <a:lstStyle/>
-                    <a:p>
-                      <a:pPr algn="ctr" indent="0" marL="0">
-                        <a:buNone/>
-                      </a:pPr>
-                      <a:r>
-                        <a:rPr lang="en-US" sz="1250" dirty="0">
-                          <a:solidFill>
-                            <a:srgbClr val="1A1A1A"/>
-                          </a:solidFill>
-                          <a:latin typeface="Cambria" pitchFamily="34" charset="0"/>
-                          <a:ea typeface="Cambria" pitchFamily="34" charset="-122"/>
-                          <a:cs typeface="Cambria" pitchFamily="34" charset="-120"/>
-                        </a:rPr>
-                        <a:t>0,61</a:t>
-                      </a:r>
-                      <a:endParaRPr lang="en-US" sz="1250" dirty="0">
-                        <a:latin typeface="Cambria" charset="0"/>
-                        <a:ea typeface="Cambria" charset="0"/>
-                        <a:cs typeface="Cambria" charset="0"/>
-                      </a:endParaRPr>
-                    </a:p>
-                  </a:txBody>
-                  <a:tcPr marL="73152" marR="73152" marT="45720" marB="45720" anchor="ctr">
-                    <a:lnL w="0" cap="flat" cmpd="sng" algn="ctr">
-                      <a:noFill/>
-                    </a:lnL>
-                    <a:lnR w="0" cap="flat" cmpd="sng" algn="ctr">
-                      <a:noFill/>
-                    </a:lnR>
-                    <a:lnT w="0" cap="flat" cmpd="sng" algn="ctr">
-                      <a:noFill/>
-                    </a:lnT>
-                    <a:lnB w="0" cap="flat" cmpd="sng" algn="ctr">
-                      <a:noFill/>
-                    </a:lnB>
+                    <a:solidFill>
+                      <a:srgbClr val="FFDE91"/>
+                    </a:solidFill>
                   </a:tcPr>
                 </a:tc>
               </a:tr>
@@ -26028,7 +27624,7 @@
                         <a:buNone/>
                       </a:pPr>
                       <a:r>
-                        <a:rPr lang="en-US" sz="1250" dirty="0">
+                        <a:rPr lang="en-US" sz="1250" b="1" dirty="0">
                           <a:solidFill>
                             <a:srgbClr val="1A1A1A"/>
                           </a:solidFill>
@@ -26036,7 +27632,7 @@
                           <a:ea typeface="Cambria" pitchFamily="34" charset="-122"/>
                           <a:cs typeface="Cambria" pitchFamily="34" charset="-120"/>
                         </a:rPr>
-                        <a:t>0,44</a:t>
+                        <a:t>0,57</a:t>
                       </a:r>
                       <a:endParaRPr lang="en-US" sz="1250" dirty="0">
                         <a:latin typeface="Cambria" charset="0"/>
@@ -26058,47 +27654,9 @@
                     <a:lnB w="0" cap="flat" cmpd="sng" algn="ctr">
                       <a:noFill/>
                     </a:lnB>
-                  </a:tcPr>
-                </a:tc>
-                <a:tc>
-                  <a:txBody>
-                    <a:bodyPr/>
-                    <a:lstStyle/>
-                    <a:p>
-                      <a:pPr algn="ctr" indent="0" marL="0">
-                        <a:buNone/>
-                      </a:pPr>
-                      <a:r>
-                        <a:rPr lang="en-US" sz="1250" dirty="0">
-                          <a:solidFill>
-                            <a:srgbClr val="1A1A1A"/>
-                          </a:solidFill>
-                          <a:latin typeface="Cambria" pitchFamily="34" charset="0"/>
-                          <a:ea typeface="Cambria" pitchFamily="34" charset="-122"/>
-                          <a:cs typeface="Cambria" pitchFamily="34" charset="-120"/>
-                        </a:rPr>
-                        <a:t>0,54</a:t>
-                      </a:r>
-                      <a:endParaRPr lang="en-US" sz="1250" dirty="0">
-                        <a:latin typeface="Cambria" charset="0"/>
-                        <a:ea typeface="Cambria" charset="0"/>
-                        <a:cs typeface="Cambria" charset="0"/>
-                      </a:endParaRPr>
-                    </a:p>
-                  </a:txBody>
-                  <a:tcPr marL="73152" marR="73152" marT="45720" marB="45720" anchor="ctr">
-                    <a:lnL w="0" cap="flat" cmpd="sng" algn="ctr">
-                      <a:noFill/>
-                    </a:lnL>
-                    <a:lnR w="0" cap="flat" cmpd="sng" algn="ctr">
-                      <a:noFill/>
-                    </a:lnR>
-                    <a:lnT w="0" cap="flat" cmpd="sng" algn="ctr">
-                      <a:noFill/>
-                    </a:lnT>
-                    <a:lnB w="0" cap="flat" cmpd="sng" algn="ctr">
-                      <a:noFill/>
-                    </a:lnB>
+                    <a:solidFill>
+                      <a:srgbClr val="FFDE91"/>
+                    </a:solidFill>
                   </a:tcPr>
                 </a:tc>
               </a:tr>
@@ -26317,7 +27875,7 @@
                         <a:buNone/>
                       </a:pPr>
                       <a:r>
-                        <a:rPr lang="en-US" sz="1250" dirty="0">
+                        <a:rPr lang="en-US" sz="1250" b="1" dirty="0">
                           <a:solidFill>
                             <a:srgbClr val="1A1A1A"/>
                           </a:solidFill>
@@ -26325,7 +27883,7 @@
                           <a:ea typeface="Cambria" pitchFamily="34" charset="-122"/>
                           <a:cs typeface="Cambria" pitchFamily="34" charset="-120"/>
                         </a:rPr>
-                        <a:t>0,50</a:t>
+                        <a:t>0,54</a:t>
                       </a:r>
                       <a:endParaRPr lang="en-US" sz="1250" dirty="0">
                         <a:latin typeface="Cambria" charset="0"/>
@@ -26347,47 +27905,9 @@
                     <a:lnB w="0" cap="flat" cmpd="sng" algn="ctr">
                       <a:noFill/>
                     </a:lnB>
-                  </a:tcPr>
-                </a:tc>
-                <a:tc>
-                  <a:txBody>
-                    <a:bodyPr/>
-                    <a:lstStyle/>
-                    <a:p>
-                      <a:pPr algn="ctr" indent="0" marL="0">
-                        <a:buNone/>
-                      </a:pPr>
-                      <a:r>
-                        <a:rPr lang="en-US" sz="1250" dirty="0">
-                          <a:solidFill>
-                            <a:srgbClr val="1A1A1A"/>
-                          </a:solidFill>
-                          <a:latin typeface="Cambria" pitchFamily="34" charset="0"/>
-                          <a:ea typeface="Cambria" pitchFamily="34" charset="-122"/>
-                          <a:cs typeface="Cambria" pitchFamily="34" charset="-120"/>
-                        </a:rPr>
-                        <a:t>0,53</a:t>
-                      </a:r>
-                      <a:endParaRPr lang="en-US" sz="1250" dirty="0">
-                        <a:latin typeface="Cambria" charset="0"/>
-                        <a:ea typeface="Cambria" charset="0"/>
-                        <a:cs typeface="Cambria" charset="0"/>
-                      </a:endParaRPr>
-                    </a:p>
-                  </a:txBody>
-                  <a:tcPr marL="73152" marR="73152" marT="45720" marB="45720" anchor="ctr">
-                    <a:lnL w="0" cap="flat" cmpd="sng" algn="ctr">
-                      <a:noFill/>
-                    </a:lnL>
-                    <a:lnR w="0" cap="flat" cmpd="sng" algn="ctr">
-                      <a:noFill/>
-                    </a:lnR>
-                    <a:lnT w="0" cap="flat" cmpd="sng" algn="ctr">
-                      <a:noFill/>
-                    </a:lnT>
-                    <a:lnB w="0" cap="flat" cmpd="sng" algn="ctr">
-                      <a:noFill/>
-                    </a:lnB>
+                    <a:solidFill>
+                      <a:srgbClr val="FFDE91"/>
+                    </a:solidFill>
                   </a:tcPr>
                 </a:tc>
               </a:tr>
@@ -26524,7 +28044,7 @@
                         <a:buNone/>
                       </a:pPr>
                       <a:r>
-                        <a:rPr lang="en-US" sz="1250" dirty="0">
+                        <a:rPr lang="en-US" sz="1250" b="1" dirty="0">
                           <a:solidFill>
                             <a:srgbClr val="1A1A1A"/>
                           </a:solidFill>
@@ -26554,6 +28074,9 @@
                     <a:lnB w="0" cap="flat" cmpd="sng" algn="ctr">
                       <a:noFill/>
                     </a:lnB>
+                    <a:solidFill>
+                      <a:srgbClr val="FFDE91"/>
+                    </a:solidFill>
                   </a:tcPr>
                 </a:tc>
                 <a:tc>
@@ -26614,48 +28137,7 @@
                           <a:ea typeface="Cambria" pitchFamily="34" charset="-122"/>
                           <a:cs typeface="Cambria" pitchFamily="34" charset="-120"/>
                         </a:rPr>
-                        <a:t>0,32</a:t>
-                      </a:r>
-                      <a:endParaRPr lang="en-US" sz="1250" dirty="0">
-                        <a:latin typeface="Cambria" charset="0"/>
-                        <a:ea typeface="Cambria" charset="0"/>
-                        <a:cs typeface="Cambria" charset="0"/>
-                      </a:endParaRPr>
-                    </a:p>
-                  </a:txBody>
-                  <a:tcPr marL="73152" marR="73152" marT="45720" marB="45720" anchor="ctr">
-                    <a:lnL w="0" cap="flat" cmpd="sng" algn="ctr">
-                      <a:noFill/>
-                    </a:lnL>
-                    <a:lnR w="0" cap="flat" cmpd="sng" algn="ctr">
-                      <a:noFill/>
-                    </a:lnR>
-                    <a:lnT w="0" cap="flat" cmpd="sng" algn="ctr">
-                      <a:noFill/>
-                    </a:lnT>
-                    <a:lnB w="0" cap="flat" cmpd="sng" algn="ctr">
-                      <a:noFill/>
-                    </a:lnB>
-                  </a:tcPr>
-                </a:tc>
-                <a:tc>
-                  <a:txBody>
-                    <a:bodyPr/>
-                    <a:lstStyle/>
-                    <a:p>
-                      <a:pPr algn="ctr" indent="0" marL="0">
-                        <a:buNone/>
-                      </a:pPr>
-                      <a:r>
-                        <a:rPr lang="en-US" sz="1250" dirty="0">
-                          <a:solidFill>
-                            <a:srgbClr val="1A1A1A"/>
-                          </a:solidFill>
-                          <a:latin typeface="Cambria" pitchFamily="34" charset="0"/>
-                          <a:ea typeface="Cambria" pitchFamily="34" charset="-122"/>
-                          <a:cs typeface="Cambria" pitchFamily="34" charset="-120"/>
-                        </a:rPr>
-                        <a:t>0,37</a:t>
+                        <a:t>0,40</a:t>
                       </a:r>
                       <a:endParaRPr lang="en-US" sz="1250" dirty="0">
                         <a:latin typeface="Cambria" charset="0"/>
@@ -26895,7 +28377,7 @@
                         <a:buNone/>
                       </a:pPr>
                       <a:r>
-                        <a:rPr lang="en-US" sz="1250" dirty="0">
+                        <a:rPr lang="en-US" sz="1250" b="1" dirty="0">
                           <a:solidFill>
                             <a:srgbClr val="1A1A1A"/>
                           </a:solidFill>
@@ -26903,7 +28385,7 @@
                           <a:ea typeface="Cambria" pitchFamily="34" charset="-122"/>
                           <a:cs typeface="Cambria" pitchFamily="34" charset="-120"/>
                         </a:rPr>
-                        <a:t>0,37</a:t>
+                        <a:t>0,45</a:t>
                       </a:r>
                       <a:endParaRPr lang="en-US" sz="1250" dirty="0">
                         <a:latin typeface="Cambria" charset="0"/>
@@ -26925,47 +28407,9 @@
                     <a:lnB w="0" cap="flat" cmpd="sng" algn="ctr">
                       <a:noFill/>
                     </a:lnB>
-                  </a:tcPr>
-                </a:tc>
-                <a:tc>
-                  <a:txBody>
-                    <a:bodyPr/>
-                    <a:lstStyle/>
-                    <a:p>
-                      <a:pPr algn="ctr" indent="0" marL="0">
-                        <a:buNone/>
-                      </a:pPr>
-                      <a:r>
-                        <a:rPr lang="en-US" sz="1250" dirty="0">
-                          <a:solidFill>
-                            <a:srgbClr val="1A1A1A"/>
-                          </a:solidFill>
-                          <a:latin typeface="Cambria" pitchFamily="34" charset="0"/>
-                          <a:ea typeface="Cambria" pitchFamily="34" charset="-122"/>
-                          <a:cs typeface="Cambria" pitchFamily="34" charset="-120"/>
-                        </a:rPr>
-                        <a:t>0,43</a:t>
-                      </a:r>
-                      <a:endParaRPr lang="en-US" sz="1250" dirty="0">
-                        <a:latin typeface="Cambria" charset="0"/>
-                        <a:ea typeface="Cambria" charset="0"/>
-                        <a:cs typeface="Cambria" charset="0"/>
-                      </a:endParaRPr>
-                    </a:p>
-                  </a:txBody>
-                  <a:tcPr marL="73152" marR="73152" marT="45720" marB="45720" anchor="ctr">
-                    <a:lnL w="0" cap="flat" cmpd="sng" algn="ctr">
-                      <a:noFill/>
-                    </a:lnL>
-                    <a:lnR w="0" cap="flat" cmpd="sng" algn="ctr">
-                      <a:noFill/>
-                    </a:lnR>
-                    <a:lnT w="0" cap="flat" cmpd="sng" algn="ctr">
-                      <a:noFill/>
-                    </a:lnT>
-                    <a:lnB w="0" cap="flat" cmpd="sng" algn="ctr">
-                      <a:noFill/>
-                    </a:lnB>
+                    <a:solidFill>
+                      <a:srgbClr val="FFDE91"/>
+                    </a:solidFill>
                   </a:tcPr>
                 </a:tc>
               </a:tr>
@@ -27120,7 +28564,7 @@
                         <a:buNone/>
                       </a:pPr>
                       <a:r>
-                        <a:rPr lang="en-US" sz="1250" dirty="0">
+                        <a:rPr lang="en-US" sz="1250" b="1" dirty="0">
                           <a:solidFill>
                             <a:srgbClr val="1A1A1A"/>
                           </a:solidFill>
@@ -27156,6 +28600,9 @@
                       <a:headEnd type="none" w="med" len="med"/>
                       <a:tailEnd type="none" w="med" len="med"/>
                     </a:lnB>
+                    <a:solidFill>
+                      <a:srgbClr val="FFDE91"/>
+                    </a:solidFill>
                   </a:tcPr>
                 </a:tc>
                 <a:tc>
@@ -27222,54 +28669,7 @@
                           <a:ea typeface="Cambria" pitchFamily="34" charset="-122"/>
                           <a:cs typeface="Cambria" pitchFamily="34" charset="-120"/>
                         </a:rPr>
-                        <a:t>0,14</a:t>
-                      </a:r>
-                      <a:endParaRPr lang="en-US" sz="1250" dirty="0">
-                        <a:latin typeface="Cambria" charset="0"/>
-                        <a:ea typeface="Cambria" charset="0"/>
-                        <a:cs typeface="Cambria" charset="0"/>
-                      </a:endParaRPr>
-                    </a:p>
-                  </a:txBody>
-                  <a:tcPr marL="73152" marR="73152" marT="45720" marB="45720" anchor="ctr">
-                    <a:lnL w="0" cap="flat" cmpd="sng" algn="ctr">
-                      <a:noFill/>
-                    </a:lnL>
-                    <a:lnR w="0" cap="flat" cmpd="sng" algn="ctr">
-                      <a:noFill/>
-                    </a:lnR>
-                    <a:lnT w="0" cap="flat" cmpd="sng" algn="ctr">
-                      <a:noFill/>
-                    </a:lnT>
-                    <a:lnB w="19050" cap="flat" cmpd="sng" algn="ctr">
-                      <a:solidFill>
-                        <a:srgbClr val="1A1A1A"/>
-                      </a:solidFill>
-                      <a:prstDash val="solid"/>
-                      <a:round/>
-                      <a:headEnd type="none" w="med" len="med"/>
-                      <a:tailEnd type="none" w="med" len="med"/>
-                    </a:lnB>
-                  </a:tcPr>
-                </a:tc>
-                <a:tc>
-                  <a:txBody>
-                    <a:bodyPr/>
-                    <a:lstStyle/>
-                    <a:p>
-                      <a:pPr algn="ctr" indent="0" marL="0">
-                        <a:buNone/>
-                      </a:pPr>
-                      <a:r>
-                        <a:rPr lang="en-US" sz="1250" dirty="0">
-                          <a:solidFill>
-                            <a:srgbClr val="1A1A1A"/>
-                          </a:solidFill>
-                          <a:latin typeface="Cambria" pitchFamily="34" charset="0"/>
-                          <a:ea typeface="Cambria" pitchFamily="34" charset="-122"/>
-                          <a:cs typeface="Cambria" pitchFamily="34" charset="-120"/>
-                        </a:rPr>
-                        <a:t>0,10</a:t>
+                        <a:t>0,12</a:t>
                       </a:r>
                       <a:endParaRPr lang="en-US" sz="1250" dirty="0">
                         <a:latin typeface="Cambria" charset="0"/>
@@ -27385,7 +28785,7 @@
             <a:pPr algn="l"/>
             <a:fld id="{F7021451-1387-4CA6-816F-3879F97B5CBC}" type="slidenum">
               <a:rPr b="0" lang="en-US"/>
-              <a:t>28</a:t>
+              <a:t>29</a:t>
             </a:fld>
             <a:endParaRPr lang="en-US"/>
           </a:p>
@@ -27399,9 +28799,9 @@
 </p:sld>
 </file>
 
-<file path=ppt/slides/slide29.xml><?xml version="1.0" encoding="utf-8"?>
+<file path=ppt/slides/slide3.xml><?xml version="1.0" encoding="utf-8"?>
 <p:sld xmlns:a="http://schemas.openxmlformats.org/drawingml/2006/main" xmlns:r="http://schemas.openxmlformats.org/officeDocument/2006/relationships" xmlns:p="http://schemas.openxmlformats.org/presentationml/2006/main">
-  <p:cSld name="Slide 29">
+  <p:cSld name="Slide 3">
     <p:spTree>
       <p:nvGrpSpPr>
         <p:cNvPr id="1" name=""/>
@@ -27451,15 +28851,217 @@
                 <a:ea typeface="Calibri" pitchFamily="34" charset="-122"/>
                 <a:cs typeface="Calibri" pitchFamily="34" charset="-120"/>
               </a:rPr>
-              <a:t>Demo visual: caso exitoso</a:t>
+              <a:t>Problema y dataset</a:t>
             </a:r>
             <a:endParaRPr lang="en-US" sz="2400" dirty="0"/>
           </a:p>
         </p:txBody>
       </p:sp>
+      <p:sp>
+        <p:nvSpPr>
+          <p:cNvPr id="3" name="Text 1"/>
+          <p:cNvSpPr txBox="1"/>
+          <p:nvPr/>
+        </p:nvSpPr>
+        <p:spPr>
+          <a:xfrm>
+            <a:off x="365760" y="868680"/>
+            <a:ext cx="4023360" cy="320040"/>
+          </a:xfrm>
+          <a:prstGeom prst="rect">
+            <a:avLst/>
+          </a:prstGeom>
+          <a:noFill/>
+          <a:ln/>
+        </p:spPr>
+        <p:txBody>
+          <a:bodyPr wrap="square" lIns="0" tIns="0" rIns="0" bIns="0" rtlCol="0" anchor="t"/>
+          <a:lstStyle/>
+          <a:p>
+            <a:pPr indent="0" marL="0">
+              <a:buNone/>
+            </a:pPr>
+            <a:r>
+              <a:rPr lang="en-US" sz="1800" dirty="0">
+                <a:solidFill>
+                  <a:srgbClr val="1A1A1A"/>
+                </a:solidFill>
+                <a:latin typeface="Calibri" pitchFamily="34" charset="0"/>
+                <a:ea typeface="Calibri" pitchFamily="34" charset="-122"/>
+                <a:cs typeface="Calibri" pitchFamily="34" charset="-120"/>
+              </a:rPr>
+              <a:t>UAVDT-Benchmark (subset de test)</a:t>
+            </a:r>
+            <a:endParaRPr lang="en-US" sz="1800" dirty="0"/>
+          </a:p>
+        </p:txBody>
+      </p:sp>
+      <p:sp>
+        <p:nvSpPr>
+          <p:cNvPr id="4" name="Text 2"/>
+          <p:cNvSpPr txBox="1"/>
+          <p:nvPr/>
+        </p:nvSpPr>
+        <p:spPr>
+          <a:xfrm>
+            <a:off x="502920" y="1280160"/>
+            <a:ext cx="3840480" cy="1371600"/>
+          </a:xfrm>
+          <a:prstGeom prst="rect">
+            <a:avLst/>
+          </a:prstGeom>
+          <a:noFill/>
+          <a:ln/>
+        </p:spPr>
+        <p:txBody>
+          <a:bodyPr wrap="square" lIns="0" tIns="0" rIns="0" bIns="0" rtlCol="0" anchor="t"/>
+          <a:lstStyle/>
+          <a:p>
+            <a:pPr marL="342900" indent="-342900">
+              <a:spcAft>
+                <a:spcPts val="600"/>
+              </a:spcAft>
+              <a:buSzPct val="100000"/>
+              <a:buChar char="●"/>
+            </a:pPr>
+            <a:r>
+              <a:rPr lang="en-US" sz="1600" dirty="0">
+                <a:solidFill>
+                  <a:srgbClr val="1A1A1A"/>
+                </a:solidFill>
+                <a:latin typeface="Calibri" pitchFamily="34" charset="0"/>
+                <a:ea typeface="Calibri" pitchFamily="34" charset="-122"/>
+                <a:cs typeface="Calibri" pitchFamily="34" charset="-120"/>
+              </a:rPr>
+              <a:t>20 de las 50 secuencias (split oficial)</a:t>
+            </a:r>
+            <a:endParaRPr lang="en-US" sz="1600" dirty="0"/>
+          </a:p>
+          <a:p>
+            <a:pPr marL="342900" indent="-342900">
+              <a:spcAft>
+                <a:spcPts val="600"/>
+              </a:spcAft>
+              <a:buSzPct val="100000"/>
+              <a:buChar char="●"/>
+            </a:pPr>
+            <a:r>
+              <a:rPr lang="en-US" sz="1600" dirty="0">
+                <a:solidFill>
+                  <a:srgbClr val="1A1A1A"/>
+                </a:solidFill>
+                <a:latin typeface="Calibri" pitchFamily="34" charset="0"/>
+                <a:ea typeface="Calibri" pitchFamily="34" charset="-122"/>
+                <a:cs typeface="Calibri" pitchFamily="34" charset="-120"/>
+              </a:rPr>
+              <a:t>16 592 frames de 1024 × 540 px</a:t>
+            </a:r>
+            <a:endParaRPr lang="en-US" sz="1600" dirty="0"/>
+          </a:p>
+          <a:p>
+            <a:pPr marL="342900" indent="-342900">
+              <a:spcAft>
+                <a:spcPts val="600"/>
+              </a:spcAft>
+              <a:buSzPct val="100000"/>
+              <a:buChar char="●"/>
+            </a:pPr>
+            <a:r>
+              <a:rPr lang="en-US" sz="1600" dirty="0">
+                <a:solidFill>
+                  <a:srgbClr val="1A1A1A"/>
+                </a:solidFill>
+                <a:latin typeface="Calibri" pitchFamily="34" charset="0"/>
+                <a:ea typeface="Calibri" pitchFamily="34" charset="-122"/>
+                <a:cs typeface="Calibri" pitchFamily="34" charset="-120"/>
+              </a:rPr>
+              <a:t>340 906 cajas: car, truck y bus</a:t>
+            </a:r>
+            <a:endParaRPr lang="en-US" sz="1600" dirty="0"/>
+          </a:p>
+        </p:txBody>
+      </p:sp>
+      <p:sp>
+        <p:nvSpPr>
+          <p:cNvPr id="5" name="Text 3"/>
+          <p:cNvSpPr txBox="1"/>
+          <p:nvPr/>
+        </p:nvSpPr>
+        <p:spPr>
+          <a:xfrm>
+            <a:off x="365760" y="2880360"/>
+            <a:ext cx="3840480" cy="822960"/>
+          </a:xfrm>
+          <a:prstGeom prst="rect">
+            <a:avLst/>
+          </a:prstGeom>
+          <a:noFill/>
+          <a:ln/>
+        </p:spPr>
+        <p:txBody>
+          <a:bodyPr wrap="square" lIns="0" tIns="0" rIns="0" bIns="0" rtlCol="0" anchor="t"/>
+          <a:lstStyle/>
+          <a:p>
+            <a:pPr indent="0" marL="0">
+              <a:buNone/>
+            </a:pPr>
+            <a:r>
+              <a:rPr lang="en-US" sz="1600" dirty="0">
+                <a:solidFill>
+                  <a:srgbClr val="1A1A1A"/>
+                </a:solidFill>
+                <a:latin typeface="Calibri" pitchFamily="34" charset="0"/>
+                <a:ea typeface="Calibri" pitchFamily="34" charset="-122"/>
+                <a:cs typeface="Calibri" pitchFamily="34" charset="-120"/>
+              </a:rPr>
+              <a:t>Cada secuencia trae sus imágenes, un gt.txt con identidades y regiones ignoradas.</a:t>
+            </a:r>
+            <a:endParaRPr lang="en-US" sz="1600" dirty="0"/>
+          </a:p>
+        </p:txBody>
+      </p:sp>
+      <p:sp>
+        <p:nvSpPr>
+          <p:cNvPr id="6" name="Text 4"/>
+          <p:cNvSpPr txBox="1"/>
+          <p:nvPr/>
+        </p:nvSpPr>
+        <p:spPr>
+          <a:xfrm>
+            <a:off x="365760" y="3794760"/>
+            <a:ext cx="3840480" cy="822960"/>
+          </a:xfrm>
+          <a:prstGeom prst="rect">
+            <a:avLst/>
+          </a:prstGeom>
+          <a:noFill/>
+          <a:ln/>
+        </p:spPr>
+        <p:txBody>
+          <a:bodyPr wrap="square" lIns="0" tIns="0" rIns="0" bIns="0" rtlCol="0" anchor="t"/>
+          <a:lstStyle/>
+          <a:p>
+            <a:pPr indent="0" marL="0">
+              <a:buNone/>
+            </a:pPr>
+            <a:r>
+              <a:rPr lang="en-US" sz="1400" dirty="0">
+                <a:solidFill>
+                  <a:srgbClr val="6B7280"/>
+                </a:solidFill>
+                <a:latin typeface="Calibri" pitchFamily="34" charset="0"/>
+                <a:ea typeface="Calibri" pitchFamily="34" charset="-122"/>
+                <a:cs typeface="Calibri" pitchFamily="34" charset="-120"/>
+              </a:rPr>
+              <a:t>Retos de la vista aérea: vehículos de pocos píxeles, alta densidad, cámara en movimiento y oclusiones.</a:t>
+            </a:r>
+            <a:endParaRPr lang="en-US" sz="1400" dirty="0"/>
+          </a:p>
+        </p:txBody>
+      </p:sp>
       <p:pic>
         <p:nvPicPr>
-          <p:cNvPr id="3" name="Image 0" descr="M0403 con IDs y estela">    </p:cNvPr>
+          <p:cNvPr id="7" name="Image 0" descr="/home/claude/p4/presentacion/fig/collage.jpg">    </p:cNvPr>
           <p:cNvPicPr>
             <a:picLocks noChangeAspect="1"/>
           </p:cNvPicPr>
@@ -27473,8 +29075,8 @@
         </p:blipFill>
         <p:spPr>
           <a:xfrm>
-            <a:off x="365760" y="777240"/>
-            <a:ext cx="8412480" cy="2779776"/>
+            <a:off x="4526280" y="914400"/>
+            <a:ext cx="4343400" cy="2304288"/>
           </a:xfrm>
           <a:prstGeom prst="rect">
             <a:avLst/>
@@ -27483,14 +29085,14 @@
       </p:pic>
       <p:sp>
         <p:nvSpPr>
-          <p:cNvPr id="4" name="Text 1"/>
+          <p:cNvPr id="8" name="Text 5"/>
           <p:cNvSpPr txBox="1"/>
           <p:nvPr/>
         </p:nvSpPr>
         <p:spPr>
           <a:xfrm>
-            <a:off x="365760" y="3611880"/>
-            <a:ext cx="8412480" cy="274320"/>
+            <a:off x="4526280" y="3273552"/>
+            <a:ext cx="4343400" cy="274320"/>
           </a:xfrm>
           <a:prstGeom prst="rect">
             <a:avLst/>
@@ -27514,7 +29116,7 @@
                 <a:ea typeface="Calibri" pitchFamily="34" charset="-122"/>
                 <a:cs typeface="Calibri" pitchFamily="34" charset="-120"/>
               </a:rPr>
-              <a:t>M0403, frames 100, 130 y 160. YOLO26 + ByteTrack ajustado. Cada color es un ID; la línea es su estela de 25 frames.</a:t>
+              <a:t>Secuencias M0203, M0403, M0701 y M1301</a:t>
             </a:r>
             <a:endParaRPr lang="en-US" sz="1100" dirty="0"/>
           </a:p>
@@ -27522,14 +29124,14 @@
       </p:sp>
       <p:sp>
         <p:nvSpPr>
-          <p:cNvPr id="5" name="Text 2"/>
+          <p:cNvPr id="9" name="Text 6"/>
           <p:cNvSpPr txBox="1"/>
           <p:nvPr/>
         </p:nvSpPr>
         <p:spPr>
           <a:xfrm>
-            <a:off x="457200" y="3931920"/>
-            <a:ext cx="8321040" cy="777240"/>
+            <a:off x="365760" y="4636008"/>
+            <a:ext cx="8412480" cy="256032"/>
           </a:xfrm>
           <a:prstGeom prst="rect">
             <a:avLst/>
@@ -27541,46 +29143,21 @@
           <a:bodyPr wrap="square" lIns="0" tIns="0" rIns="0" bIns="0" rtlCol="0" anchor="t"/>
           <a:lstStyle/>
           <a:p>
-            <a:pPr marL="342900" indent="-342900">
-              <a:spcAft>
-                <a:spcPts val="600"/>
-              </a:spcAft>
-              <a:buSzPct val="100000"/>
-              <a:buChar char="●"/>
+            <a:pPr indent="0" marL="0">
+              <a:buNone/>
             </a:pPr>
             <a:r>
-              <a:rPr lang="en-US" sz="1400" dirty="0">
+              <a:rPr lang="en-US" sz="1000" i="1" dirty="0">
                 <a:solidFill>
-                  <a:srgbClr val="1A1A1A"/>
+                  <a:srgbClr val="6B7280"/>
                 </a:solidFill>
                 <a:latin typeface="Calibri" pitchFamily="34" charset="0"/>
                 <a:ea typeface="Calibri" pitchFamily="34" charset="-122"/>
                 <a:cs typeface="Calibri" pitchFamily="34" charset="-120"/>
               </a:rPr>
-              <a:t>Los IDs se mantienen en una escena densa (≈ 60 vehículos): los dos buses y los autos del carril central</a:t>
+              <a:t>Du et al. [1]</a:t>
             </a:r>
-            <a:endParaRPr lang="en-US" sz="1400" dirty="0"/>
-          </a:p>
-          <a:p>
-            <a:pPr marL="342900" indent="-342900">
-              <a:spcAft>
-                <a:spcPts val="600"/>
-              </a:spcAft>
-              <a:buSzPct val="100000"/>
-              <a:buChar char="●"/>
-            </a:pPr>
-            <a:r>
-              <a:rPr lang="en-US" sz="1400" dirty="0">
-                <a:solidFill>
-                  <a:srgbClr val="1A1A1A"/>
-                </a:solidFill>
-                <a:latin typeface="Calibri" pitchFamily="34" charset="0"/>
-                <a:ea typeface="Calibri" pitchFamily="34" charset="-122"/>
-                <a:cs typeface="Calibri" pitchFamily="34" charset="-120"/>
-              </a:rPr>
-              <a:t>MOTA 0,90 en esta secuencia con los cuatro métodos</a:t>
-            </a:r>
-            <a:endParaRPr lang="en-US" sz="1400" dirty="0"/>
+            <a:endParaRPr lang="en-US" sz="1000" dirty="0"/>
           </a:p>
         </p:txBody>
       </p:sp>
@@ -27626,7 +29203,7 @@
             <a:pPr algn="l"/>
             <a:fld id="{F7021451-1387-4CA6-816F-3879F97B5CBC}" type="slidenum">
               <a:rPr b="0" lang="en-US"/>
-              <a:t>29</a:t>
+              <a:t>3</a:t>
             </a:fld>
             <a:endParaRPr lang="en-US"/>
           </a:p>
@@ -27640,9 +29217,9 @@
 </p:sld>
 </file>
 
-<file path=ppt/slides/slide3.xml><?xml version="1.0" encoding="utf-8"?>
+<file path=ppt/slides/slide30.xml><?xml version="1.0" encoding="utf-8"?>
 <p:sld xmlns:a="http://schemas.openxmlformats.org/drawingml/2006/main" xmlns:r="http://schemas.openxmlformats.org/officeDocument/2006/relationships" xmlns:p="http://schemas.openxmlformats.org/presentationml/2006/main">
-  <p:cSld name="Slide 3">
+  <p:cSld name="Slide 30">
     <p:spTree>
       <p:nvGrpSpPr>
         <p:cNvPr id="1" name=""/>
@@ -27692,217 +29269,15 @@
                 <a:ea typeface="Calibri" pitchFamily="34" charset="-122"/>
                 <a:cs typeface="Calibri" pitchFamily="34" charset="-120"/>
               </a:rPr>
-              <a:t>Problema y dataset</a:t>
+              <a:t>Demo visual: caso exitoso</a:t>
             </a:r>
             <a:endParaRPr lang="en-US" sz="2400" dirty="0"/>
           </a:p>
         </p:txBody>
       </p:sp>
-      <p:sp>
-        <p:nvSpPr>
-          <p:cNvPr id="3" name="Text 1"/>
-          <p:cNvSpPr txBox="1"/>
-          <p:nvPr/>
-        </p:nvSpPr>
-        <p:spPr>
-          <a:xfrm>
-            <a:off x="365760" y="868680"/>
-            <a:ext cx="4023360" cy="320040"/>
-          </a:xfrm>
-          <a:prstGeom prst="rect">
-            <a:avLst/>
-          </a:prstGeom>
-          <a:noFill/>
-          <a:ln/>
-        </p:spPr>
-        <p:txBody>
-          <a:bodyPr wrap="square" lIns="0" tIns="0" rIns="0" bIns="0" rtlCol="0" anchor="t"/>
-          <a:lstStyle/>
-          <a:p>
-            <a:pPr indent="0" marL="0">
-              <a:buNone/>
-            </a:pPr>
-            <a:r>
-              <a:rPr lang="en-US" sz="1800" dirty="0">
-                <a:solidFill>
-                  <a:srgbClr val="1A1A1A"/>
-                </a:solidFill>
-                <a:latin typeface="Calibri" pitchFamily="34" charset="0"/>
-                <a:ea typeface="Calibri" pitchFamily="34" charset="-122"/>
-                <a:cs typeface="Calibri" pitchFamily="34" charset="-120"/>
-              </a:rPr>
-              <a:t>UAVDT-Benchmark (subset de test)</a:t>
-            </a:r>
-            <a:endParaRPr lang="en-US" sz="1800" dirty="0"/>
-          </a:p>
-        </p:txBody>
-      </p:sp>
-      <p:sp>
-        <p:nvSpPr>
-          <p:cNvPr id="4" name="Text 2"/>
-          <p:cNvSpPr txBox="1"/>
-          <p:nvPr/>
-        </p:nvSpPr>
-        <p:spPr>
-          <a:xfrm>
-            <a:off x="502920" y="1280160"/>
-            <a:ext cx="3840480" cy="1371600"/>
-          </a:xfrm>
-          <a:prstGeom prst="rect">
-            <a:avLst/>
-          </a:prstGeom>
-          <a:noFill/>
-          <a:ln/>
-        </p:spPr>
-        <p:txBody>
-          <a:bodyPr wrap="square" lIns="0" tIns="0" rIns="0" bIns="0" rtlCol="0" anchor="t"/>
-          <a:lstStyle/>
-          <a:p>
-            <a:pPr marL="342900" indent="-342900">
-              <a:spcAft>
-                <a:spcPts val="600"/>
-              </a:spcAft>
-              <a:buSzPct val="100000"/>
-              <a:buChar char="●"/>
-            </a:pPr>
-            <a:r>
-              <a:rPr lang="en-US" sz="1600" dirty="0">
-                <a:solidFill>
-                  <a:srgbClr val="1A1A1A"/>
-                </a:solidFill>
-                <a:latin typeface="Calibri" pitchFamily="34" charset="0"/>
-                <a:ea typeface="Calibri" pitchFamily="34" charset="-122"/>
-                <a:cs typeface="Calibri" pitchFamily="34" charset="-120"/>
-              </a:rPr>
-              <a:t>20 de las 50 secuencias (split oficial)</a:t>
-            </a:r>
-            <a:endParaRPr lang="en-US" sz="1600" dirty="0"/>
-          </a:p>
-          <a:p>
-            <a:pPr marL="342900" indent="-342900">
-              <a:spcAft>
-                <a:spcPts val="600"/>
-              </a:spcAft>
-              <a:buSzPct val="100000"/>
-              <a:buChar char="●"/>
-            </a:pPr>
-            <a:r>
-              <a:rPr lang="en-US" sz="1600" dirty="0">
-                <a:solidFill>
-                  <a:srgbClr val="1A1A1A"/>
-                </a:solidFill>
-                <a:latin typeface="Calibri" pitchFamily="34" charset="0"/>
-                <a:ea typeface="Calibri" pitchFamily="34" charset="-122"/>
-                <a:cs typeface="Calibri" pitchFamily="34" charset="-120"/>
-              </a:rPr>
-              <a:t>16 592 frames de 1024 × 540 px</a:t>
-            </a:r>
-            <a:endParaRPr lang="en-US" sz="1600" dirty="0"/>
-          </a:p>
-          <a:p>
-            <a:pPr marL="342900" indent="-342900">
-              <a:spcAft>
-                <a:spcPts val="600"/>
-              </a:spcAft>
-              <a:buSzPct val="100000"/>
-              <a:buChar char="●"/>
-            </a:pPr>
-            <a:r>
-              <a:rPr lang="en-US" sz="1600" dirty="0">
-                <a:solidFill>
-                  <a:srgbClr val="1A1A1A"/>
-                </a:solidFill>
-                <a:latin typeface="Calibri" pitchFamily="34" charset="0"/>
-                <a:ea typeface="Calibri" pitchFamily="34" charset="-122"/>
-                <a:cs typeface="Calibri" pitchFamily="34" charset="-120"/>
-              </a:rPr>
-              <a:t>340 906 cajas: car, truck y bus</a:t>
-            </a:r>
-            <a:endParaRPr lang="en-US" sz="1600" dirty="0"/>
-          </a:p>
-        </p:txBody>
-      </p:sp>
-      <p:sp>
-        <p:nvSpPr>
-          <p:cNvPr id="5" name="Text 3"/>
-          <p:cNvSpPr txBox="1"/>
-          <p:nvPr/>
-        </p:nvSpPr>
-        <p:spPr>
-          <a:xfrm>
-            <a:off x="365760" y="2880360"/>
-            <a:ext cx="3840480" cy="822960"/>
-          </a:xfrm>
-          <a:prstGeom prst="rect">
-            <a:avLst/>
-          </a:prstGeom>
-          <a:noFill/>
-          <a:ln/>
-        </p:spPr>
-        <p:txBody>
-          <a:bodyPr wrap="square" lIns="0" tIns="0" rIns="0" bIns="0" rtlCol="0" anchor="t"/>
-          <a:lstStyle/>
-          <a:p>
-            <a:pPr indent="0" marL="0">
-              <a:buNone/>
-            </a:pPr>
-            <a:r>
-              <a:rPr lang="en-US" sz="1600" dirty="0">
-                <a:solidFill>
-                  <a:srgbClr val="1A1A1A"/>
-                </a:solidFill>
-                <a:latin typeface="Calibri" pitchFamily="34" charset="0"/>
-                <a:ea typeface="Calibri" pitchFamily="34" charset="-122"/>
-                <a:cs typeface="Calibri" pitchFamily="34" charset="-120"/>
-              </a:rPr>
-              <a:t>Cada secuencia trae sus imágenes, un gt.txt con identidades y regiones ignoradas.</a:t>
-            </a:r>
-            <a:endParaRPr lang="en-US" sz="1600" dirty="0"/>
-          </a:p>
-        </p:txBody>
-      </p:sp>
-      <p:sp>
-        <p:nvSpPr>
-          <p:cNvPr id="6" name="Text 4"/>
-          <p:cNvSpPr txBox="1"/>
-          <p:nvPr/>
-        </p:nvSpPr>
-        <p:spPr>
-          <a:xfrm>
-            <a:off x="365760" y="3794760"/>
-            <a:ext cx="3840480" cy="822960"/>
-          </a:xfrm>
-          <a:prstGeom prst="rect">
-            <a:avLst/>
-          </a:prstGeom>
-          <a:noFill/>
-          <a:ln/>
-        </p:spPr>
-        <p:txBody>
-          <a:bodyPr wrap="square" lIns="0" tIns="0" rIns="0" bIns="0" rtlCol="0" anchor="t"/>
-          <a:lstStyle/>
-          <a:p>
-            <a:pPr indent="0" marL="0">
-              <a:buNone/>
-            </a:pPr>
-            <a:r>
-              <a:rPr lang="en-US" sz="1400" dirty="0">
-                <a:solidFill>
-                  <a:srgbClr val="6B7280"/>
-                </a:solidFill>
-                <a:latin typeface="Calibri" pitchFamily="34" charset="0"/>
-                <a:ea typeface="Calibri" pitchFamily="34" charset="-122"/>
-                <a:cs typeface="Calibri" pitchFamily="34" charset="-120"/>
-              </a:rPr>
-              <a:t>Retos de la vista aérea: vehículos de pocos píxeles, alta densidad, cámara en movimiento y oclusiones.</a:t>
-            </a:r>
-            <a:endParaRPr lang="en-US" sz="1400" dirty="0"/>
-          </a:p>
-        </p:txBody>
-      </p:sp>
       <p:pic>
         <p:nvPicPr>
-          <p:cNvPr id="7" name="Image 0" descr="/home/marcelino.maita/courses/deep_learning/practica-4/presentacion/fig/collage.jpg">    </p:cNvPr>
+          <p:cNvPr id="3" name="Image 0" descr="M0403 con IDs y estela">    </p:cNvPr>
           <p:cNvPicPr>
             <a:picLocks noChangeAspect="1"/>
           </p:cNvPicPr>
@@ -27916,8 +29291,8 @@
         </p:blipFill>
         <p:spPr>
           <a:xfrm>
-            <a:off x="4526280" y="914400"/>
-            <a:ext cx="4343400" cy="2304288"/>
+            <a:off x="365760" y="777240"/>
+            <a:ext cx="8412480" cy="2779776"/>
           </a:xfrm>
           <a:prstGeom prst="rect">
             <a:avLst/>
@@ -27926,14 +29301,14 @@
       </p:pic>
       <p:sp>
         <p:nvSpPr>
-          <p:cNvPr id="8" name="Text 5"/>
+          <p:cNvPr id="4" name="Text 1"/>
           <p:cNvSpPr txBox="1"/>
           <p:nvPr/>
         </p:nvSpPr>
         <p:spPr>
           <a:xfrm>
-            <a:off x="4526280" y="3273552"/>
-            <a:ext cx="4343400" cy="274320"/>
+            <a:off x="365760" y="3611880"/>
+            <a:ext cx="8412480" cy="274320"/>
           </a:xfrm>
           <a:prstGeom prst="rect">
             <a:avLst/>
@@ -27957,7 +29332,7 @@
                 <a:ea typeface="Calibri" pitchFamily="34" charset="-122"/>
                 <a:cs typeface="Calibri" pitchFamily="34" charset="-120"/>
               </a:rPr>
-              <a:t>Secuencias M0203, M0403, M0701 y M1301</a:t>
+              <a:t>M0403, frames 100, 130 y 160. YOLO26 + ByteTrack ajustado. Cada color es un ID; la línea es su estela de 25 frames.</a:t>
             </a:r>
             <a:endParaRPr lang="en-US" sz="1100" dirty="0"/>
           </a:p>
@@ -27965,14 +29340,14 @@
       </p:sp>
       <p:sp>
         <p:nvSpPr>
-          <p:cNvPr id="9" name="Text 6"/>
+          <p:cNvPr id="5" name="Text 2"/>
           <p:cNvSpPr txBox="1"/>
           <p:nvPr/>
         </p:nvSpPr>
         <p:spPr>
           <a:xfrm>
-            <a:off x="365760" y="4636008"/>
-            <a:ext cx="8412480" cy="256032"/>
+            <a:off x="457200" y="3931920"/>
+            <a:ext cx="8321040" cy="777240"/>
           </a:xfrm>
           <a:prstGeom prst="rect">
             <a:avLst/>
@@ -27984,21 +29359,46 @@
           <a:bodyPr wrap="square" lIns="0" tIns="0" rIns="0" bIns="0" rtlCol="0" anchor="t"/>
           <a:lstStyle/>
           <a:p>
-            <a:pPr indent="0" marL="0">
-              <a:buNone/>
+            <a:pPr marL="342900" indent="-342900">
+              <a:spcAft>
+                <a:spcPts val="600"/>
+              </a:spcAft>
+              <a:buSzPct val="100000"/>
+              <a:buChar char="●"/>
             </a:pPr>
             <a:r>
-              <a:rPr lang="en-US" sz="1000" i="1" dirty="0">
+              <a:rPr lang="en-US" sz="1400" dirty="0">
                 <a:solidFill>
-                  <a:srgbClr val="6B7280"/>
+                  <a:srgbClr val="1A1A1A"/>
                 </a:solidFill>
                 <a:latin typeface="Calibri" pitchFamily="34" charset="0"/>
                 <a:ea typeface="Calibri" pitchFamily="34" charset="-122"/>
                 <a:cs typeface="Calibri" pitchFamily="34" charset="-120"/>
               </a:rPr>
-              <a:t>Du et al. [1]</a:t>
+              <a:t>Los IDs se mantienen en una escena densa (≈ 60 vehículos): los dos buses y los autos del carril central</a:t>
             </a:r>
-            <a:endParaRPr lang="en-US" sz="1000" dirty="0"/>
+            <a:endParaRPr lang="en-US" sz="1400" dirty="0"/>
+          </a:p>
+          <a:p>
+            <a:pPr marL="342900" indent="-342900">
+              <a:spcAft>
+                <a:spcPts val="600"/>
+              </a:spcAft>
+              <a:buSzPct val="100000"/>
+              <a:buChar char="●"/>
+            </a:pPr>
+            <a:r>
+              <a:rPr lang="en-US" sz="1400" dirty="0">
+                <a:solidFill>
+                  <a:srgbClr val="1A1A1A"/>
+                </a:solidFill>
+                <a:latin typeface="Calibri" pitchFamily="34" charset="0"/>
+                <a:ea typeface="Calibri" pitchFamily="34" charset="-122"/>
+                <a:cs typeface="Calibri" pitchFamily="34" charset="-120"/>
+              </a:rPr>
+              <a:t>MOTA 0,90 en esta secuencia con los cuatro métodos</a:t>
+            </a:r>
+            <a:endParaRPr lang="en-US" sz="1400" dirty="0"/>
           </a:p>
         </p:txBody>
       </p:sp>
@@ -28044,7 +29444,7 @@
             <a:pPr algn="l"/>
             <a:fld id="{F7021451-1387-4CA6-816F-3879F97B5CBC}" type="slidenum">
               <a:rPr b="0" lang="en-US"/>
-              <a:t>3</a:t>
+              <a:t>30</a:t>
             </a:fld>
             <a:endParaRPr lang="en-US"/>
           </a:p>
@@ -28058,9 +29458,9 @@
 </p:sld>
 </file>
 
-<file path=ppt/slides/slide30.xml><?xml version="1.0" encoding="utf-8"?>
+<file path=ppt/slides/slide31.xml><?xml version="1.0" encoding="utf-8"?>
 <p:sld xmlns:a="http://schemas.openxmlformats.org/drawingml/2006/main" xmlns:r="http://schemas.openxmlformats.org/officeDocument/2006/relationships" xmlns:p="http://schemas.openxmlformats.org/presentationml/2006/main">
-  <p:cSld name="Slide 30">
+  <p:cSld name="Slide 31">
     <p:spTree>
       <p:nvGrpSpPr>
         <p:cNvPr id="1" name=""/>
@@ -28221,7 +29621,7 @@
             <a:pPr algn="l"/>
             <a:fld id="{F7021451-1387-4CA6-816F-3879F97B5CBC}" type="slidenum">
               <a:rPr b="0" lang="en-US"/>
-              <a:t>30</a:t>
+              <a:t>31</a:t>
             </a:fld>
             <a:endParaRPr lang="en-US"/>
           </a:p>
@@ -28235,9 +29635,9 @@
 </p:sld>
 </file>
 
-<file path=ppt/slides/slide31.xml><?xml version="1.0" encoding="utf-8"?>
+<file path=ppt/slides/slide32.xml><?xml version="1.0" encoding="utf-8"?>
 <p:sld xmlns:a="http://schemas.openxmlformats.org/drawingml/2006/main" xmlns:r="http://schemas.openxmlformats.org/officeDocument/2006/relationships" xmlns:p="http://schemas.openxmlformats.org/presentationml/2006/main">
-  <p:cSld name="Slide 31">
+  <p:cSld name="Slide 32">
     <p:spTree>
       <p:nvGrpSpPr>
         <p:cNvPr id="1" name=""/>
@@ -28350,7 +29750,7 @@
                 <a:ea typeface="Calibri" pitchFamily="34" charset="-122"/>
                 <a:cs typeface="Calibri" pitchFamily="34" charset="-120"/>
               </a:rPr>
-              <a:t>M1101 (noche). Los tres métodos detectan bien los vehículos de la calzada, pero suman falsos positivos: autos aparcados y luces que el GT no anota. MOTA: −0,13 / −0,51 / −0,42.</a:t>
+              <a:t>M1101 (noche). Los vehículos de la calzada se detectan bien, pero aparecen cajas pequeñas que el GT no anota (luces, objetos lejanos). MOTA: −0,13 / −0,51 / −0,42; con el filtro de escala, el método 4 llega a −0,19.</a:t>
             </a:r>
             <a:endParaRPr lang="en-US" sz="1300" dirty="0"/>
           </a:p>
@@ -28398,7 +29798,7 @@
             <a:pPr algn="l"/>
             <a:fld id="{F7021451-1387-4CA6-816F-3879F97B5CBC}" type="slidenum">
               <a:rPr b="0" lang="en-US"/>
-              <a:t>31</a:t>
+              <a:t>32</a:t>
             </a:fld>
             <a:endParaRPr lang="en-US"/>
           </a:p>
@@ -28412,9 +29812,9 @@
 </p:sld>
 </file>
 
-<file path=ppt/slides/slide32.xml><?xml version="1.0" encoding="utf-8"?>
+<file path=ppt/slides/slide33.xml><?xml version="1.0" encoding="utf-8"?>
 <p:sld xmlns:a="http://schemas.openxmlformats.org/drawingml/2006/main" xmlns:r="http://schemas.openxmlformats.org/officeDocument/2006/relationships" xmlns:p="http://schemas.openxmlformats.org/presentationml/2006/main">
-  <p:cSld name="Slide 32">
+  <p:cSld name="Slide 33">
     <p:spTree>
       <p:nvGrpSpPr>
         <p:cNvPr id="1" name=""/>
@@ -28478,8 +29878,8 @@
         </p:nvSpPr>
         <p:spPr>
           <a:xfrm>
-            <a:off x="548640" y="868680"/>
-            <a:ext cx="8046720" cy="3840480"/>
+            <a:off x="548640" y="777240"/>
+            <a:ext cx="8046720" cy="4069080"/>
           </a:xfrm>
           <a:prstGeom prst="rect">
             <a:avLst/>
@@ -28493,7 +29893,7 @@
           <a:p>
             <a:pPr marL="342900" indent="-342900">
               <a:spcAft>
-                <a:spcPts val="900"/>
+                <a:spcPts val="700"/>
               </a:spcAft>
               <a:buSzPct val="100000"/>
               <a:buChar char="●"/>
@@ -28507,14 +29907,14 @@
                 <a:ea typeface="Calibri" pitchFamily="34" charset="-122"/>
                 <a:cs typeface="Calibri" pitchFamily="34" charset="-120"/>
               </a:rPr>
-              <a:t>Mejor equilibrio entre los cuatro métodos: YOLO26 + ByteTrack (MOTA 0,498, 86 cambios de ID, 39 FPS)</a:t>
+              <a:t>Mejor resultado: método 4, SAHI + fusión + filtro de escala (MOTA 0,563, IDF1 0,756, 88 cambios de ID), a 12 FPS</a:t>
             </a:r>
             <a:endParaRPr lang="en-US" sz="1400" dirty="0"/>
           </a:p>
           <a:p>
             <a:pPr marL="342900" indent="-342900">
               <a:spcAft>
-                <a:spcPts val="900"/>
+                <a:spcPts val="700"/>
               </a:spcAft>
               <a:buSzPct val="100000"/>
               <a:buChar char="●"/>
@@ -28528,14 +29928,14 @@
                 <a:ea typeface="Calibri" pitchFamily="34" charset="-122"/>
                 <a:cs typeface="Calibri" pitchFamily="34" charset="-120"/>
               </a:rPr>
-              <a:t>Ajustar los hiperparámetros pesó más que la arquitectura: con validación cruzada, RT-DETR pasó de MOTA −1,13 a 0,40</a:t>
+              <a:t>Mejor equilibrio velocidad–precisión: YOLO26 + ByteTrack (MOTA 0,498, 86 cambios de ID, 39 FPS)</a:t>
             </a:r>
             <a:endParaRPr lang="en-US" sz="1400" dirty="0"/>
           </a:p>
           <a:p>
             <a:pPr marL="342900" indent="-342900">
               <a:spcAft>
-                <a:spcPts val="900"/>
+                <a:spcPts val="700"/>
               </a:spcAft>
               <a:buSzPct val="100000"/>
               <a:buChar char="●"/>
@@ -28549,14 +29949,14 @@
                 <a:ea typeface="Calibri" pitchFamily="34" charset="-122"/>
                 <a:cs typeface="Calibri" pitchFamily="34" charset="-120"/>
               </a:rPr>
-              <a:t>ByteTrack cambia mucho menos de ID que SORT: 86 frente a 1 141</a:t>
+              <a:t>Ajustar pesó más que la arquitectura: con validación cruzada, RT-DETR pasó de MOTA −1,13 a 0,40; ByteTrack cambia mucho menos de ID que SORT (86 frente a 1 141)</a:t>
             </a:r>
             <a:endParaRPr lang="en-US" sz="1400" dirty="0"/>
           </a:p>
           <a:p>
             <a:pPr marL="342900" indent="-342900">
               <a:spcAft>
-                <a:spcPts val="900"/>
+                <a:spcPts val="700"/>
               </a:spcAft>
               <a:buSzPct val="100000"/>
               <a:buChar char="●"/>
@@ -28570,14 +29970,14 @@
                 <a:ea typeface="Calibri" pitchFamily="34" charset="-122"/>
                 <a:cs typeface="Calibri" pitchFamily="34" charset="-120"/>
               </a:rPr>
-              <a:t>SAHI mejora algo el recall de vehículos pequeños, pero cuesta ≈ 4× en latencia; los slices de 320 px aportan poco</a:t>
+              <a:t>SAHI solo no basta: rinde como respaldo de otro detector, y su aporte se ve en los vehículos pequeños más que en el MOTA promedio</a:t>
             </a:r>
             <a:endParaRPr lang="en-US" sz="1400" dirty="0"/>
           </a:p>
           <a:p>
             <a:pPr marL="342900" indent="-342900">
               <a:spcAft>
-                <a:spcPts val="900"/>
+                <a:spcPts val="700"/>
               </a:spcAft>
               <a:buSzPct val="100000"/>
               <a:buChar char="●"/>
@@ -28591,14 +29991,35 @@
                 <a:ea typeface="Calibri" pitchFamily="34" charset="-122"/>
                 <a:cs typeface="Calibri" pitchFamily="34" charset="-120"/>
               </a:rPr>
-              <a:t>Heurística adicional: fusionar YOLO26 y RT-DETR da el mayor MOTA (0,549) e IDF1 (0,754), con dos detectores</a:t>
+              <a:t>Analizar los errores guió la heurística: los falsos positivos eran cajas demasiado pequeñas para la escena, no autos estacionados</a:t>
             </a:r>
             <a:endParaRPr lang="en-US" sz="1400" dirty="0"/>
           </a:p>
           <a:p>
             <a:pPr marL="342900" indent="-342900">
               <a:spcAft>
-                <a:spcPts val="900"/>
+                <a:spcPts val="700"/>
+              </a:spcAft>
+              <a:buSzPct val="100000"/>
+              <a:buChar char="●"/>
+            </a:pPr>
+            <a:r>
+              <a:rPr lang="en-US" sz="1400" dirty="0">
+                <a:solidFill>
+                  <a:srgbClr val="1A1A1A"/>
+                </a:solidFill>
+                <a:latin typeface="Calibri" pitchFamily="34" charset="0"/>
+                <a:ea typeface="Calibri" pitchFamily="34" charset="-122"/>
+                <a:cs typeface="Calibri" pitchFamily="34" charset="-120"/>
+              </a:rPr>
+              <a:t>Contexto: trackers recientes reportan MOTA 0,47–0,55 en UAVDT [19, 20], con otro protocolo y pesos propios, así que no es comparable directamente</a:t>
+            </a:r>
+            <a:endParaRPr lang="en-US" sz="1400" dirty="0"/>
+          </a:p>
+          <a:p>
+            <a:pPr marL="342900" indent="-342900">
+              <a:spcAft>
+                <a:spcPts val="700"/>
               </a:spcAft>
               <a:buSzPct val="100000"/>
               <a:buChar char="●"/>
@@ -28660,7 +30081,7 @@
             <a:pPr algn="l"/>
             <a:fld id="{F7021451-1387-4CA6-816F-3879F97B5CBC}" type="slidenum">
               <a:rPr b="0" lang="en-US"/>
-              <a:t>32</a:t>
+              <a:t>33</a:t>
             </a:fld>
             <a:endParaRPr lang="en-US"/>
           </a:p>
@@ -28674,9 +30095,9 @@
 </p:sld>
 </file>
 
-<file path=ppt/slides/slide33.xml><?xml version="1.0" encoding="utf-8"?>
+<file path=ppt/slides/slide34.xml><?xml version="1.0" encoding="utf-8"?>
 <p:sld xmlns:a="http://schemas.openxmlformats.org/drawingml/2006/main" xmlns:r="http://schemas.openxmlformats.org/officeDocument/2006/relationships" xmlns:p="http://schemas.openxmlformats.org/presentationml/2006/main">
-  <p:cSld name="Slide 33">
+  <p:cSld name="Slide 34">
     <p:spTree>
       <p:nvGrpSpPr>
         <p:cNvPr id="1" name=""/>
@@ -28774,7 +30195,7 @@
             <a:pPr algn="l"/>
             <a:fld id="{F7021451-1387-4CA6-816F-3879F97B5CBC}" type="slidenum">
               <a:rPr b="0" lang="en-US"/>
-              <a:t>33</a:t>
+              <a:t>34</a:t>
             </a:fld>
             <a:endParaRPr lang="en-US"/>
           </a:p>
@@ -28788,9 +30209,9 @@
 </p:sld>
 </file>
 
-<file path=ppt/slides/slide34.xml><?xml version="1.0" encoding="utf-8"?>
+<file path=ppt/slides/slide35.xml><?xml version="1.0" encoding="utf-8"?>
 <p:sld xmlns:a="http://schemas.openxmlformats.org/drawingml/2006/main" xmlns:r="http://schemas.openxmlformats.org/officeDocument/2006/relationships" xmlns:p="http://schemas.openxmlformats.org/presentationml/2006/main">
-  <p:cSld name="Slide 34">
+  <p:cSld name="Slide 35">
     <p:spTree>
       <p:nvGrpSpPr>
         <p:cNvPr id="1" name=""/>
@@ -28855,7 +30276,7 @@
         <p:spPr>
           <a:xfrm>
             <a:off x="457200" y="777240"/>
-            <a:ext cx="8229600" cy="4023360"/>
+            <a:ext cx="8229600" cy="4069080"/>
           </a:xfrm>
           <a:prstGeom prst="rect">
             <a:avLst/>
@@ -28869,12 +30290,12 @@
           <a:p>
             <a:pPr indent="0" marL="0">
               <a:spcAft>
-                <a:spcPts val="700"/>
+                <a:spcPts val="600"/>
               </a:spcAft>
               <a:buNone/>
             </a:pPr>
             <a:r>
-              <a:rPr lang="en-US" sz="1200" dirty="0">
+              <a:rPr lang="en-US" sz="1100" dirty="0">
                 <a:solidFill>
                   <a:srgbClr val="374151"/>
                 </a:solidFill>
@@ -28884,17 +30305,17 @@
               </a:rPr>
               <a:t>[1] D. Du et al., “The Unmanned Aerial Vehicle Benchmark: Object Detection and Tracking,” in ECCV, 2018.</a:t>
             </a:r>
-            <a:endParaRPr lang="en-US" sz="1200" dirty="0"/>
+            <a:endParaRPr lang="en-US" sz="1100" dirty="0"/>
           </a:p>
           <a:p>
             <a:pPr indent="0" marL="0">
               <a:spcAft>
-                <a:spcPts val="700"/>
+                <a:spcPts val="600"/>
               </a:spcAft>
               <a:buNone/>
             </a:pPr>
             <a:r>
-              <a:rPr lang="en-US" sz="1200" dirty="0">
+              <a:rPr lang="en-US" sz="1100" dirty="0">
                 <a:solidFill>
                   <a:srgbClr val="374151"/>
                 </a:solidFill>
@@ -28904,17 +30325,17 @@
               </a:rPr>
               <a:t>[2] R. E. Kalman, “A new approach to linear filtering and prediction problems,” J. Basic Eng., vol. 82, no. 1, 1960.</a:t>
             </a:r>
-            <a:endParaRPr lang="en-US" sz="1200" dirty="0"/>
+            <a:endParaRPr lang="en-US" sz="1100" dirty="0"/>
           </a:p>
           <a:p>
             <a:pPr indent="0" marL="0">
               <a:spcAft>
-                <a:spcPts val="700"/>
+                <a:spcPts val="600"/>
               </a:spcAft>
               <a:buNone/>
             </a:pPr>
             <a:r>
-              <a:rPr lang="en-US" sz="1200" dirty="0">
+              <a:rPr lang="en-US" sz="1100" dirty="0">
                 <a:solidFill>
                   <a:srgbClr val="374151"/>
                 </a:solidFill>
@@ -28924,17 +30345,17 @@
               </a:rPr>
               <a:t>[3] H. W. Kuhn, “The Hungarian method for the assignment problem,” Naval Research Logistics Quarterly, vol. 2, 1955.</a:t>
             </a:r>
-            <a:endParaRPr lang="en-US" sz="1200" dirty="0"/>
+            <a:endParaRPr lang="en-US" sz="1100" dirty="0"/>
           </a:p>
           <a:p>
             <a:pPr indent="0" marL="0">
               <a:spcAft>
-                <a:spcPts val="700"/>
+                <a:spcPts val="600"/>
               </a:spcAft>
               <a:buNone/>
             </a:pPr>
             <a:r>
-              <a:rPr lang="en-US" sz="1200" dirty="0">
+              <a:rPr lang="en-US" sz="1100" dirty="0">
                 <a:solidFill>
                   <a:srgbClr val="374151"/>
                 </a:solidFill>
@@ -28944,17 +30365,17 @@
               </a:rPr>
               <a:t>[4] A. Bewley, Z. Ge, L. Ott, F. Ramos, and B. Upcroft, “Simple online and realtime tracking,” in ICIP, 2016.</a:t>
             </a:r>
-            <a:endParaRPr lang="en-US" sz="1200" dirty="0"/>
+            <a:endParaRPr lang="en-US" sz="1100" dirty="0"/>
           </a:p>
           <a:p>
             <a:pPr indent="0" marL="0">
               <a:spcAft>
-                <a:spcPts val="700"/>
+                <a:spcPts val="600"/>
               </a:spcAft>
               <a:buNone/>
             </a:pPr>
             <a:r>
-              <a:rPr lang="en-US" sz="1200" dirty="0">
+              <a:rPr lang="en-US" sz="1100" dirty="0">
                 <a:solidFill>
                   <a:srgbClr val="374151"/>
                 </a:solidFill>
@@ -28964,17 +30385,17 @@
               </a:rPr>
               <a:t>[5] Y. Zhang et al., “ByteTrack: Multi-object tracking by associating every detection box,” in ECCV, 2022.</a:t>
             </a:r>
-            <a:endParaRPr lang="en-US" sz="1200" dirty="0"/>
+            <a:endParaRPr lang="en-US" sz="1100" dirty="0"/>
           </a:p>
           <a:p>
             <a:pPr indent="0" marL="0">
               <a:spcAft>
-                <a:spcPts val="700"/>
+                <a:spcPts val="600"/>
               </a:spcAft>
               <a:buNone/>
             </a:pPr>
             <a:r>
-              <a:rPr lang="en-US" sz="1200" dirty="0">
+              <a:rPr lang="en-US" sz="1100" dirty="0">
                 <a:solidFill>
                   <a:srgbClr val="374151"/>
                 </a:solidFill>
@@ -28984,17 +30405,17 @@
               </a:rPr>
               <a:t>[6] N. Aharon, R. Orfaig, and B.-Z. Bobrovsky, “BoT-SORT: Robust associations multi-pedestrian tracking,” arXiv:2206.14651, 2022.</a:t>
             </a:r>
-            <a:endParaRPr lang="en-US" sz="1200" dirty="0"/>
+            <a:endParaRPr lang="en-US" sz="1100" dirty="0"/>
           </a:p>
           <a:p>
             <a:pPr indent="0" marL="0">
               <a:spcAft>
-                <a:spcPts val="700"/>
+                <a:spcPts val="600"/>
               </a:spcAft>
               <a:buNone/>
             </a:pPr>
             <a:r>
-              <a:rPr lang="en-US" sz="1200" dirty="0">
+              <a:rPr lang="en-US" sz="1100" dirty="0">
                 <a:solidFill>
                   <a:srgbClr val="374151"/>
                 </a:solidFill>
@@ -29004,17 +30425,17 @@
               </a:rPr>
               <a:t>[7] F. C. Akyon, S. O. Altinuc, and A. Temizel, “Slicing aided hyper inference and fine-tuning for small object detection,” in ICIP, 2022.</a:t>
             </a:r>
-            <a:endParaRPr lang="en-US" sz="1200" dirty="0"/>
+            <a:endParaRPr lang="en-US" sz="1100" dirty="0"/>
           </a:p>
           <a:p>
             <a:pPr indent="0" marL="0">
               <a:spcAft>
-                <a:spcPts val="700"/>
+                <a:spcPts val="600"/>
               </a:spcAft>
               <a:buNone/>
             </a:pPr>
             <a:r>
-              <a:rPr lang="en-US" sz="1200" dirty="0">
+              <a:rPr lang="en-US" sz="1100" dirty="0">
                 <a:solidFill>
                   <a:srgbClr val="374151"/>
                 </a:solidFill>
@@ -29024,17 +30445,17 @@
               </a:rPr>
               <a:t>[8] N. Carion et al., “End-to-end object detection with transformers,” in ECCV, 2020.</a:t>
             </a:r>
-            <a:endParaRPr lang="en-US" sz="1200" dirty="0"/>
+            <a:endParaRPr lang="en-US" sz="1100" dirty="0"/>
           </a:p>
           <a:p>
             <a:pPr indent="0" marL="0">
               <a:spcAft>
-                <a:spcPts val="700"/>
+                <a:spcPts val="600"/>
               </a:spcAft>
               <a:buNone/>
             </a:pPr>
             <a:r>
-              <a:rPr lang="en-US" sz="1200" dirty="0">
+              <a:rPr lang="en-US" sz="1100" dirty="0">
                 <a:solidFill>
                   <a:srgbClr val="374151"/>
                 </a:solidFill>
@@ -29044,7 +30465,27 @@
               </a:rPr>
               <a:t>[9] A. Vaswani et al., “Attention is all you need,” in NeurIPS, 2017.</a:t>
             </a:r>
-            <a:endParaRPr lang="en-US" sz="1200" dirty="0"/>
+            <a:endParaRPr lang="en-US" sz="1100" dirty="0"/>
+          </a:p>
+          <a:p>
+            <a:pPr indent="0" marL="0">
+              <a:spcAft>
+                <a:spcPts val="600"/>
+              </a:spcAft>
+              <a:buNone/>
+            </a:pPr>
+            <a:r>
+              <a:rPr lang="en-US" sz="1100" dirty="0">
+                <a:solidFill>
+                  <a:srgbClr val="374151"/>
+                </a:solidFill>
+                <a:latin typeface="Calibri" pitchFamily="34" charset="0"/>
+                <a:ea typeface="Calibri" pitchFamily="34" charset="-122"/>
+                <a:cs typeface="Calibri" pitchFamily="34" charset="-120"/>
+              </a:rPr>
+              <a:t>[10] W. Lv et al., “RT-DETR: DETRs beat YOLOs on real-time object detection,” in CVPR, 2024.</a:t>
+            </a:r>
+            <a:endParaRPr lang="en-US" sz="1100" dirty="0"/>
           </a:p>
         </p:txBody>
       </p:sp>
@@ -29090,7 +30531,7 @@
             <a:pPr algn="l"/>
             <a:fld id="{F7021451-1387-4CA6-816F-3879F97B5CBC}" type="slidenum">
               <a:rPr b="0" lang="en-US"/>
-              <a:t>34</a:t>
+              <a:t>35</a:t>
             </a:fld>
             <a:endParaRPr lang="en-US"/>
           </a:p>
@@ -29104,9 +30545,9 @@
 </p:sld>
 </file>
 
-<file path=ppt/slides/slide35.xml><?xml version="1.0" encoding="utf-8"?>
+<file path=ppt/slides/slide36.xml><?xml version="1.0" encoding="utf-8"?>
 <p:sld xmlns:a="http://schemas.openxmlformats.org/drawingml/2006/main" xmlns:r="http://schemas.openxmlformats.org/officeDocument/2006/relationships" xmlns:p="http://schemas.openxmlformats.org/presentationml/2006/main">
-  <p:cSld name="Slide 35">
+  <p:cSld name="Slide 36">
     <p:spTree>
       <p:nvGrpSpPr>
         <p:cNvPr id="1" name=""/>
@@ -29171,7 +30612,7 @@
         <p:spPr>
           <a:xfrm>
             <a:off x="457200" y="777240"/>
-            <a:ext cx="8229600" cy="4023360"/>
+            <a:ext cx="8229600" cy="4069080"/>
           </a:xfrm>
           <a:prstGeom prst="rect">
             <a:avLst/>
@@ -29185,32 +30626,12 @@
           <a:p>
             <a:pPr indent="0" marL="0">
               <a:spcAft>
-                <a:spcPts val="700"/>
+                <a:spcPts val="600"/>
               </a:spcAft>
               <a:buNone/>
             </a:pPr>
             <a:r>
-              <a:rPr lang="en-US" sz="1200" dirty="0">
-                <a:solidFill>
-                  <a:srgbClr val="374151"/>
-                </a:solidFill>
-                <a:latin typeface="Calibri" pitchFamily="34" charset="0"/>
-                <a:ea typeface="Calibri" pitchFamily="34" charset="-122"/>
-                <a:cs typeface="Calibri" pitchFamily="34" charset="-120"/>
-              </a:rPr>
-              <a:t>[10] W. Lv et al., “RT-DETR: DETRs beat YOLOs on real-time object detection,” in CVPR, 2024.</a:t>
-            </a:r>
-            <a:endParaRPr lang="en-US" sz="1200" dirty="0"/>
-          </a:p>
-          <a:p>
-            <a:pPr indent="0" marL="0">
-              <a:spcAft>
-                <a:spcPts val="700"/>
-              </a:spcAft>
-              <a:buNone/>
-            </a:pPr>
-            <a:r>
-              <a:rPr lang="en-US" sz="1200" dirty="0">
+              <a:rPr lang="en-US" sz="1100" dirty="0">
                 <a:solidFill>
                   <a:srgbClr val="374151"/>
                 </a:solidFill>
@@ -29220,17 +30641,17 @@
               </a:rPr>
               <a:t>[11] Y. Peng et al., “D-FINE: Redefine regression task in DETRs as fine-grained distribution refinement,” arXiv:2410.13842, 2024.</a:t>
             </a:r>
-            <a:endParaRPr lang="en-US" sz="1200" dirty="0"/>
+            <a:endParaRPr lang="en-US" sz="1100" dirty="0"/>
           </a:p>
           <a:p>
             <a:pPr indent="0" marL="0">
               <a:spcAft>
-                <a:spcPts val="700"/>
+                <a:spcPts val="600"/>
               </a:spcAft>
               <a:buNone/>
             </a:pPr>
             <a:r>
-              <a:rPr lang="en-US" sz="1200" dirty="0">
+              <a:rPr lang="en-US" sz="1100" dirty="0">
                 <a:solidFill>
                   <a:srgbClr val="374151"/>
                 </a:solidFill>
@@ -29240,17 +30661,17 @@
               </a:rPr>
               <a:t>[12] Z. Liao et al., “RT-DETRv4: Painlessly furthering real-time object detection with vision foundation models,” arXiv:2510.25257, 2025.</a:t>
             </a:r>
-            <a:endParaRPr lang="en-US" sz="1200" dirty="0"/>
+            <a:endParaRPr lang="en-US" sz="1100" dirty="0"/>
           </a:p>
           <a:p>
             <a:pPr indent="0" marL="0">
               <a:spcAft>
-                <a:spcPts val="700"/>
+                <a:spcPts val="600"/>
               </a:spcAft>
               <a:buNone/>
             </a:pPr>
             <a:r>
-              <a:rPr lang="en-US" sz="1200" dirty="0">
+              <a:rPr lang="en-US" sz="1100" dirty="0">
                 <a:solidFill>
                   <a:srgbClr val="374151"/>
                 </a:solidFill>
@@ -29260,17 +30681,17 @@
               </a:rPr>
               <a:t>[13] G. Jocher and J. Qiu, “Ultralytics YOLO11,” 2024; Ultralytics, “YOLO26,” docs.ultralytics.com/models/yolo26, 2025.</a:t>
             </a:r>
-            <a:endParaRPr lang="en-US" sz="1200" dirty="0"/>
+            <a:endParaRPr lang="en-US" sz="1100" dirty="0"/>
           </a:p>
           <a:p>
             <a:pPr indent="0" marL="0">
               <a:spcAft>
-                <a:spcPts val="700"/>
+                <a:spcPts val="600"/>
               </a:spcAft>
               <a:buNone/>
             </a:pPr>
             <a:r>
-              <a:rPr lang="en-US" sz="1200" dirty="0">
+              <a:rPr lang="en-US" sz="1100" dirty="0">
                 <a:solidFill>
                   <a:srgbClr val="374151"/>
                 </a:solidFill>
@@ -29280,17 +30701,17 @@
               </a:rPr>
               <a:t>[14] P. Zhu et al., “Detection and tracking meet drones challenge,” IEEE TPAMI, 2021.</a:t>
             </a:r>
-            <a:endParaRPr lang="en-US" sz="1200" dirty="0"/>
+            <a:endParaRPr lang="en-US" sz="1100" dirty="0"/>
           </a:p>
           <a:p>
             <a:pPr indent="0" marL="0">
               <a:spcAft>
-                <a:spcPts val="700"/>
+                <a:spcPts val="600"/>
               </a:spcAft>
               <a:buNone/>
             </a:pPr>
             <a:r>
-              <a:rPr lang="en-US" sz="1200" dirty="0">
+              <a:rPr lang="en-US" sz="1100" dirty="0">
                 <a:solidFill>
                   <a:srgbClr val="374151"/>
                 </a:solidFill>
@@ -29300,17 +30721,17 @@
               </a:rPr>
               <a:t>[15] K. Bernardin and R. Stiefelhagen, “Evaluating multiple object tracking performance: The CLEAR MOT metrics,” EURASIP J. Image Video Process., 2008.</a:t>
             </a:r>
-            <a:endParaRPr lang="en-US" sz="1200" dirty="0"/>
+            <a:endParaRPr lang="en-US" sz="1100" dirty="0"/>
           </a:p>
           <a:p>
             <a:pPr indent="0" marL="0">
               <a:spcAft>
-                <a:spcPts val="700"/>
+                <a:spcPts val="600"/>
               </a:spcAft>
               <a:buNone/>
             </a:pPr>
             <a:r>
-              <a:rPr lang="en-US" sz="1200" dirty="0">
+              <a:rPr lang="en-US" sz="1100" dirty="0">
                 <a:solidFill>
                   <a:srgbClr val="374151"/>
                 </a:solidFill>
@@ -29320,17 +30741,17 @@
               </a:rPr>
               <a:t>[16] E. Ristani, F. Solera, R. Zou, R. Cucchiara, and C. Tomasi, “Performance measures and a data set for multi-target, multi-camera tracking,” in ECCV Workshops, 2016.</a:t>
             </a:r>
-            <a:endParaRPr lang="en-US" sz="1200" dirty="0"/>
+            <a:endParaRPr lang="en-US" sz="1100" dirty="0"/>
           </a:p>
           <a:p>
             <a:pPr indent="0" marL="0">
               <a:spcAft>
-                <a:spcPts val="700"/>
+                <a:spcPts val="600"/>
               </a:spcAft>
               <a:buNone/>
             </a:pPr>
             <a:r>
-              <a:rPr lang="en-US" sz="1200" dirty="0">
+              <a:rPr lang="en-US" sz="1100" dirty="0">
                 <a:solidFill>
                   <a:srgbClr val="374151"/>
                 </a:solidFill>
@@ -29340,17 +30761,17 @@
               </a:rPr>
               <a:t>[17] A. Milan, L. Leal-Taixé, I. Reid, S. Roth, and K. Schindler, “MOT16: A benchmark for multi-object tracking,” arXiv:1603.00831, 2016.</a:t>
             </a:r>
-            <a:endParaRPr lang="en-US" sz="1200" dirty="0"/>
+            <a:endParaRPr lang="en-US" sz="1100" dirty="0"/>
           </a:p>
           <a:p>
             <a:pPr indent="0" marL="0">
               <a:spcAft>
-                <a:spcPts val="700"/>
+                <a:spcPts val="600"/>
               </a:spcAft>
               <a:buNone/>
             </a:pPr>
             <a:r>
-              <a:rPr lang="en-US" sz="1200" dirty="0">
+              <a:rPr lang="en-US" sz="1100" dirty="0">
                 <a:solidFill>
                   <a:srgbClr val="374151"/>
                 </a:solidFill>
@@ -29360,7 +30781,47 @@
               </a:rPr>
               <a:t>[18] R. Solovyev, W. Wang, and T. Gabruseva, “Weighted boxes fusion: Ensembling boxes from different object detection models,” Image and Vision Computing, 2021.</a:t>
             </a:r>
-            <a:endParaRPr lang="en-US" sz="1200" dirty="0"/>
+            <a:endParaRPr lang="en-US" sz="1100" dirty="0"/>
+          </a:p>
+          <a:p>
+            <a:pPr indent="0" marL="0">
+              <a:spcAft>
+                <a:spcPts val="600"/>
+              </a:spcAft>
+              <a:buNone/>
+            </a:pPr>
+            <a:r>
+              <a:rPr lang="en-US" sz="1100" dirty="0">
+                <a:solidFill>
+                  <a:srgbClr val="374151"/>
+                </a:solidFill>
+                <a:latin typeface="Calibri" pitchFamily="34" charset="0"/>
+                <a:ea typeface="Calibri" pitchFamily="34" charset="-122"/>
+                <a:cs typeface="Calibri" pitchFamily="34" charset="-120"/>
+              </a:rPr>
+              <a:t>[19] I. Song and J. Lee, “SFTrack: A robust scale and motion adaptive algorithm for tracking small and fast moving objects,” arXiv:2410.20079, 2024.</a:t>
+            </a:r>
+            <a:endParaRPr lang="en-US" sz="1100" dirty="0"/>
+          </a:p>
+          <a:p>
+            <a:pPr indent="0" marL="0">
+              <a:spcAft>
+                <a:spcPts val="600"/>
+              </a:spcAft>
+              <a:buNone/>
+            </a:pPr>
+            <a:r>
+              <a:rPr lang="en-US" sz="1100" dirty="0">
+                <a:solidFill>
+                  <a:srgbClr val="374151"/>
+                </a:solidFill>
+                <a:latin typeface="Calibri" pitchFamily="34" charset="0"/>
+                <a:ea typeface="Calibri" pitchFamily="34" charset="-122"/>
+                <a:cs typeface="Calibri" pitchFamily="34" charset="-120"/>
+              </a:rPr>
+              <a:t>[20] J. Ma et al., “Tracking the unstable: Appearance-guided motion modeling for robust multi-object tracking in UAV-captured videos,” arXiv:2508.01730, 2025.</a:t>
+            </a:r>
+            <a:endParaRPr lang="en-US" sz="1100" dirty="0"/>
           </a:p>
         </p:txBody>
       </p:sp>
@@ -29406,7 +30867,7 @@
             <a:pPr algn="l"/>
             <a:fld id="{F7021451-1387-4CA6-816F-3879F97B5CBC}" type="slidenum">
               <a:rPr b="0" lang="en-US"/>
-              <a:t>35</a:t>
+              <a:t>36</a:t>
             </a:fld>
             <a:endParaRPr lang="en-US"/>
           </a:p>
@@ -29729,7 +31190,7 @@
       </p:sp>
       <p:pic>
         <p:nvPicPr>
-          <p:cNvPr id="5" name="Image 0" descr="/home/marcelino.maita/courses/deep_learning/practica-4/presentacion/fig/gt_frame.jpg">    </p:cNvPr>
+          <p:cNvPr id="5" name="Image 0" descr="/home/claude/p4/presentacion/fig/gt_frame.jpg">    </p:cNvPr>
           <p:cNvPicPr>
             <a:picLocks noChangeAspect="1"/>
           </p:cNvPicPr>
@@ -32048,7 +33509,7 @@
                           <a:ea typeface="Cambria" pitchFamily="34" charset="-122"/>
                           <a:cs typeface="Cambria" pitchFamily="34" charset="-120"/>
                         </a:rPr>
-                        <a:t>YOLO26 + SAHI</a:t>
+                        <a:t>YOLO26 + SAHI, fusionado con RT-DETRv4</a:t>
                       </a:r>
                       <a:endParaRPr lang="en-US" sz="1400" dirty="0">
                         <a:latin typeface="Cambria" charset="0"/>
@@ -32095,7 +33556,7 @@
                           <a:ea typeface="Cambria" pitchFamily="34" charset="-122"/>
                           <a:cs typeface="Cambria" pitchFamily="34" charset="-120"/>
                         </a:rPr>
-                        <a:t>ByteTrack</a:t>
+                        <a:t>ByteTrack + filtro de escala</a:t>
                       </a:r>
                       <a:endParaRPr lang="en-US" sz="1400" dirty="0">
                         <a:latin typeface="Cambria" charset="0"/>
@@ -32142,7 +33603,7 @@
                           <a:ea typeface="Cambria" pitchFamily="34" charset="-122"/>
                           <a:cs typeface="Cambria" pitchFamily="34" charset="-120"/>
                         </a:rPr>
-                        <a:t>Detección de vehículos muy pequeños por slices</a:t>
+                        <a:t>Vehículos pequeños (SAHI) y heurísticas propias: fusión de detectores y filtro de escala</a:t>
                       </a:r>
                       <a:endParaRPr lang="en-US" sz="1400" dirty="0">
                         <a:latin typeface="Cambria" charset="0"/>
